--- a/lecons/F3/16_FORM4_LESSON13_Earthquakes.pptx
+++ b/lecons/F3/16_FORM4_LESSON13_Earthquakes.pptx
@@ -54,9 +54,17 @@
     <p:sldId id="302" r:id="rId48"/>
     <p:sldId id="303" r:id="rId49"/>
     <p:sldId id="304" r:id="rId50"/>
+    <p:sldId id="305" r:id="rId51"/>
+    <p:sldId id="306" r:id="rId52"/>
+    <p:sldId id="307" r:id="rId53"/>
+    <p:sldId id="308" r:id="rId54"/>
+    <p:sldId id="309" r:id="rId55"/>
+    <p:sldId id="310" r:id="rId56"/>
+    <p:sldId id="311" r:id="rId57"/>
+    <p:sldId id="312" r:id="rId58"/>
   </p:sldIdLst>
   <p:notesMasterIdLst>
-    <p:notesMasterId r:id="rId51"/>
+    <p:notesMasterId r:id="rId59"/>
   </p:notesMasterIdLst>
   <p:sldSz cx="12192000" cy="6858000"/>
   <p:notesSz cx="6858000" cy="12192000"/>
@@ -638,7 +646,7 @@
           <a:p>
             <a:r>
               <a:rPr lang="en-US" dirty="0"/>
-              <a:t>Listen carefully to this situation from real life. On the news, Ismaïla sees that an earthquake in Morocco in September 2023 destroyed many villages. Thousands of people died. He wonders what makes the ground shake. Think about it, because I am going to ask you some questions.</a:t>
+              <a:t>Listen carefully to this situation from real life. On the news, Ismaïla sees that an earthquake in Morocco in September 2023 destroyed many villages and killed thousands of people. He asks: "What makes the ground shake like this, and how can people protect themselves?" Think about it, because I am going to ask you some questions.</a:t>
             </a:r>
             <a:endParaRPr lang="en-US" dirty="0"/>
           </a:p>
@@ -814,7 +822,7 @@
           <a:p>
             <a:r>
               <a:rPr lang="en-US" dirty="0"/>
-              <a:t>Good. Ismaïla does not know what makes the ground shake.</a:t>
+              <a:t>Good. Ismaïla does not know what causes earthquakes and how people can protect themselves.</a:t>
             </a:r>
             <a:endParaRPr lang="en-US" dirty="0"/>
           </a:p>
@@ -1254,7 +1262,7 @@
           <a:p>
             <a:r>
               <a:rPr lang="en-US" dirty="0"/>
-              <a:t>From this situation, the action we are working towards in this lesson is the following: know what to do during an earthquake: take cover, protect your head and stay away from walls.</a:t>
+              <a:t>From this situation, the action we are working towards in this lesson is the following: know what to do during an earthquake: take cover, protect your head and stay away from walls and windows.</a:t>
             </a:r>
             <a:endParaRPr lang="en-US" dirty="0"/>
           </a:p>
@@ -1606,7 +1614,7 @@
           <a:p>
             <a:r>
               <a:rPr lang="en-US" dirty="0"/>
-              <a:t>Here is the question for Activity 1: Where does the earthquake start? What is the point just above it? Take one minute to think and write your answer in your rough notebook.</a:t>
+              <a:t>Here is the question for Activity 1: Where does the earthquake start? Take one minute to think and write your answer in your rough notebook.</a:t>
             </a:r>
             <a:endParaRPr lang="en-US" dirty="0"/>
           </a:p>
@@ -1694,7 +1702,7 @@
           <a:p>
             <a:r>
               <a:rPr lang="en-US" dirty="0"/>
-              <a:t>Let us check the answer together. It starts at the focus. The point above is the epicentre.</a:t>
+              <a:t>Let us check the answer together. At the focus.</a:t>
             </a:r>
             <a:endParaRPr lang="en-US" dirty="0"/>
           </a:p>
@@ -1782,7 +1790,7 @@
           <a:p>
             <a:r>
               <a:rPr lang="en-US" dirty="0"/>
-              <a:t>Activity 2. Look carefully at this picture: a seismograph. Observe every detail before I ask the question.</a:t>
+              <a:t>Here is the next question: What is the point on the surface just above it? Take one minute to think and write your answer in your rough notebook.</a:t>
             </a:r>
             <a:endParaRPr lang="en-US" dirty="0"/>
           </a:p>
@@ -1870,7 +1878,7 @@
           <a:p>
             <a:r>
               <a:rPr lang="en-US" dirty="0"/>
-              <a:t>Here is the question for Activity 2: What does this instrument do? Take one minute to think and write your answer in your rough notebook.</a:t>
+              <a:t>Let us check the answer together. The epicentre.</a:t>
             </a:r>
             <a:endParaRPr lang="en-US" dirty="0"/>
           </a:p>
@@ -1958,7 +1966,7 @@
           <a:p>
             <a:r>
               <a:rPr lang="en-US" dirty="0"/>
-              <a:t>Let us check the answer together. It records the shaking of the ground.</a:t>
+              <a:t>Activity 2. Look carefully at this picture: a seismograph. Observe every detail before I ask the question.</a:t>
             </a:r>
             <a:endParaRPr lang="en-US" dirty="0"/>
           </a:p>
@@ -2046,7 +2054,7 @@
           <a:p>
             <a:r>
               <a:rPr lang="en-US" dirty="0"/>
-              <a:t>Activity 3. Look carefully at this picture: houses destroyed by an earthquake. Observe every detail before I ask the question.</a:t>
+              <a:t>Here is the question for Activity 2: What does this instrument record? Take one minute to think and write your answer in your rough notebook.</a:t>
             </a:r>
             <a:endParaRPr lang="en-US" dirty="0"/>
           </a:p>
@@ -2134,7 +2142,7 @@
           <a:p>
             <a:r>
               <a:rPr lang="en-US" dirty="0"/>
-              <a:t>Here is the question for Activity 3: What is the main cause of death during an earthquake? Take one minute to think and write your answer in your rough notebook.</a:t>
+              <a:t>Let us check the answer together. The shaking (seismic waves) of the ground.</a:t>
             </a:r>
             <a:endParaRPr lang="en-US" dirty="0"/>
           </a:p>
@@ -2222,7 +2230,7 @@
           <a:p>
             <a:r>
               <a:rPr lang="en-US" dirty="0"/>
-              <a:t>Let us check the answer together. Buildings fall on people.</a:t>
+              <a:t>Activity 3. Look carefully at this picture: houses destroyed by an earthquake. Observe every detail before I ask the question.</a:t>
             </a:r>
             <a:endParaRPr lang="en-US" dirty="0"/>
           </a:p>
@@ -2310,7 +2318,7 @@
           <a:p>
             <a:r>
               <a:rPr lang="en-US" dirty="0"/>
-              <a:t>Now we are going to copy the board summary. Write the title and the headings neatly in your notebooks. I will give you enough time for each slide, so do not rush.</a:t>
+              <a:t>Here is the question for Activity 3: What is the main cause of death during an earthquake? Take one minute to think and write your answer in your rough notebook.</a:t>
             </a:r>
             <a:endParaRPr lang="en-US" dirty="0"/>
           </a:p>
@@ -2398,7 +2406,7 @@
           <a:p>
             <a:r>
               <a:rPr lang="en-US" dirty="0"/>
-              <a:t>Let us copy the definitions. The key terms of this lesson are defined as follows. On this slide we have Earthquake and Focus. Write each point on a new line, with the key term first, and explain it in your own words when we revise. When you finish, we go to the next slide.</a:t>
+              <a:t>Let us check the answer together. Buildings fall on people.</a:t>
             </a:r>
             <a:endParaRPr lang="en-US" dirty="0"/>
           </a:p>
@@ -2574,7 +2582,7 @@
           <a:p>
             <a:r>
               <a:rPr lang="en-US" dirty="0"/>
-              <a:t>We continue with the definitions. On this slide we have Epicentre. Write each point on a new line, with the key term first, and explain it in your own words when we revise.</a:t>
+              <a:t>Now we are going to copy the board summary. Write the title and the headings neatly in your notebooks. I will give you enough time for each slide, so do not rush.</a:t>
             </a:r>
             <a:endParaRPr lang="en-US" dirty="0"/>
           </a:p>
@@ -2662,7 +2670,7 @@
           <a:p>
             <a:r>
               <a:rPr lang="en-US" dirty="0"/>
-              <a:t>Let us copy Causes of Earthquakes. Earthquakes have the following causes. On this slide we have Plate movements and Volcanic eruptions. Write each point on a new line, with the key term first, and explain it in your own words when we revise. When you finish, we go to the next slide.</a:t>
+              <a:t>Let us copy the definitions. The key terms of this lesson are defined as follows. On this slide we have Earthquake and Focus. Write each point on a new line, with the key term first, and explain it in your own words when we revise. When you finish, we go to the next slide.</a:t>
             </a:r>
             <a:endParaRPr lang="en-US" dirty="0"/>
           </a:p>
@@ -2750,7 +2758,7 @@
           <a:p>
             <a:r>
               <a:rPr lang="en-US" dirty="0"/>
-              <a:t>We continue with Causes of Earthquakes. On this slide we have Human activities. Write each point on a new line, with the key term first, and explain it in your own words when we revise.</a:t>
+              <a:t>We continue with the definitions. On this slide we have Epicentre and Seismic waves. Write each point on a new line, with the key term first, and explain it in your own words when we revise.</a:t>
             </a:r>
             <a:endParaRPr lang="en-US" dirty="0"/>
           </a:p>
@@ -2838,7 +2846,7 @@
           <a:p>
             <a:r>
               <a:rPr lang="en-US" dirty="0"/>
-              <a:t>Now draw this illustration in your notebook: focus and epicentre. Give it a title and label it clearly.</a:t>
+              <a:t>Let us copy Causes of Earthquakes. Earthquakes have the following causes. Copy the point on Plate movements on the left, then draw the diagram on the right: focus and epicentre. Give it a title and label it clearly.</a:t>
             </a:r>
             <a:endParaRPr lang="en-US" dirty="0"/>
           </a:p>
@@ -2926,7 +2934,7 @@
           <a:p>
             <a:r>
               <a:rPr lang="en-US" dirty="0"/>
-              <a:t>Let us copy Manifestation and Measurement. Earthquakes are recorded and measured as follows. On this slide we have Seismograph and Richter scale. Write each point on a new line, with the key term first, and explain it in your own words when we revise.</a:t>
+              <a:t>We continue with Causes of Earthquakes. On this slide we have Volcanic eruptions, Collapse and Human activities. Write each point on a new line, with the key term first, and explain it in your own words when we revise.</a:t>
             </a:r>
             <a:endParaRPr lang="en-US" dirty="0"/>
           </a:p>
@@ -3014,7 +3022,7 @@
           <a:p>
             <a:r>
               <a:rPr lang="en-US" dirty="0"/>
-              <a:t>Let us copy Impact and Protection. Earthquakes affect people and are managed as follows. On this slide we have Impact on man and Strong buildings. Write each point on a new line, with the key term first, and explain it in your own words when we revise. When you finish, we go to the next slide.</a:t>
+              <a:t>Let us copy Manifestation of Earthquakes. Earthquakes show themselves and are measured as follows. On this slide we have Shaking and cracks. Write each point on a new line, with the key term first, and explain it in your own words when we revise.</a:t>
             </a:r>
             <a:endParaRPr lang="en-US" dirty="0"/>
           </a:p>
@@ -3102,7 +3110,7 @@
           <a:p>
             <a:r>
               <a:rPr lang="en-US" dirty="0"/>
-              <a:t>We continue with Impact and Protection. On this slide we have Education. Write each point on a new line, with the key term first, and explain it in your own words when we revise.</a:t>
+              <a:t>Copy the point on Seismograph on the left, then draw the diagram on the right: a seismograph. Give it a title and label it clearly.</a:t>
             </a:r>
             <a:endParaRPr lang="en-US" dirty="0"/>
           </a:p>
@@ -3190,7 +3198,7 @@
           <a:p>
             <a:r>
               <a:rPr lang="en-US" dirty="0"/>
-              <a:t>Now let us check what you have understood. Question 1: What is the epicentre? Answer in your exercise book.</a:t>
+              <a:t>We continue with Manifestation of Earthquakes. On this slide we have Richter scale and Aftershocks. Write each point on a new line, with the key term first, and explain it in your own words when we revise.</a:t>
             </a:r>
             <a:endParaRPr lang="en-US" dirty="0"/>
           </a:p>
@@ -3278,7 +3286,7 @@
           <a:p>
             <a:r>
               <a:rPr lang="en-US" dirty="0"/>
-              <a:t>The expected answer is: the point on the surface above the focus. If you got it right, well done.</a:t>
+              <a:t>Let us copy Impact on Man. Earthquakes affect people in the following ways. Copy the point on Loss of life on the left, then draw the diagram on the right: houses destroyed by an earthquake. Give it a title and label it clearly.</a:t>
             </a:r>
             <a:endParaRPr lang="en-US" dirty="0"/>
           </a:p>
@@ -3366,7 +3374,7 @@
           <a:p>
             <a:r>
               <a:rPr lang="en-US" dirty="0"/>
-              <a:t>Now let us check what you have understood. Question 2: How do countries like Japan reduce the damage? Answer in your exercise book.</a:t>
+              <a:t>We continue with Impact on Man. On this slide we have Destruction of property and Fires and diseases. Write each point on a new line, with the key term first, and explain it in your own words when we revise.</a:t>
             </a:r>
             <a:endParaRPr lang="en-US" dirty="0"/>
           </a:p>
@@ -3542,7 +3550,7 @@
           <a:p>
             <a:r>
               <a:rPr lang="en-US" dirty="0"/>
-              <a:t>The expected answer is: they build houses that resist earthquakes. If you got it right, well done.</a:t>
+              <a:t>Copy the point on Tsunamis and landslides on the left, then draw the diagram on the right: a tsunami. Give it a title and label it clearly.</a:t>
             </a:r>
             <a:endParaRPr lang="en-US" dirty="0"/>
           </a:p>
@@ -3630,7 +3638,7 @@
           <a:p>
             <a:r>
               <a:rPr lang="en-US" dirty="0"/>
-              <a:t>Take your time to copy this part; we will continue together.</a:t>
+              <a:t>We continue with Impact on Man. On this slide we have Economic losses. Write each point on a new line, with the key term first, and explain it in your own words when we revise.</a:t>
             </a:r>
             <a:endParaRPr lang="en-US" dirty="0"/>
           </a:p>
@@ -3718,7 +3726,7 @@
           <a:p>
             <a:r>
               <a:rPr lang="en-US" dirty="0"/>
-              <a:t>For those who need more practice, fill in the blanks in your exercise book. The answers are: number 1, earthquake; number 2, seismograph; number 3, focus.</a:t>
+              <a:t>Let us copy Adaptation and Mitigation. People reduce the damage of earthquakes with the following measures. On this slide we have Strong buildings and Land-use planning. Write each point on a new line, with the key term first, and explain it in your own words when we revise. When you finish, we go to the next slide.</a:t>
             </a:r>
             <a:endParaRPr lang="en-US" dirty="0"/>
           </a:p>
@@ -3806,7 +3814,7 @@
           <a:p>
             <a:r>
               <a:rPr lang="en-US" dirty="0"/>
-              <a:t>For your homework: After the next rain, look at the side of a road or a slope. Write what the running water did to the soil, and where the soil went. We shall correct it at the beginning of our next lesson.</a:t>
+              <a:t>We continue with Adaptation and Mitigation. On this slide we have Monitoring and warning and Education and drills. Write each point on a new line, with the key term first, and explain it in your own words when we revise. When you finish, we go to the next slide.</a:t>
             </a:r>
             <a:endParaRPr lang="en-US" dirty="0"/>
           </a:p>
@@ -3894,7 +3902,7 @@
           <a:p>
             <a:r>
               <a:rPr lang="en-US" dirty="0"/>
-              <a:t>Our next lesson will be on Lesson 14: Denudation. Thank you for your attention, and see you next time.</a:t>
+              <a:t>We continue with Adaptation and Mitigation. On this slide we have Emergency services. Write each point on a new line, with the key term first, and explain it in your own words when we revise.</a:t>
             </a:r>
             <a:endParaRPr lang="en-US" dirty="0"/>
           </a:p>
@@ -3982,7 +3990,7 @@
           <a:p>
             <a:r>
               <a:rPr lang="en-US" dirty="0"/>
-              <a:t>Let us play the bilingual game. I say a word in English, and you give me the French word. Then we do the reverse.</a:t>
+              <a:t>Now let us check what you have understood. Question 1: What is the epicentre? Answer in your exercise book.</a:t>
             </a:r>
             <a:endParaRPr lang="en-US" dirty="0"/>
           </a:p>
@@ -4070,7 +4078,7 @@
           <a:p>
             <a:r>
               <a:rPr lang="en-US" dirty="0"/>
-              <a:t>I record this information in the official logbook of the class after the lesson.</a:t>
+              <a:t>The expected answer is: the point on the surface above the focus. If you got it right, well done.</a:t>
             </a:r>
             <a:endParaRPr lang="en-US" dirty="0"/>
           </a:p>
@@ -4158,7 +4166,7 @@
           <a:p>
             <a:r>
               <a:rPr lang="en-US" dirty="0"/>
-              <a:t>I complete the second page of the logbook: the matter taught, the evaluation, the homework and the attendance.</a:t>
+              <a:t>Now let us check what you have understood. Question 2: How do countries like Japan reduce the damage? Answer in your exercise book.</a:t>
             </a:r>
             <a:endParaRPr lang="en-US" dirty="0"/>
           </a:p>
@@ -4246,7 +4254,7 @@
           <a:p>
             <a:r>
               <a:rPr lang="en-US" dirty="0"/>
-              <a:t>This slide is for me, the teacher: it gives the timing of the lesson and what to do if the projector is not available.</a:t>
+              <a:t>The expected answer is: they build houses that resist earthquakes. If you got it right, well done.</a:t>
             </a:r>
             <a:endParaRPr lang="en-US" dirty="0"/>
           </a:p>
@@ -4334,7 +4342,7 @@
           <a:p>
             <a:r>
               <a:rPr lang="en-US" dirty="0"/>
-              <a:t>These are the references and picture credits used to prepare this lesson.</a:t>
+              <a:t>Take your time to copy this part; we will continue together.</a:t>
             </a:r>
             <a:endParaRPr lang="en-US" dirty="0"/>
           </a:p>
@@ -4464,6 +4472,710 @@
 </p:notes>
 </file>
 
+<file path=ppt/notesSlides/notesSlide50.xml><?xml version="1.0" encoding="utf-8"?>
+<p:notes xmlns:a="http://schemas.openxmlformats.org/drawingml/2006/main" xmlns:r="http://schemas.openxmlformats.org/officeDocument/2006/relationships" xmlns:p="http://schemas.openxmlformats.org/presentationml/2006/main">
+  <p:cSld>
+    <p:spTree>
+      <p:nvGrpSpPr>
+        <p:cNvPr id="1" name=""/>
+        <p:cNvGrpSpPr/>
+        <p:nvPr/>
+      </p:nvGrpSpPr>
+      <p:grpSpPr>
+        <a:xfrm>
+          <a:off x="0" y="0"/>
+          <a:ext cx="0" cy="0"/>
+          <a:chOff x="0" y="0"/>
+          <a:chExt cx="0" cy="0"/>
+        </a:xfrm>
+      </p:grpSpPr>
+      <p:sp>
+        <p:nvSpPr>
+          <p:cNvPr id="2" name="Slide Image Placeholder 1"/>
+          <p:cNvSpPr>
+            <a:spLocks noGrp="1" noRot="1" noChangeAspect="1"/>
+          </p:cNvSpPr>
+          <p:nvPr>
+            <p:ph type="sldImg"/>
+          </p:nvPr>
+        </p:nvSpPr>
+        <p:spPr/>
+      </p:sp>
+      <p:sp>
+        <p:nvSpPr>
+          <p:cNvPr id="3" name="Notes Placeholder 2"/>
+          <p:cNvSpPr>
+            <a:spLocks noGrp="1"/>
+          </p:cNvSpPr>
+          <p:nvPr>
+            <p:ph type="body" idx="1"/>
+          </p:nvPr>
+        </p:nvSpPr>
+        <p:spPr/>
+        <p:txBody>
+          <a:bodyPr/>
+          <a:lstStyle/>
+          <a:p>
+            <a:r>
+              <a:rPr lang="en-US" dirty="0"/>
+              <a:t>For those who need more practice, fill in the blanks in your exercise book. The answers are: number 1, earthquake; number 2, seismograph; number 3, focus.</a:t>
+            </a:r>
+            <a:endParaRPr lang="en-US" dirty="0"/>
+          </a:p>
+        </p:txBody>
+      </p:sp>
+      <p:sp>
+        <p:nvSpPr>
+          <p:cNvPr id="4" name="Slide Number Placeholder 3"/>
+          <p:cNvSpPr>
+            <a:spLocks noGrp="1"/>
+          </p:cNvSpPr>
+          <p:nvPr>
+            <p:ph type="sldNum" sz="quarter" idx="10"/>
+          </p:nvPr>
+        </p:nvSpPr>
+        <p:spPr/>
+        <p:txBody>
+          <a:bodyPr/>
+          <a:lstStyle/>
+          <a:p>
+            <a:fld id="{F7021451-1387-4CA6-816F-3879F97B5CBC}" type="slidenum">
+              <a:rPr lang="en-US"/>
+              <a:t>50</a:t>
+            </a:fld>
+            <a:endParaRPr lang="en-US"/>
+          </a:p>
+        </p:txBody>
+      </p:sp>
+    </p:spTree>
+    <p:extLst>
+      <p:ext uri="{BB962C8B-B14F-4D97-AF65-F5344CB8AC3E}">
+        <p14:creationId xmlns:p14="http://schemas.microsoft.com/office/powerpoint/2010/main" val="1024086991"/>
+      </p:ext>
+    </p:extLst>
+  </p:cSld>
+  <p:clrMapOvr>
+    <a:masterClrMapping/>
+  </p:clrMapOvr>
+</p:notes>
+</file>
+
+<file path=ppt/notesSlides/notesSlide51.xml><?xml version="1.0" encoding="utf-8"?>
+<p:notes xmlns:a="http://schemas.openxmlformats.org/drawingml/2006/main" xmlns:r="http://schemas.openxmlformats.org/officeDocument/2006/relationships" xmlns:p="http://schemas.openxmlformats.org/presentationml/2006/main">
+  <p:cSld>
+    <p:spTree>
+      <p:nvGrpSpPr>
+        <p:cNvPr id="1" name=""/>
+        <p:cNvGrpSpPr/>
+        <p:nvPr/>
+      </p:nvGrpSpPr>
+      <p:grpSpPr>
+        <a:xfrm>
+          <a:off x="0" y="0"/>
+          <a:ext cx="0" cy="0"/>
+          <a:chOff x="0" y="0"/>
+          <a:chExt cx="0" cy="0"/>
+        </a:xfrm>
+      </p:grpSpPr>
+      <p:sp>
+        <p:nvSpPr>
+          <p:cNvPr id="2" name="Slide Image Placeholder 1"/>
+          <p:cNvSpPr>
+            <a:spLocks noGrp="1" noRot="1" noChangeAspect="1"/>
+          </p:cNvSpPr>
+          <p:nvPr>
+            <p:ph type="sldImg"/>
+          </p:nvPr>
+        </p:nvSpPr>
+        <p:spPr/>
+      </p:sp>
+      <p:sp>
+        <p:nvSpPr>
+          <p:cNvPr id="3" name="Notes Placeholder 2"/>
+          <p:cNvSpPr>
+            <a:spLocks noGrp="1"/>
+          </p:cNvSpPr>
+          <p:nvPr>
+            <p:ph type="body" idx="1"/>
+          </p:nvPr>
+        </p:nvSpPr>
+        <p:spPr/>
+        <p:txBody>
+          <a:bodyPr/>
+          <a:lstStyle/>
+          <a:p>
+            <a:r>
+              <a:rPr lang="en-US" dirty="0"/>
+              <a:t>For your homework: After the next rain, look at the side of a road or a slope. Write what the running water did to the soil, and where the soil went. We shall correct it at the beginning of our next lesson.</a:t>
+            </a:r>
+            <a:endParaRPr lang="en-US" dirty="0"/>
+          </a:p>
+        </p:txBody>
+      </p:sp>
+      <p:sp>
+        <p:nvSpPr>
+          <p:cNvPr id="4" name="Slide Number Placeholder 3"/>
+          <p:cNvSpPr>
+            <a:spLocks noGrp="1"/>
+          </p:cNvSpPr>
+          <p:nvPr>
+            <p:ph type="sldNum" sz="quarter" idx="10"/>
+          </p:nvPr>
+        </p:nvSpPr>
+        <p:spPr/>
+        <p:txBody>
+          <a:bodyPr/>
+          <a:lstStyle/>
+          <a:p>
+            <a:fld id="{F7021451-1387-4CA6-816F-3879F97B5CBC}" type="slidenum">
+              <a:rPr lang="en-US"/>
+              <a:t>51</a:t>
+            </a:fld>
+            <a:endParaRPr lang="en-US"/>
+          </a:p>
+        </p:txBody>
+      </p:sp>
+    </p:spTree>
+    <p:extLst>
+      <p:ext uri="{BB962C8B-B14F-4D97-AF65-F5344CB8AC3E}">
+        <p14:creationId xmlns:p14="http://schemas.microsoft.com/office/powerpoint/2010/main" val="1024086991"/>
+      </p:ext>
+    </p:extLst>
+  </p:cSld>
+  <p:clrMapOvr>
+    <a:masterClrMapping/>
+  </p:clrMapOvr>
+</p:notes>
+</file>
+
+<file path=ppt/notesSlides/notesSlide52.xml><?xml version="1.0" encoding="utf-8"?>
+<p:notes xmlns:a="http://schemas.openxmlformats.org/drawingml/2006/main" xmlns:r="http://schemas.openxmlformats.org/officeDocument/2006/relationships" xmlns:p="http://schemas.openxmlformats.org/presentationml/2006/main">
+  <p:cSld>
+    <p:spTree>
+      <p:nvGrpSpPr>
+        <p:cNvPr id="1" name=""/>
+        <p:cNvGrpSpPr/>
+        <p:nvPr/>
+      </p:nvGrpSpPr>
+      <p:grpSpPr>
+        <a:xfrm>
+          <a:off x="0" y="0"/>
+          <a:ext cx="0" cy="0"/>
+          <a:chOff x="0" y="0"/>
+          <a:chExt cx="0" cy="0"/>
+        </a:xfrm>
+      </p:grpSpPr>
+      <p:sp>
+        <p:nvSpPr>
+          <p:cNvPr id="2" name="Slide Image Placeholder 1"/>
+          <p:cNvSpPr>
+            <a:spLocks noGrp="1" noRot="1" noChangeAspect="1"/>
+          </p:cNvSpPr>
+          <p:nvPr>
+            <p:ph type="sldImg"/>
+          </p:nvPr>
+        </p:nvSpPr>
+        <p:spPr/>
+      </p:sp>
+      <p:sp>
+        <p:nvSpPr>
+          <p:cNvPr id="3" name="Notes Placeholder 2"/>
+          <p:cNvSpPr>
+            <a:spLocks noGrp="1"/>
+          </p:cNvSpPr>
+          <p:nvPr>
+            <p:ph type="body" idx="1"/>
+          </p:nvPr>
+        </p:nvSpPr>
+        <p:spPr/>
+        <p:txBody>
+          <a:bodyPr/>
+          <a:lstStyle/>
+          <a:p>
+            <a:r>
+              <a:rPr lang="en-US" dirty="0"/>
+              <a:t>Our next lesson will be on Lesson 14: Denudation. Thank you for your attention, and see you next time.</a:t>
+            </a:r>
+            <a:endParaRPr lang="en-US" dirty="0"/>
+          </a:p>
+        </p:txBody>
+      </p:sp>
+      <p:sp>
+        <p:nvSpPr>
+          <p:cNvPr id="4" name="Slide Number Placeholder 3"/>
+          <p:cNvSpPr>
+            <a:spLocks noGrp="1"/>
+          </p:cNvSpPr>
+          <p:nvPr>
+            <p:ph type="sldNum" sz="quarter" idx="10"/>
+          </p:nvPr>
+        </p:nvSpPr>
+        <p:spPr/>
+        <p:txBody>
+          <a:bodyPr/>
+          <a:lstStyle/>
+          <a:p>
+            <a:fld id="{F7021451-1387-4CA6-816F-3879F97B5CBC}" type="slidenum">
+              <a:rPr lang="en-US"/>
+              <a:t>52</a:t>
+            </a:fld>
+            <a:endParaRPr lang="en-US"/>
+          </a:p>
+        </p:txBody>
+      </p:sp>
+    </p:spTree>
+    <p:extLst>
+      <p:ext uri="{BB962C8B-B14F-4D97-AF65-F5344CB8AC3E}">
+        <p14:creationId xmlns:p14="http://schemas.microsoft.com/office/powerpoint/2010/main" val="1024086991"/>
+      </p:ext>
+    </p:extLst>
+  </p:cSld>
+  <p:clrMapOvr>
+    <a:masterClrMapping/>
+  </p:clrMapOvr>
+</p:notes>
+</file>
+
+<file path=ppt/notesSlides/notesSlide53.xml><?xml version="1.0" encoding="utf-8"?>
+<p:notes xmlns:a="http://schemas.openxmlformats.org/drawingml/2006/main" xmlns:r="http://schemas.openxmlformats.org/officeDocument/2006/relationships" xmlns:p="http://schemas.openxmlformats.org/presentationml/2006/main">
+  <p:cSld>
+    <p:spTree>
+      <p:nvGrpSpPr>
+        <p:cNvPr id="1" name=""/>
+        <p:cNvGrpSpPr/>
+        <p:nvPr/>
+      </p:nvGrpSpPr>
+      <p:grpSpPr>
+        <a:xfrm>
+          <a:off x="0" y="0"/>
+          <a:ext cx="0" cy="0"/>
+          <a:chOff x="0" y="0"/>
+          <a:chExt cx="0" cy="0"/>
+        </a:xfrm>
+      </p:grpSpPr>
+      <p:sp>
+        <p:nvSpPr>
+          <p:cNvPr id="2" name="Slide Image Placeholder 1"/>
+          <p:cNvSpPr>
+            <a:spLocks noGrp="1" noRot="1" noChangeAspect="1"/>
+          </p:cNvSpPr>
+          <p:nvPr>
+            <p:ph type="sldImg"/>
+          </p:nvPr>
+        </p:nvSpPr>
+        <p:spPr/>
+      </p:sp>
+      <p:sp>
+        <p:nvSpPr>
+          <p:cNvPr id="3" name="Notes Placeholder 2"/>
+          <p:cNvSpPr>
+            <a:spLocks noGrp="1"/>
+          </p:cNvSpPr>
+          <p:nvPr>
+            <p:ph type="body" idx="1"/>
+          </p:nvPr>
+        </p:nvSpPr>
+        <p:spPr/>
+        <p:txBody>
+          <a:bodyPr/>
+          <a:lstStyle/>
+          <a:p>
+            <a:r>
+              <a:rPr lang="en-US" dirty="0"/>
+              <a:t>Let us play the bilingual game. I say a word in English, and you give me the French word. Then we do the reverse.</a:t>
+            </a:r>
+            <a:endParaRPr lang="en-US" dirty="0"/>
+          </a:p>
+        </p:txBody>
+      </p:sp>
+      <p:sp>
+        <p:nvSpPr>
+          <p:cNvPr id="4" name="Slide Number Placeholder 3"/>
+          <p:cNvSpPr>
+            <a:spLocks noGrp="1"/>
+          </p:cNvSpPr>
+          <p:nvPr>
+            <p:ph type="sldNum" sz="quarter" idx="10"/>
+          </p:nvPr>
+        </p:nvSpPr>
+        <p:spPr/>
+        <p:txBody>
+          <a:bodyPr/>
+          <a:lstStyle/>
+          <a:p>
+            <a:fld id="{F7021451-1387-4CA6-816F-3879F97B5CBC}" type="slidenum">
+              <a:rPr lang="en-US"/>
+              <a:t>53</a:t>
+            </a:fld>
+            <a:endParaRPr lang="en-US"/>
+          </a:p>
+        </p:txBody>
+      </p:sp>
+    </p:spTree>
+    <p:extLst>
+      <p:ext uri="{BB962C8B-B14F-4D97-AF65-F5344CB8AC3E}">
+        <p14:creationId xmlns:p14="http://schemas.microsoft.com/office/powerpoint/2010/main" val="1024086991"/>
+      </p:ext>
+    </p:extLst>
+  </p:cSld>
+  <p:clrMapOvr>
+    <a:masterClrMapping/>
+  </p:clrMapOvr>
+</p:notes>
+</file>
+
+<file path=ppt/notesSlides/notesSlide54.xml><?xml version="1.0" encoding="utf-8"?>
+<p:notes xmlns:a="http://schemas.openxmlformats.org/drawingml/2006/main" xmlns:r="http://schemas.openxmlformats.org/officeDocument/2006/relationships" xmlns:p="http://schemas.openxmlformats.org/presentationml/2006/main">
+  <p:cSld>
+    <p:spTree>
+      <p:nvGrpSpPr>
+        <p:cNvPr id="1" name=""/>
+        <p:cNvGrpSpPr/>
+        <p:nvPr/>
+      </p:nvGrpSpPr>
+      <p:grpSpPr>
+        <a:xfrm>
+          <a:off x="0" y="0"/>
+          <a:ext cx="0" cy="0"/>
+          <a:chOff x="0" y="0"/>
+          <a:chExt cx="0" cy="0"/>
+        </a:xfrm>
+      </p:grpSpPr>
+      <p:sp>
+        <p:nvSpPr>
+          <p:cNvPr id="2" name="Slide Image Placeholder 1"/>
+          <p:cNvSpPr>
+            <a:spLocks noGrp="1" noRot="1" noChangeAspect="1"/>
+          </p:cNvSpPr>
+          <p:nvPr>
+            <p:ph type="sldImg"/>
+          </p:nvPr>
+        </p:nvSpPr>
+        <p:spPr/>
+      </p:sp>
+      <p:sp>
+        <p:nvSpPr>
+          <p:cNvPr id="3" name="Notes Placeholder 2"/>
+          <p:cNvSpPr>
+            <a:spLocks noGrp="1"/>
+          </p:cNvSpPr>
+          <p:nvPr>
+            <p:ph type="body" idx="1"/>
+          </p:nvPr>
+        </p:nvSpPr>
+        <p:spPr/>
+        <p:txBody>
+          <a:bodyPr/>
+          <a:lstStyle/>
+          <a:p>
+            <a:r>
+              <a:rPr lang="en-US" dirty="0"/>
+              <a:t>I record this information in the official logbook of the class after the lesson.</a:t>
+            </a:r>
+            <a:endParaRPr lang="en-US" dirty="0"/>
+          </a:p>
+        </p:txBody>
+      </p:sp>
+      <p:sp>
+        <p:nvSpPr>
+          <p:cNvPr id="4" name="Slide Number Placeholder 3"/>
+          <p:cNvSpPr>
+            <a:spLocks noGrp="1"/>
+          </p:cNvSpPr>
+          <p:nvPr>
+            <p:ph type="sldNum" sz="quarter" idx="10"/>
+          </p:nvPr>
+        </p:nvSpPr>
+        <p:spPr/>
+        <p:txBody>
+          <a:bodyPr/>
+          <a:lstStyle/>
+          <a:p>
+            <a:fld id="{F7021451-1387-4CA6-816F-3879F97B5CBC}" type="slidenum">
+              <a:rPr lang="en-US"/>
+              <a:t>54</a:t>
+            </a:fld>
+            <a:endParaRPr lang="en-US"/>
+          </a:p>
+        </p:txBody>
+      </p:sp>
+    </p:spTree>
+    <p:extLst>
+      <p:ext uri="{BB962C8B-B14F-4D97-AF65-F5344CB8AC3E}">
+        <p14:creationId xmlns:p14="http://schemas.microsoft.com/office/powerpoint/2010/main" val="1024086991"/>
+      </p:ext>
+    </p:extLst>
+  </p:cSld>
+  <p:clrMapOvr>
+    <a:masterClrMapping/>
+  </p:clrMapOvr>
+</p:notes>
+</file>
+
+<file path=ppt/notesSlides/notesSlide55.xml><?xml version="1.0" encoding="utf-8"?>
+<p:notes xmlns:a="http://schemas.openxmlformats.org/drawingml/2006/main" xmlns:r="http://schemas.openxmlformats.org/officeDocument/2006/relationships" xmlns:p="http://schemas.openxmlformats.org/presentationml/2006/main">
+  <p:cSld>
+    <p:spTree>
+      <p:nvGrpSpPr>
+        <p:cNvPr id="1" name=""/>
+        <p:cNvGrpSpPr/>
+        <p:nvPr/>
+      </p:nvGrpSpPr>
+      <p:grpSpPr>
+        <a:xfrm>
+          <a:off x="0" y="0"/>
+          <a:ext cx="0" cy="0"/>
+          <a:chOff x="0" y="0"/>
+          <a:chExt cx="0" cy="0"/>
+        </a:xfrm>
+      </p:grpSpPr>
+      <p:sp>
+        <p:nvSpPr>
+          <p:cNvPr id="2" name="Slide Image Placeholder 1"/>
+          <p:cNvSpPr>
+            <a:spLocks noGrp="1" noRot="1" noChangeAspect="1"/>
+          </p:cNvSpPr>
+          <p:nvPr>
+            <p:ph type="sldImg"/>
+          </p:nvPr>
+        </p:nvSpPr>
+        <p:spPr/>
+      </p:sp>
+      <p:sp>
+        <p:nvSpPr>
+          <p:cNvPr id="3" name="Notes Placeholder 2"/>
+          <p:cNvSpPr>
+            <a:spLocks noGrp="1"/>
+          </p:cNvSpPr>
+          <p:nvPr>
+            <p:ph type="body" idx="1"/>
+          </p:nvPr>
+        </p:nvSpPr>
+        <p:spPr/>
+        <p:txBody>
+          <a:bodyPr/>
+          <a:lstStyle/>
+          <a:p>
+            <a:r>
+              <a:rPr lang="en-US" dirty="0"/>
+              <a:t>I complete the second page of the logbook: the matter taught, the evaluation, the homework and the attendance.</a:t>
+            </a:r>
+            <a:endParaRPr lang="en-US" dirty="0"/>
+          </a:p>
+        </p:txBody>
+      </p:sp>
+      <p:sp>
+        <p:nvSpPr>
+          <p:cNvPr id="4" name="Slide Number Placeholder 3"/>
+          <p:cNvSpPr>
+            <a:spLocks noGrp="1"/>
+          </p:cNvSpPr>
+          <p:nvPr>
+            <p:ph type="sldNum" sz="quarter" idx="10"/>
+          </p:nvPr>
+        </p:nvSpPr>
+        <p:spPr/>
+        <p:txBody>
+          <a:bodyPr/>
+          <a:lstStyle/>
+          <a:p>
+            <a:fld id="{F7021451-1387-4CA6-816F-3879F97B5CBC}" type="slidenum">
+              <a:rPr lang="en-US"/>
+              <a:t>55</a:t>
+            </a:fld>
+            <a:endParaRPr lang="en-US"/>
+          </a:p>
+        </p:txBody>
+      </p:sp>
+    </p:spTree>
+    <p:extLst>
+      <p:ext uri="{BB962C8B-B14F-4D97-AF65-F5344CB8AC3E}">
+        <p14:creationId xmlns:p14="http://schemas.microsoft.com/office/powerpoint/2010/main" val="1024086991"/>
+      </p:ext>
+    </p:extLst>
+  </p:cSld>
+  <p:clrMapOvr>
+    <a:masterClrMapping/>
+  </p:clrMapOvr>
+</p:notes>
+</file>
+
+<file path=ppt/notesSlides/notesSlide56.xml><?xml version="1.0" encoding="utf-8"?>
+<p:notes xmlns:a="http://schemas.openxmlformats.org/drawingml/2006/main" xmlns:r="http://schemas.openxmlformats.org/officeDocument/2006/relationships" xmlns:p="http://schemas.openxmlformats.org/presentationml/2006/main">
+  <p:cSld>
+    <p:spTree>
+      <p:nvGrpSpPr>
+        <p:cNvPr id="1" name=""/>
+        <p:cNvGrpSpPr/>
+        <p:nvPr/>
+      </p:nvGrpSpPr>
+      <p:grpSpPr>
+        <a:xfrm>
+          <a:off x="0" y="0"/>
+          <a:ext cx="0" cy="0"/>
+          <a:chOff x="0" y="0"/>
+          <a:chExt cx="0" cy="0"/>
+        </a:xfrm>
+      </p:grpSpPr>
+      <p:sp>
+        <p:nvSpPr>
+          <p:cNvPr id="2" name="Slide Image Placeholder 1"/>
+          <p:cNvSpPr>
+            <a:spLocks noGrp="1" noRot="1" noChangeAspect="1"/>
+          </p:cNvSpPr>
+          <p:nvPr>
+            <p:ph type="sldImg"/>
+          </p:nvPr>
+        </p:nvSpPr>
+        <p:spPr/>
+      </p:sp>
+      <p:sp>
+        <p:nvSpPr>
+          <p:cNvPr id="3" name="Notes Placeholder 2"/>
+          <p:cNvSpPr>
+            <a:spLocks noGrp="1"/>
+          </p:cNvSpPr>
+          <p:nvPr>
+            <p:ph type="body" idx="1"/>
+          </p:nvPr>
+        </p:nvSpPr>
+        <p:spPr/>
+        <p:txBody>
+          <a:bodyPr/>
+          <a:lstStyle/>
+          <a:p>
+            <a:r>
+              <a:rPr lang="en-US" dirty="0"/>
+              <a:t>This slide is for me, the teacher: it gives the timing of the lesson and what to do if the projector is not available.</a:t>
+            </a:r>
+            <a:endParaRPr lang="en-US" dirty="0"/>
+          </a:p>
+        </p:txBody>
+      </p:sp>
+      <p:sp>
+        <p:nvSpPr>
+          <p:cNvPr id="4" name="Slide Number Placeholder 3"/>
+          <p:cNvSpPr>
+            <a:spLocks noGrp="1"/>
+          </p:cNvSpPr>
+          <p:nvPr>
+            <p:ph type="sldNum" sz="quarter" idx="10"/>
+          </p:nvPr>
+        </p:nvSpPr>
+        <p:spPr/>
+        <p:txBody>
+          <a:bodyPr/>
+          <a:lstStyle/>
+          <a:p>
+            <a:fld id="{F7021451-1387-4CA6-816F-3879F97B5CBC}" type="slidenum">
+              <a:rPr lang="en-US"/>
+              <a:t>56</a:t>
+            </a:fld>
+            <a:endParaRPr lang="en-US"/>
+          </a:p>
+        </p:txBody>
+      </p:sp>
+    </p:spTree>
+    <p:extLst>
+      <p:ext uri="{BB962C8B-B14F-4D97-AF65-F5344CB8AC3E}">
+        <p14:creationId xmlns:p14="http://schemas.microsoft.com/office/powerpoint/2010/main" val="1024086991"/>
+      </p:ext>
+    </p:extLst>
+  </p:cSld>
+  <p:clrMapOvr>
+    <a:masterClrMapping/>
+  </p:clrMapOvr>
+</p:notes>
+</file>
+
+<file path=ppt/notesSlides/notesSlide57.xml><?xml version="1.0" encoding="utf-8"?>
+<p:notes xmlns:a="http://schemas.openxmlformats.org/drawingml/2006/main" xmlns:r="http://schemas.openxmlformats.org/officeDocument/2006/relationships" xmlns:p="http://schemas.openxmlformats.org/presentationml/2006/main">
+  <p:cSld>
+    <p:spTree>
+      <p:nvGrpSpPr>
+        <p:cNvPr id="1" name=""/>
+        <p:cNvGrpSpPr/>
+        <p:nvPr/>
+      </p:nvGrpSpPr>
+      <p:grpSpPr>
+        <a:xfrm>
+          <a:off x="0" y="0"/>
+          <a:ext cx="0" cy="0"/>
+          <a:chOff x="0" y="0"/>
+          <a:chExt cx="0" cy="0"/>
+        </a:xfrm>
+      </p:grpSpPr>
+      <p:sp>
+        <p:nvSpPr>
+          <p:cNvPr id="2" name="Slide Image Placeholder 1"/>
+          <p:cNvSpPr>
+            <a:spLocks noGrp="1" noRot="1" noChangeAspect="1"/>
+          </p:cNvSpPr>
+          <p:nvPr>
+            <p:ph type="sldImg"/>
+          </p:nvPr>
+        </p:nvSpPr>
+        <p:spPr/>
+      </p:sp>
+      <p:sp>
+        <p:nvSpPr>
+          <p:cNvPr id="3" name="Notes Placeholder 2"/>
+          <p:cNvSpPr>
+            <a:spLocks noGrp="1"/>
+          </p:cNvSpPr>
+          <p:nvPr>
+            <p:ph type="body" idx="1"/>
+          </p:nvPr>
+        </p:nvSpPr>
+        <p:spPr/>
+        <p:txBody>
+          <a:bodyPr/>
+          <a:lstStyle/>
+          <a:p>
+            <a:r>
+              <a:rPr lang="en-US" dirty="0"/>
+              <a:t>These are the references and picture credits used to prepare this lesson.</a:t>
+            </a:r>
+            <a:endParaRPr lang="en-US" dirty="0"/>
+          </a:p>
+        </p:txBody>
+      </p:sp>
+      <p:sp>
+        <p:nvSpPr>
+          <p:cNvPr id="4" name="Slide Number Placeholder 3"/>
+          <p:cNvSpPr>
+            <a:spLocks noGrp="1"/>
+          </p:cNvSpPr>
+          <p:nvPr>
+            <p:ph type="sldNum" sz="quarter" idx="10"/>
+          </p:nvPr>
+        </p:nvSpPr>
+        <p:spPr/>
+        <p:txBody>
+          <a:bodyPr/>
+          <a:lstStyle/>
+          <a:p>
+            <a:fld id="{F7021451-1387-4CA6-816F-3879F97B5CBC}" type="slidenum">
+              <a:rPr lang="en-US"/>
+              <a:t>57</a:t>
+            </a:fld>
+            <a:endParaRPr lang="en-US"/>
+          </a:p>
+        </p:txBody>
+      </p:sp>
+    </p:spTree>
+    <p:extLst>
+      <p:ext uri="{BB962C8B-B14F-4D97-AF65-F5344CB8AC3E}">
+        <p14:creationId xmlns:p14="http://schemas.microsoft.com/office/powerpoint/2010/main" val="1024086991"/>
+      </p:ext>
+    </p:extLst>
+  </p:cSld>
+  <p:clrMapOvr>
+    <a:masterClrMapping/>
+  </p:clrMapOvr>
+</p:notes>
+</file>
+
 <file path=ppt/notesSlides/notesSlide6.xml><?xml version="1.0" encoding="utf-8"?>
 <p:notes xmlns:a="http://schemas.openxmlformats.org/drawingml/2006/main" xmlns:r="http://schemas.openxmlformats.org/officeDocument/2006/relationships" xmlns:p="http://schemas.openxmlformats.org/presentationml/2006/main">
   <p:cSld>
@@ -4686,7 +5398,7 @@
           <a:p>
             <a:r>
               <a:rPr lang="en-US" dirty="0"/>
-              <a:t>By the end of this lesson, you should be able to do three things. Number 1: define an earthquake, its focus and its epicentre. Number 2: explain the causes of earthquakes. Number 3: describe how earthquakes are measured and how they appear. Number 4: explain their impact on man and suggest adaptation and mitigation measures.</a:t>
+              <a:t>By the end of this lesson, you should be able to do four things. Number 1: define an earthquake, its focus and its epicentre. Number 2: explain the causes of earthquakes. Number 3: describe how earthquakes are measured and how they appear. Number 4: explain their impact on man and suggest adaptation and mitigation measures.</a:t>
             </a:r>
             <a:endParaRPr lang="en-US" dirty="0"/>
           </a:p>
@@ -6154,7 +6866,7 @@
         <p:spPr>
           <a:xfrm>
             <a:off x="0" y="658368"/>
-            <a:ext cx="5120640" cy="5833872"/>
+            <a:ext cx="3840480" cy="5833872"/>
           </a:xfrm>
           <a:prstGeom prst="rect">
             <a:avLst/>
@@ -6169,8 +6881,8 @@
         </p:nvSpPr>
         <p:spPr>
           <a:xfrm>
-            <a:off x="5349240" y="1005840"/>
-            <a:ext cx="6522415" cy="731520"/>
+            <a:off x="4069080" y="1005840"/>
+            <a:ext cx="7802575" cy="731520"/>
           </a:xfrm>
           <a:prstGeom prst="rect">
             <a:avLst/>
@@ -6210,8 +6922,8 @@
         </p:nvSpPr>
         <p:spPr>
           <a:xfrm>
-            <a:off x="5349240" y="1783080"/>
-            <a:ext cx="6522415" cy="4663440"/>
+            <a:off x="4069080" y="1783080"/>
+            <a:ext cx="7802575" cy="4663440"/>
           </a:xfrm>
           <a:prstGeom prst="rect">
             <a:avLst/>
@@ -6238,7 +6950,7 @@
                 <a:ea typeface="Times New Roman" pitchFamily="34" charset="-122"/>
                 <a:cs typeface="Times New Roman" pitchFamily="34" charset="-120"/>
               </a:rPr>
-              <a:t>On the news, Ismaïla sees that an earthquake in Morocco in September 2023 destroyed many villages. Thousands of people died. He wonders what makes the ground shake.</a:t>
+              <a:t>On the news, Ismaïla sees that an earthquake in Morocco in September 2023 destroyed many villages and killed thousands of people. He asks: "What makes the ground shake like this, and how can people protect themselves?"</a:t>
             </a:r>
             <a:endParaRPr lang="en-US" sz="4000" dirty="0"/>
           </a:p>
@@ -6676,7 +7388,7 @@
                 <a:ea typeface="Times New Roman" pitchFamily="34" charset="-122"/>
                 <a:cs typeface="Times New Roman" pitchFamily="34" charset="-120"/>
               </a:rPr>
-              <a:t>Ismaïla does not know what makes the ground shake.</a:t>
+              <a:t>Ismaïla does not know what causes earthquakes and how people can protect themselves.</a:t>
             </a:r>
             <a:endParaRPr lang="en-US" sz="4000" dirty="0"/>
           </a:p>
@@ -7771,7 +8483,7 @@
                 <a:ea typeface="Times New Roman" pitchFamily="34" charset="-122"/>
                 <a:cs typeface="Times New Roman" pitchFamily="34" charset="-120"/>
               </a:rPr>
-              <a:t>Know what to do during an earthquake: take cover, protect your head and stay away from walls.</a:t>
+              <a:t>Know what to do during an earthquake: take cover, protect your head and stay away from walls and windows.</a:t>
             </a:r>
             <a:endParaRPr lang="en-US" sz="4000" dirty="0"/>
           </a:p>
@@ -8102,7 +8814,7 @@
                 <a:ea typeface="Calibri" pitchFamily="34" charset="-122"/>
                 <a:cs typeface="Calibri" pitchFamily="34" charset="-120"/>
               </a:rPr>
-              <a:t>1. MEANING AND CAUSES</a:t>
+              <a:t>DEFINITIONS</a:t>
             </a:r>
             <a:endParaRPr lang="en-US" sz="1400" dirty="0"/>
           </a:p>
@@ -8911,7 +9623,7 @@
                 <a:ea typeface="Calibri" pitchFamily="34" charset="-122"/>
                 <a:cs typeface="Calibri" pitchFamily="34" charset="-120"/>
               </a:rPr>
-              <a:t>1. MEANING AND CAUSES</a:t>
+              <a:t>DEFINITIONS</a:t>
             </a:r>
             <a:endParaRPr lang="en-US" sz="1400" dirty="0"/>
           </a:p>
@@ -8976,7 +9688,7 @@
                 <a:ea typeface="Times New Roman" pitchFamily="34" charset="-122"/>
                 <a:cs typeface="Times New Roman" pitchFamily="34" charset="-120"/>
               </a:rPr>
-              <a:t>Activity 1: Question</a:t>
+              <a:t>Activity 1: Question 1</a:t>
             </a:r>
             <a:endParaRPr lang="en-US" sz="3600" dirty="0"/>
           </a:p>
@@ -9018,7 +9730,7 @@
                 <a:ea typeface="Times New Roman" pitchFamily="34" charset="-122"/>
                 <a:cs typeface="Times New Roman" pitchFamily="34" charset="-120"/>
               </a:rPr>
-              <a:t>Where does the earthquake start? What is the point just above it?</a:t>
+              <a:t>Where does the earthquake start?</a:t>
             </a:r>
             <a:endParaRPr lang="en-US" sz="4000" dirty="0"/>
           </a:p>
@@ -9130,7 +9842,7 @@
                 <a:ea typeface="Calibri" pitchFamily="34" charset="-122"/>
                 <a:cs typeface="Calibri" pitchFamily="34" charset="-120"/>
               </a:rPr>
-              <a:t>1. MEANING AND CAUSES</a:t>
+              <a:t>DEFINITIONS</a:t>
             </a:r>
             <a:endParaRPr lang="en-US" sz="1400" dirty="0"/>
           </a:p>
@@ -9195,7 +9907,7 @@
                 <a:ea typeface="Times New Roman" pitchFamily="34" charset="-122"/>
                 <a:cs typeface="Times New Roman" pitchFamily="34" charset="-120"/>
               </a:rPr>
-              <a:t>Activity 1: Answer</a:t>
+              <a:t>Activity 1: Answer 1</a:t>
             </a:r>
             <a:endParaRPr lang="en-US" sz="3600" dirty="0"/>
           </a:p>
@@ -9237,7 +9949,7 @@
                 <a:ea typeface="Times New Roman" pitchFamily="34" charset="-122"/>
                 <a:cs typeface="Times New Roman" pitchFamily="34" charset="-120"/>
               </a:rPr>
-              <a:t>It starts at the focus. The point above is the epicentre.</a:t>
+              <a:t>At the focus.</a:t>
             </a:r>
             <a:endParaRPr lang="en-US" sz="4000" dirty="0"/>
           </a:p>
@@ -9349,54 +10061,15 @@
                 <a:ea typeface="Calibri" pitchFamily="34" charset="-122"/>
                 <a:cs typeface="Calibri" pitchFamily="34" charset="-120"/>
               </a:rPr>
-              <a:t>2. MANIFESTATION</a:t>
+              <a:t>DEFINITIONS</a:t>
             </a:r>
             <a:endParaRPr lang="en-US" sz="1400" dirty="0"/>
-          </a:p>
-        </p:txBody>
-      </p:sp>
-      <p:sp>
-        <p:nvSpPr>
-          <p:cNvPr id="3" name="Text 1"/>
-          <p:cNvSpPr/>
-          <p:nvPr/>
-        </p:nvSpPr>
-        <p:spPr>
-          <a:xfrm>
-            <a:off x="457200" y="1005840"/>
-            <a:ext cx="11277295" cy="731520"/>
-          </a:xfrm>
-          <a:prstGeom prst="rect">
-            <a:avLst/>
-          </a:prstGeom>
-          <a:noFill/>
-          <a:ln/>
-        </p:spPr>
-        <p:txBody>
-          <a:bodyPr wrap="square" lIns="0" tIns="0" rIns="0" bIns="0" rtlCol="0" anchor="ctr"/>
-          <a:lstStyle/>
-          <a:p>
-            <a:pPr algn="ctr" indent="0" marL="0">
-              <a:buNone/>
-            </a:pPr>
-            <a:r>
-              <a:rPr lang="en-US" sz="3600" b="1" dirty="0">
-                <a:solidFill>
-                  <a:srgbClr val="990011"/>
-                </a:solidFill>
-                <a:latin typeface="Times New Roman" pitchFamily="34" charset="0"/>
-                <a:ea typeface="Times New Roman" pitchFamily="34" charset="-122"/>
-                <a:cs typeface="Times New Roman" pitchFamily="34" charset="-120"/>
-              </a:rPr>
-              <a:t>Activity 2</a:t>
-            </a:r>
-            <a:endParaRPr lang="en-US" sz="3600" dirty="0"/>
           </a:p>
         </p:txBody>
       </p:sp>
       <p:pic>
         <p:nvPicPr>
-          <p:cNvPr id="4" name="Image 0" descr="/home/claude/f4/img/v2/f4_seismograph.jpg">    </p:cNvPr>
+          <p:cNvPr id="3" name="Image 0" descr="/home/claude/f4/img/minesec_sheet.png">    </p:cNvPr>
           <p:cNvPicPr>
             <a:picLocks noChangeAspect="1"/>
           </p:cNvPicPr>
@@ -9410,14 +10083,55 @@
         </p:blipFill>
         <p:spPr>
           <a:xfrm>
-            <a:off x="2251123" y="1783080"/>
-            <a:ext cx="7689450" cy="4270248"/>
+            <a:off x="0" y="658368"/>
+            <a:ext cx="5120640" cy="5833872"/>
           </a:xfrm>
           <a:prstGeom prst="rect">
             <a:avLst/>
           </a:prstGeom>
         </p:spPr>
       </p:pic>
+      <p:sp>
+        <p:nvSpPr>
+          <p:cNvPr id="4" name="Text 1"/>
+          <p:cNvSpPr/>
+          <p:nvPr/>
+        </p:nvSpPr>
+        <p:spPr>
+          <a:xfrm>
+            <a:off x="5349240" y="1005840"/>
+            <a:ext cx="6522415" cy="731520"/>
+          </a:xfrm>
+          <a:prstGeom prst="rect">
+            <a:avLst/>
+          </a:prstGeom>
+          <a:noFill/>
+          <a:ln/>
+        </p:spPr>
+        <p:txBody>
+          <a:bodyPr wrap="square" lIns="0" tIns="0" rIns="0" bIns="0" rtlCol="0" anchor="ctr">
+            <a:normAutofit/>
+          </a:bodyPr>
+          <a:lstStyle/>
+          <a:p>
+            <a:pPr algn="ctr" indent="0" marL="0">
+              <a:buNone/>
+            </a:pPr>
+            <a:r>
+              <a:rPr lang="en-US" sz="3600" b="1" dirty="0">
+                <a:solidFill>
+                  <a:srgbClr val="990011"/>
+                </a:solidFill>
+                <a:latin typeface="Times New Roman" pitchFamily="34" charset="0"/>
+                <a:ea typeface="Times New Roman" pitchFamily="34" charset="-122"/>
+                <a:cs typeface="Times New Roman" pitchFamily="34" charset="-120"/>
+              </a:rPr>
+              <a:t>Activity 1: Question 2</a:t>
+            </a:r>
+            <a:endParaRPr lang="en-US" sz="3600" dirty="0"/>
+          </a:p>
+        </p:txBody>
+      </p:sp>
       <p:sp>
         <p:nvSpPr>
           <p:cNvPr id="5" name="Text 2"/>
@@ -9426,8 +10140,8 @@
         </p:nvSpPr>
         <p:spPr>
           <a:xfrm>
-            <a:off x="457200" y="6089904"/>
-            <a:ext cx="11277295" cy="347472"/>
+            <a:off x="5349240" y="1783080"/>
+            <a:ext cx="6522415" cy="4663440"/>
           </a:xfrm>
           <a:prstGeom prst="rect">
             <a:avLst/>
@@ -9436,24 +10150,27 @@
           <a:ln/>
         </p:spPr>
         <p:txBody>
-          <a:bodyPr wrap="square" lIns="0" tIns="0" rIns="0" bIns="0" rtlCol="0" anchor="ctr"/>
-          <a:lstStyle/>
-          <a:p>
-            <a:pPr algn="ctr" indent="0" marL="0">
+          <a:bodyPr wrap="square" lIns="0" tIns="0" rIns="0" bIns="0" rtlCol="0" anchor="t"/>
+          <a:lstStyle/>
+          <a:p>
+            <a:pPr algn="l" indent="0" marL="0">
+              <a:spcAft>
+                <a:spcPts val="800"/>
+              </a:spcAft>
               <a:buNone/>
             </a:pPr>
             <a:r>
-              <a:rPr lang="en-US" sz="1800" i="1" dirty="0">
-                <a:solidFill>
-                  <a:srgbClr val="555555"/>
+              <a:rPr lang="en-US" sz="4000" dirty="0">
+                <a:solidFill>
+                  <a:srgbClr val="111111"/>
                 </a:solidFill>
                 <a:latin typeface="Times New Roman" pitchFamily="34" charset="0"/>
                 <a:ea typeface="Times New Roman" pitchFamily="34" charset="-122"/>
                 <a:cs typeface="Times New Roman" pitchFamily="34" charset="-120"/>
               </a:rPr>
-              <a:t>A seismograph.</a:t>
-            </a:r>
-            <a:endParaRPr lang="en-US" sz="1800" dirty="0"/>
+              <a:t>What is the point on the surface just above it?</a:t>
+            </a:r>
+            <a:endParaRPr lang="en-US" sz="4000" dirty="0"/>
           </a:p>
         </p:txBody>
       </p:sp>
@@ -9563,7 +10280,7 @@
                 <a:ea typeface="Calibri" pitchFamily="34" charset="-122"/>
                 <a:cs typeface="Calibri" pitchFamily="34" charset="-120"/>
               </a:rPr>
-              <a:t>2. MANIFESTATION</a:t>
+              <a:t>DEFINITIONS</a:t>
             </a:r>
             <a:endParaRPr lang="en-US" sz="1400" dirty="0"/>
           </a:p>
@@ -9628,7 +10345,7 @@
                 <a:ea typeface="Times New Roman" pitchFamily="34" charset="-122"/>
                 <a:cs typeface="Times New Roman" pitchFamily="34" charset="-120"/>
               </a:rPr>
-              <a:t>Activity 2: Question</a:t>
+              <a:t>Activity 1: Answer 2</a:t>
             </a:r>
             <a:endParaRPr lang="en-US" sz="3600" dirty="0"/>
           </a:p>
@@ -9670,7 +10387,7 @@
                 <a:ea typeface="Times New Roman" pitchFamily="34" charset="-122"/>
                 <a:cs typeface="Times New Roman" pitchFamily="34" charset="-120"/>
               </a:rPr>
-              <a:t>What does this instrument do?</a:t>
+              <a:t>The epicentre.</a:t>
             </a:r>
             <a:endParaRPr lang="en-US" sz="4000" dirty="0"/>
           </a:p>
@@ -9788,9 +10505,48 @@
           </a:p>
         </p:txBody>
       </p:sp>
+      <p:sp>
+        <p:nvSpPr>
+          <p:cNvPr id="3" name="Text 1"/>
+          <p:cNvSpPr/>
+          <p:nvPr/>
+        </p:nvSpPr>
+        <p:spPr>
+          <a:xfrm>
+            <a:off x="457200" y="1005840"/>
+            <a:ext cx="11277295" cy="731520"/>
+          </a:xfrm>
+          <a:prstGeom prst="rect">
+            <a:avLst/>
+          </a:prstGeom>
+          <a:noFill/>
+          <a:ln/>
+        </p:spPr>
+        <p:txBody>
+          <a:bodyPr wrap="square" lIns="0" tIns="0" rIns="0" bIns="0" rtlCol="0" anchor="ctr"/>
+          <a:lstStyle/>
+          <a:p>
+            <a:pPr algn="ctr" indent="0" marL="0">
+              <a:buNone/>
+            </a:pPr>
+            <a:r>
+              <a:rPr lang="en-US" sz="3600" b="1" dirty="0">
+                <a:solidFill>
+                  <a:srgbClr val="990011"/>
+                </a:solidFill>
+                <a:latin typeface="Times New Roman" pitchFamily="34" charset="0"/>
+                <a:ea typeface="Times New Roman" pitchFamily="34" charset="-122"/>
+                <a:cs typeface="Times New Roman" pitchFamily="34" charset="-120"/>
+              </a:rPr>
+              <a:t>Activity 2</a:t>
+            </a:r>
+            <a:endParaRPr lang="en-US" sz="3600" dirty="0"/>
+          </a:p>
+        </p:txBody>
+      </p:sp>
       <p:pic>
         <p:nvPicPr>
-          <p:cNvPr id="3" name="Image 0" descr="/home/claude/f4/img/minesec_sheet.png">    </p:cNvPr>
+          <p:cNvPr id="4" name="Image 0" descr="/home/claude/f4/img/v2/f4_seismograph.jpg">    </p:cNvPr>
           <p:cNvPicPr>
             <a:picLocks noChangeAspect="1"/>
           </p:cNvPicPr>
@@ -9804,8 +10560,8 @@
         </p:blipFill>
         <p:spPr>
           <a:xfrm>
-            <a:off x="0" y="658368"/>
-            <a:ext cx="5120640" cy="5833872"/>
+            <a:off x="2251123" y="1783080"/>
+            <a:ext cx="7689450" cy="4270248"/>
           </a:xfrm>
           <a:prstGeom prst="rect">
             <a:avLst/>
@@ -9814,14 +10570,14 @@
       </p:pic>
       <p:sp>
         <p:nvSpPr>
-          <p:cNvPr id="4" name="Text 1"/>
+          <p:cNvPr id="5" name="Text 2"/>
           <p:cNvSpPr/>
           <p:nvPr/>
         </p:nvSpPr>
         <p:spPr>
           <a:xfrm>
-            <a:off x="5349240" y="1005840"/>
-            <a:ext cx="6522415" cy="731520"/>
+            <a:off x="457200" y="6089904"/>
+            <a:ext cx="11277295" cy="347472"/>
           </a:xfrm>
           <a:prstGeom prst="rect">
             <a:avLst/>
@@ -9830,68 +10586,24 @@
           <a:ln/>
         </p:spPr>
         <p:txBody>
-          <a:bodyPr wrap="square" lIns="0" tIns="0" rIns="0" bIns="0" rtlCol="0" anchor="ctr">
-            <a:normAutofit/>
-          </a:bodyPr>
+          <a:bodyPr wrap="square" lIns="0" tIns="0" rIns="0" bIns="0" rtlCol="0" anchor="ctr"/>
           <a:lstStyle/>
           <a:p>
             <a:pPr algn="ctr" indent="0" marL="0">
               <a:buNone/>
             </a:pPr>
             <a:r>
-              <a:rPr lang="en-US" sz="3600" b="1" dirty="0">
-                <a:solidFill>
-                  <a:srgbClr val="990011"/>
+              <a:rPr lang="en-US" sz="1800" i="1" dirty="0">
+                <a:solidFill>
+                  <a:srgbClr val="555555"/>
                 </a:solidFill>
                 <a:latin typeface="Times New Roman" pitchFamily="34" charset="0"/>
                 <a:ea typeface="Times New Roman" pitchFamily="34" charset="-122"/>
                 <a:cs typeface="Times New Roman" pitchFamily="34" charset="-120"/>
               </a:rPr>
-              <a:t>Activity 2: Answer</a:t>
-            </a:r>
-            <a:endParaRPr lang="en-US" sz="3600" dirty="0"/>
-          </a:p>
-        </p:txBody>
-      </p:sp>
-      <p:sp>
-        <p:nvSpPr>
-          <p:cNvPr id="5" name="Text 2"/>
-          <p:cNvSpPr/>
-          <p:nvPr/>
-        </p:nvSpPr>
-        <p:spPr>
-          <a:xfrm>
-            <a:off x="5349240" y="1783080"/>
-            <a:ext cx="6522415" cy="4663440"/>
-          </a:xfrm>
-          <a:prstGeom prst="rect">
-            <a:avLst/>
-          </a:prstGeom>
-          <a:noFill/>
-          <a:ln/>
-        </p:spPr>
-        <p:txBody>
-          <a:bodyPr wrap="square" lIns="0" tIns="0" rIns="0" bIns="0" rtlCol="0" anchor="t"/>
-          <a:lstStyle/>
-          <a:p>
-            <a:pPr algn="l" indent="0" marL="0">
-              <a:spcAft>
-                <a:spcPts val="800"/>
-              </a:spcAft>
-              <a:buNone/>
-            </a:pPr>
-            <a:r>
-              <a:rPr lang="en-US" sz="4000" dirty="0">
-                <a:solidFill>
-                  <a:srgbClr val="111111"/>
-                </a:solidFill>
-                <a:latin typeface="Times New Roman" pitchFamily="34" charset="0"/>
-                <a:ea typeface="Times New Roman" pitchFamily="34" charset="-122"/>
-                <a:cs typeface="Times New Roman" pitchFamily="34" charset="-120"/>
-              </a:rPr>
-              <a:t>It records the shaking of the ground.</a:t>
-            </a:r>
-            <a:endParaRPr lang="en-US" sz="4000" dirty="0"/>
+              <a:t>A seismograph.</a:t>
+            </a:r>
+            <a:endParaRPr lang="en-US" sz="1800" dirty="0"/>
           </a:p>
         </p:txBody>
       </p:sp>
@@ -10001,54 +10713,15 @@
                 <a:ea typeface="Calibri" pitchFamily="34" charset="-122"/>
                 <a:cs typeface="Calibri" pitchFamily="34" charset="-120"/>
               </a:rPr>
-              <a:t>3. IMPACT ON MAN</a:t>
+              <a:t>2. MANIFESTATION</a:t>
             </a:r>
             <a:endParaRPr lang="en-US" sz="1400" dirty="0"/>
-          </a:p>
-        </p:txBody>
-      </p:sp>
-      <p:sp>
-        <p:nvSpPr>
-          <p:cNvPr id="3" name="Text 1"/>
-          <p:cNvSpPr/>
-          <p:nvPr/>
-        </p:nvSpPr>
-        <p:spPr>
-          <a:xfrm>
-            <a:off x="457200" y="1005840"/>
-            <a:ext cx="11277295" cy="731520"/>
-          </a:xfrm>
-          <a:prstGeom prst="rect">
-            <a:avLst/>
-          </a:prstGeom>
-          <a:noFill/>
-          <a:ln/>
-        </p:spPr>
-        <p:txBody>
-          <a:bodyPr wrap="square" lIns="0" tIns="0" rIns="0" bIns="0" rtlCol="0" anchor="ctr"/>
-          <a:lstStyle/>
-          <a:p>
-            <a:pPr algn="ctr" indent="0" marL="0">
-              <a:buNone/>
-            </a:pPr>
-            <a:r>
-              <a:rPr lang="en-US" sz="3600" b="1" dirty="0">
-                <a:solidFill>
-                  <a:srgbClr val="990011"/>
-                </a:solidFill>
-                <a:latin typeface="Times New Roman" pitchFamily="34" charset="0"/>
-                <a:ea typeface="Times New Roman" pitchFamily="34" charset="-122"/>
-                <a:cs typeface="Times New Roman" pitchFamily="34" charset="-120"/>
-              </a:rPr>
-              <a:t>Activity 3</a:t>
-            </a:r>
-            <a:endParaRPr lang="en-US" sz="3600" dirty="0"/>
           </a:p>
         </p:txBody>
       </p:sp>
       <p:pic>
         <p:nvPicPr>
-          <p:cNvPr id="4" name="Image 0" descr="/home/claude/f4/img/v2/f4_quakedamage.jpg">    </p:cNvPr>
+          <p:cNvPr id="3" name="Image 0" descr="/home/claude/f4/img/minesec_sheet.png">    </p:cNvPr>
           <p:cNvPicPr>
             <a:picLocks noChangeAspect="1"/>
           </p:cNvPicPr>
@@ -10062,14 +10735,55 @@
         </p:blipFill>
         <p:spPr>
           <a:xfrm>
-            <a:off x="2250369" y="1783080"/>
-            <a:ext cx="7690957" cy="4270248"/>
+            <a:off x="0" y="658368"/>
+            <a:ext cx="5120640" cy="5833872"/>
           </a:xfrm>
           <a:prstGeom prst="rect">
             <a:avLst/>
           </a:prstGeom>
         </p:spPr>
       </p:pic>
+      <p:sp>
+        <p:nvSpPr>
+          <p:cNvPr id="4" name="Text 1"/>
+          <p:cNvSpPr/>
+          <p:nvPr/>
+        </p:nvSpPr>
+        <p:spPr>
+          <a:xfrm>
+            <a:off x="5349240" y="1005840"/>
+            <a:ext cx="6522415" cy="731520"/>
+          </a:xfrm>
+          <a:prstGeom prst="rect">
+            <a:avLst/>
+          </a:prstGeom>
+          <a:noFill/>
+          <a:ln/>
+        </p:spPr>
+        <p:txBody>
+          <a:bodyPr wrap="square" lIns="0" tIns="0" rIns="0" bIns="0" rtlCol="0" anchor="ctr">
+            <a:normAutofit/>
+          </a:bodyPr>
+          <a:lstStyle/>
+          <a:p>
+            <a:pPr algn="ctr" indent="0" marL="0">
+              <a:buNone/>
+            </a:pPr>
+            <a:r>
+              <a:rPr lang="en-US" sz="3600" b="1" dirty="0">
+                <a:solidFill>
+                  <a:srgbClr val="990011"/>
+                </a:solidFill>
+                <a:latin typeface="Times New Roman" pitchFamily="34" charset="0"/>
+                <a:ea typeface="Times New Roman" pitchFamily="34" charset="-122"/>
+                <a:cs typeface="Times New Roman" pitchFamily="34" charset="-120"/>
+              </a:rPr>
+              <a:t>Activity 2: Question</a:t>
+            </a:r>
+            <a:endParaRPr lang="en-US" sz="3600" dirty="0"/>
+          </a:p>
+        </p:txBody>
+      </p:sp>
       <p:sp>
         <p:nvSpPr>
           <p:cNvPr id="5" name="Text 2"/>
@@ -10078,8 +10792,8 @@
         </p:nvSpPr>
         <p:spPr>
           <a:xfrm>
-            <a:off x="457200" y="6089904"/>
-            <a:ext cx="11277295" cy="347472"/>
+            <a:off x="5349240" y="1783080"/>
+            <a:ext cx="6522415" cy="4663440"/>
           </a:xfrm>
           <a:prstGeom prst="rect">
             <a:avLst/>
@@ -10088,24 +10802,27 @@
           <a:ln/>
         </p:spPr>
         <p:txBody>
-          <a:bodyPr wrap="square" lIns="0" tIns="0" rIns="0" bIns="0" rtlCol="0" anchor="ctr"/>
-          <a:lstStyle/>
-          <a:p>
-            <a:pPr algn="ctr" indent="0" marL="0">
+          <a:bodyPr wrap="square" lIns="0" tIns="0" rIns="0" bIns="0" rtlCol="0" anchor="t"/>
+          <a:lstStyle/>
+          <a:p>
+            <a:pPr algn="l" indent="0" marL="0">
+              <a:spcAft>
+                <a:spcPts val="800"/>
+              </a:spcAft>
               <a:buNone/>
             </a:pPr>
             <a:r>
-              <a:rPr lang="en-US" sz="1800" i="1" dirty="0">
-                <a:solidFill>
-                  <a:srgbClr val="555555"/>
+              <a:rPr lang="en-US" sz="4000" dirty="0">
+                <a:solidFill>
+                  <a:srgbClr val="111111"/>
                 </a:solidFill>
                 <a:latin typeface="Times New Roman" pitchFamily="34" charset="0"/>
                 <a:ea typeface="Times New Roman" pitchFamily="34" charset="-122"/>
                 <a:cs typeface="Times New Roman" pitchFamily="34" charset="-120"/>
               </a:rPr>
-              <a:t>Houses destroyed by an earthquake.</a:t>
-            </a:r>
-            <a:endParaRPr lang="en-US" sz="1800" dirty="0"/>
+              <a:t>What does this instrument record?</a:t>
+            </a:r>
+            <a:endParaRPr lang="en-US" sz="4000" dirty="0"/>
           </a:p>
         </p:txBody>
       </p:sp>
@@ -10215,7 +10932,7 @@
                 <a:ea typeface="Calibri" pitchFamily="34" charset="-122"/>
                 <a:cs typeface="Calibri" pitchFamily="34" charset="-120"/>
               </a:rPr>
-              <a:t>3. IMPACT ON MAN</a:t>
+              <a:t>2. MANIFESTATION</a:t>
             </a:r>
             <a:endParaRPr lang="en-US" sz="1400" dirty="0"/>
           </a:p>
@@ -10280,7 +10997,7 @@
                 <a:ea typeface="Times New Roman" pitchFamily="34" charset="-122"/>
                 <a:cs typeface="Times New Roman" pitchFamily="34" charset="-120"/>
               </a:rPr>
-              <a:t>Activity 3: Question</a:t>
+              <a:t>Activity 2: Answer</a:t>
             </a:r>
             <a:endParaRPr lang="en-US" sz="3600" dirty="0"/>
           </a:p>
@@ -10322,7 +11039,7 @@
                 <a:ea typeface="Times New Roman" pitchFamily="34" charset="-122"/>
                 <a:cs typeface="Times New Roman" pitchFamily="34" charset="-120"/>
               </a:rPr>
-              <a:t>What is the main cause of death during an earthquake?</a:t>
+              <a:t>The shaking (seismic waves) of the ground.</a:t>
             </a:r>
             <a:endParaRPr lang="en-US" sz="4000" dirty="0"/>
           </a:p>
@@ -10440,9 +11157,48 @@
           </a:p>
         </p:txBody>
       </p:sp>
+      <p:sp>
+        <p:nvSpPr>
+          <p:cNvPr id="3" name="Text 1"/>
+          <p:cNvSpPr/>
+          <p:nvPr/>
+        </p:nvSpPr>
+        <p:spPr>
+          <a:xfrm>
+            <a:off x="457200" y="1005840"/>
+            <a:ext cx="11277295" cy="731520"/>
+          </a:xfrm>
+          <a:prstGeom prst="rect">
+            <a:avLst/>
+          </a:prstGeom>
+          <a:noFill/>
+          <a:ln/>
+        </p:spPr>
+        <p:txBody>
+          <a:bodyPr wrap="square" lIns="0" tIns="0" rIns="0" bIns="0" rtlCol="0" anchor="ctr"/>
+          <a:lstStyle/>
+          <a:p>
+            <a:pPr algn="ctr" indent="0" marL="0">
+              <a:buNone/>
+            </a:pPr>
+            <a:r>
+              <a:rPr lang="en-US" sz="3600" b="1" dirty="0">
+                <a:solidFill>
+                  <a:srgbClr val="990011"/>
+                </a:solidFill>
+                <a:latin typeface="Times New Roman" pitchFamily="34" charset="0"/>
+                <a:ea typeface="Times New Roman" pitchFamily="34" charset="-122"/>
+                <a:cs typeface="Times New Roman" pitchFamily="34" charset="-120"/>
+              </a:rPr>
+              <a:t>Activity 3</a:t>
+            </a:r>
+            <a:endParaRPr lang="en-US" sz="3600" dirty="0"/>
+          </a:p>
+        </p:txBody>
+      </p:sp>
       <p:pic>
         <p:nvPicPr>
-          <p:cNvPr id="3" name="Image 0" descr="/home/claude/f4/img/minesec_sheet.png">    </p:cNvPr>
+          <p:cNvPr id="4" name="Image 0" descr="/home/claude/f4/img/v2/f4_quakedamage.jpg">    </p:cNvPr>
           <p:cNvPicPr>
             <a:picLocks noChangeAspect="1"/>
           </p:cNvPicPr>
@@ -10456,8 +11212,8 @@
         </p:blipFill>
         <p:spPr>
           <a:xfrm>
-            <a:off x="0" y="658368"/>
-            <a:ext cx="5120640" cy="5833872"/>
+            <a:off x="2250369" y="1783080"/>
+            <a:ext cx="7690957" cy="4270248"/>
           </a:xfrm>
           <a:prstGeom prst="rect">
             <a:avLst/>
@@ -10466,14 +11222,14 @@
       </p:pic>
       <p:sp>
         <p:nvSpPr>
-          <p:cNvPr id="4" name="Text 1"/>
+          <p:cNvPr id="5" name="Text 2"/>
           <p:cNvSpPr/>
           <p:nvPr/>
         </p:nvSpPr>
         <p:spPr>
           <a:xfrm>
-            <a:off x="5349240" y="1005840"/>
-            <a:ext cx="6522415" cy="731520"/>
+            <a:off x="457200" y="6089904"/>
+            <a:ext cx="11277295" cy="347472"/>
           </a:xfrm>
           <a:prstGeom prst="rect">
             <a:avLst/>
@@ -10482,68 +11238,24 @@
           <a:ln/>
         </p:spPr>
         <p:txBody>
-          <a:bodyPr wrap="square" lIns="0" tIns="0" rIns="0" bIns="0" rtlCol="0" anchor="ctr">
-            <a:normAutofit/>
-          </a:bodyPr>
+          <a:bodyPr wrap="square" lIns="0" tIns="0" rIns="0" bIns="0" rtlCol="0" anchor="ctr"/>
           <a:lstStyle/>
           <a:p>
             <a:pPr algn="ctr" indent="0" marL="0">
               <a:buNone/>
             </a:pPr>
             <a:r>
-              <a:rPr lang="en-US" sz="3600" b="1" dirty="0">
-                <a:solidFill>
-                  <a:srgbClr val="990011"/>
+              <a:rPr lang="en-US" sz="1800" i="1" dirty="0">
+                <a:solidFill>
+                  <a:srgbClr val="555555"/>
                 </a:solidFill>
                 <a:latin typeface="Times New Roman" pitchFamily="34" charset="0"/>
                 <a:ea typeface="Times New Roman" pitchFamily="34" charset="-122"/>
                 <a:cs typeface="Times New Roman" pitchFamily="34" charset="-120"/>
               </a:rPr>
-              <a:t>Activity 3: Answer</a:t>
-            </a:r>
-            <a:endParaRPr lang="en-US" sz="3600" dirty="0"/>
-          </a:p>
-        </p:txBody>
-      </p:sp>
-      <p:sp>
-        <p:nvSpPr>
-          <p:cNvPr id="5" name="Text 2"/>
-          <p:cNvSpPr/>
-          <p:nvPr/>
-        </p:nvSpPr>
-        <p:spPr>
-          <a:xfrm>
-            <a:off x="5349240" y="1783080"/>
-            <a:ext cx="6522415" cy="4663440"/>
-          </a:xfrm>
-          <a:prstGeom prst="rect">
-            <a:avLst/>
-          </a:prstGeom>
-          <a:noFill/>
-          <a:ln/>
-        </p:spPr>
-        <p:txBody>
-          <a:bodyPr wrap="square" lIns="0" tIns="0" rIns="0" bIns="0" rtlCol="0" anchor="t"/>
-          <a:lstStyle/>
-          <a:p>
-            <a:pPr algn="l" indent="0" marL="0">
-              <a:spcAft>
-                <a:spcPts val="800"/>
-              </a:spcAft>
-              <a:buNone/>
-            </a:pPr>
-            <a:r>
-              <a:rPr lang="en-US" sz="4000" dirty="0">
-                <a:solidFill>
-                  <a:srgbClr val="111111"/>
-                </a:solidFill>
-                <a:latin typeface="Times New Roman" pitchFamily="34" charset="0"/>
-                <a:ea typeface="Times New Roman" pitchFamily="34" charset="-122"/>
-                <a:cs typeface="Times New Roman" pitchFamily="34" charset="-120"/>
-              </a:rPr>
-              <a:t>Buildings fall on people.</a:t>
-            </a:r>
-            <a:endParaRPr lang="en-US" sz="4000" dirty="0"/>
+              <a:t>Houses destroyed by an earthquake.</a:t>
+            </a:r>
+            <a:endParaRPr lang="en-US" sz="1800" dirty="0"/>
           </a:p>
         </p:txBody>
       </p:sp>
@@ -10653,7 +11365,7 @@
                 <a:ea typeface="Calibri" pitchFamily="34" charset="-122"/>
                 <a:cs typeface="Calibri" pitchFamily="34" charset="-120"/>
               </a:rPr>
-              <a:t>BOARD SUMMARY</a:t>
+              <a:t>3. IMPACT ON MAN</a:t>
             </a:r>
             <a:endParaRPr lang="en-US" sz="1400" dirty="0"/>
           </a:p>
@@ -10718,7 +11430,7 @@
                 <a:ea typeface="Times New Roman" pitchFamily="34" charset="-122"/>
                 <a:cs typeface="Times New Roman" pitchFamily="34" charset="-120"/>
               </a:rPr>
-              <a:t>Board Summary</a:t>
+              <a:t>Activity 3: Question</a:t>
             </a:r>
             <a:endParaRPr lang="en-US" sz="3600" dirty="0"/>
           </a:p>
@@ -10752,7 +11464,7 @@
               <a:buNone/>
             </a:pPr>
             <a:r>
-              <a:rPr lang="en-US" sz="4000" b="1" dirty="0">
+              <a:rPr lang="en-US" sz="4000" dirty="0">
                 <a:solidFill>
                   <a:srgbClr val="111111"/>
                 </a:solidFill>
@@ -10760,47 +11472,7 @@
                 <a:ea typeface="Times New Roman" pitchFamily="34" charset="-122"/>
                 <a:cs typeface="Times New Roman" pitchFamily="34" charset="-120"/>
               </a:rPr>
-              <a:t>Topic: The Structure of the Earth: Building Processes and Impacts on Man</a:t>
-            </a:r>
-            <a:endParaRPr lang="en-US" sz="4000" dirty="0"/>
-          </a:p>
-          <a:p>
-            <a:pPr algn="l" indent="0" marL="0">
-              <a:spcAft>
-                <a:spcPts val="800"/>
-              </a:spcAft>
-              <a:buNone/>
-            </a:pPr>
-            <a:r>
-              <a:rPr lang="en-US" sz="4000" b="1" dirty="0">
-                <a:solidFill>
-                  <a:srgbClr val="111111"/>
-                </a:solidFill>
-                <a:latin typeface="Times New Roman" pitchFamily="34" charset="0"/>
-                <a:ea typeface="Times New Roman" pitchFamily="34" charset="-122"/>
-                <a:cs typeface="Times New Roman" pitchFamily="34" charset="-120"/>
-              </a:rPr>
-              <a:t>Sub-topic: Seismic Activities and Man</a:t>
-            </a:r>
-            <a:endParaRPr lang="en-US" sz="4000" dirty="0"/>
-          </a:p>
-          <a:p>
-            <a:pPr algn="l" indent="0" marL="0">
-              <a:spcAft>
-                <a:spcPts val="800"/>
-              </a:spcAft>
-              <a:buNone/>
-            </a:pPr>
-            <a:r>
-              <a:rPr lang="en-US" sz="4000" b="1" dirty="0">
-                <a:solidFill>
-                  <a:srgbClr val="990011"/>
-                </a:solidFill>
-                <a:latin typeface="Times New Roman" pitchFamily="34" charset="0"/>
-                <a:ea typeface="Times New Roman" pitchFamily="34" charset="-122"/>
-                <a:cs typeface="Times New Roman" pitchFamily="34" charset="-120"/>
-              </a:rPr>
-              <a:t>Lesson 13: Earthquakes</a:t>
+              <a:t>What is the main cause of death during an earthquake?</a:t>
             </a:r>
             <a:endParaRPr lang="en-US" sz="4000" dirty="0"/>
           </a:p>
@@ -10912,7 +11584,7 @@
                 <a:ea typeface="Calibri" pitchFamily="34" charset="-122"/>
                 <a:cs typeface="Calibri" pitchFamily="34" charset="-120"/>
               </a:rPr>
-              <a:t>BOARD SUMMARY</a:t>
+              <a:t>3. IMPACT ON MAN</a:t>
             </a:r>
             <a:endParaRPr lang="en-US" sz="1400" dirty="0"/>
           </a:p>
@@ -10977,7 +11649,7 @@
                 <a:ea typeface="Times New Roman" pitchFamily="34" charset="-122"/>
                 <a:cs typeface="Times New Roman" pitchFamily="34" charset="-120"/>
               </a:rPr>
-              <a:t>DEFINITIONS</a:t>
+              <a:t>Activity 3: Answer</a:t>
             </a:r>
             <a:endParaRPr lang="en-US" sz="3600" dirty="0"/>
           </a:p>
@@ -11011,7 +11683,7 @@
               <a:buNone/>
             </a:pPr>
             <a:r>
-              <a:rPr lang="en-US" sz="4000" i="1" dirty="0">
+              <a:rPr lang="en-US" sz="4000" dirty="0">
                 <a:solidFill>
                   <a:srgbClr val="111111"/>
                 </a:solidFill>
@@ -11019,81 +11691,7 @@
                 <a:ea typeface="Times New Roman" pitchFamily="34" charset="-122"/>
                 <a:cs typeface="Times New Roman" pitchFamily="34" charset="-120"/>
               </a:rPr>
-              <a:t>The key terms of this lesson are defined as follows:</a:t>
-            </a:r>
-            <a:endParaRPr lang="en-US" sz="4000" dirty="0"/>
-          </a:p>
-          <a:p>
-            <a:pPr algn="l" indent="0" marL="0">
-              <a:spcAft>
-                <a:spcPts val="800"/>
-              </a:spcAft>
-              <a:buNone/>
-            </a:pPr>
-            <a:r>
-              <a:rPr lang="en-US" sz="4000" b="1" dirty="0">
-                <a:solidFill>
-                  <a:srgbClr val="111111"/>
-                </a:solidFill>
-                <a:latin typeface="Times New Roman" pitchFamily="34" charset="0"/>
-                <a:ea typeface="Times New Roman" pitchFamily="34" charset="-122"/>
-                <a:cs typeface="Times New Roman" pitchFamily="34" charset="-120"/>
-              </a:rPr>
-              <a:t>Earthquake: </a:t>
-            </a:r>
-            <a:pPr algn="l" indent="0" marL="0">
-              <a:spcAft>
-                <a:spcPts val="800"/>
-              </a:spcAft>
-              <a:buNone/>
-            </a:pPr>
-            <a:r>
-              <a:rPr lang="en-US" sz="4000" dirty="0">
-                <a:solidFill>
-                  <a:srgbClr val="111111"/>
-                </a:solidFill>
-                <a:latin typeface="Times New Roman" pitchFamily="34" charset="0"/>
-                <a:ea typeface="Times New Roman" pitchFamily="34" charset="-122"/>
-                <a:cs typeface="Times New Roman" pitchFamily="34" charset="-120"/>
-              </a:rPr>
-              <a:t>It is a sudden shaking of the ground.</a:t>
-            </a:r>
-            <a:endParaRPr lang="en-US" sz="4000" dirty="0"/>
-          </a:p>
-          <a:p>
-            <a:pPr algn="l" indent="0" marL="0">
-              <a:spcAft>
-                <a:spcPts val="800"/>
-              </a:spcAft>
-              <a:buNone/>
-            </a:pPr>
-            <a:r>
-              <a:rPr lang="en-US" sz="4000" b="1" dirty="0">
-                <a:solidFill>
-                  <a:srgbClr val="111111"/>
-                </a:solidFill>
-                <a:latin typeface="Times New Roman" pitchFamily="34" charset="0"/>
-                <a:ea typeface="Times New Roman" pitchFamily="34" charset="-122"/>
-                <a:cs typeface="Times New Roman" pitchFamily="34" charset="-120"/>
-              </a:rPr>
-              <a:t>Focus: </a:t>
-            </a:r>
-            <a:pPr algn="l" indent="0" marL="0">
-              <a:spcAft>
-                <a:spcPts val="800"/>
-              </a:spcAft>
-              <a:buNone/>
-            </a:pPr>
-            <a:r>
-              <a:rPr lang="en-US" sz="4000" dirty="0">
-                <a:solidFill>
-                  <a:srgbClr val="111111"/>
-                </a:solidFill>
-                <a:latin typeface="Times New Roman" pitchFamily="34" charset="0"/>
-                <a:ea typeface="Times New Roman" pitchFamily="34" charset="-122"/>
-                <a:cs typeface="Times New Roman" pitchFamily="34" charset="-120"/>
-              </a:rPr>
-              <a:t>It is the point under the ground where the earthquake starts.</a:t>
+              <a:t>Buildings fall on people.</a:t>
             </a:r>
             <a:endParaRPr lang="en-US" sz="4000" dirty="0"/>
           </a:p>
@@ -12279,7 +12877,7 @@
                 <a:ea typeface="Times New Roman" pitchFamily="34" charset="-122"/>
                 <a:cs typeface="Times New Roman" pitchFamily="34" charset="-120"/>
               </a:rPr>
-              <a:t>DEFINITIONS (continued)</a:t>
+              <a:t>Board Summary</a:t>
             </a:r>
             <a:endParaRPr lang="en-US" sz="3600" dirty="0"/>
           </a:p>
@@ -12321,8 +12919,11 @@
                 <a:ea typeface="Times New Roman" pitchFamily="34" charset="-122"/>
                 <a:cs typeface="Times New Roman" pitchFamily="34" charset="-120"/>
               </a:rPr>
-              <a:t>Epicentre: </a:t>
-            </a:r>
+              <a:t>Topic: The Structure of the Earth: Building Processes and Impacts on Man</a:t>
+            </a:r>
+            <a:endParaRPr lang="en-US" sz="4000" dirty="0"/>
+          </a:p>
+          <a:p>
             <a:pPr algn="l" indent="0" marL="0">
               <a:spcAft>
                 <a:spcPts val="800"/>
@@ -12330,7 +12931,7 @@
               <a:buNone/>
             </a:pPr>
             <a:r>
-              <a:rPr lang="en-US" sz="4000" dirty="0">
+              <a:rPr lang="en-US" sz="4000" b="1" dirty="0">
                 <a:solidFill>
                   <a:srgbClr val="111111"/>
                 </a:solidFill>
@@ -12338,7 +12939,27 @@
                 <a:ea typeface="Times New Roman" pitchFamily="34" charset="-122"/>
                 <a:cs typeface="Times New Roman" pitchFamily="34" charset="-120"/>
               </a:rPr>
-              <a:t>It is the point on the surface directly above the focus.</a:t>
+              <a:t>Sub-topic: Seismic Activities and Man</a:t>
+            </a:r>
+            <a:endParaRPr lang="en-US" sz="4000" dirty="0"/>
+          </a:p>
+          <a:p>
+            <a:pPr algn="l" indent="0" marL="0">
+              <a:spcAft>
+                <a:spcPts val="800"/>
+              </a:spcAft>
+              <a:buNone/>
+            </a:pPr>
+            <a:r>
+              <a:rPr lang="en-US" sz="4000" b="1" dirty="0">
+                <a:solidFill>
+                  <a:srgbClr val="990011"/>
+                </a:solidFill>
+                <a:latin typeface="Times New Roman" pitchFamily="34" charset="0"/>
+                <a:ea typeface="Times New Roman" pitchFamily="34" charset="-122"/>
+                <a:cs typeface="Times New Roman" pitchFamily="34" charset="-120"/>
+              </a:rPr>
+              <a:t>Lesson 13: Earthquakes</a:t>
             </a:r>
             <a:endParaRPr lang="en-US" sz="4000" dirty="0"/>
           </a:p>
@@ -12473,7 +13094,7 @@
         <p:spPr>
           <a:xfrm>
             <a:off x="0" y="658368"/>
-            <a:ext cx="3840480" cy="5833872"/>
+            <a:ext cx="2468880" cy="5833872"/>
           </a:xfrm>
           <a:prstGeom prst="rect">
             <a:avLst/>
@@ -12488,8 +13109,8 @@
         </p:nvSpPr>
         <p:spPr>
           <a:xfrm>
-            <a:off x="4069080" y="1005840"/>
-            <a:ext cx="7802575" cy="731520"/>
+            <a:off x="2697480" y="1005840"/>
+            <a:ext cx="9174175" cy="731520"/>
           </a:xfrm>
           <a:prstGeom prst="rect">
             <a:avLst/>
@@ -12515,7 +13136,7 @@
                 <a:ea typeface="Times New Roman" pitchFamily="34" charset="-122"/>
                 <a:cs typeface="Times New Roman" pitchFamily="34" charset="-120"/>
               </a:rPr>
-              <a:t>1. Causes of Earthquakes</a:t>
+              <a:t>DEFINITIONS</a:t>
             </a:r>
             <a:endParaRPr lang="en-US" sz="3600" dirty="0"/>
           </a:p>
@@ -12529,8 +13150,8 @@
         </p:nvSpPr>
         <p:spPr>
           <a:xfrm>
-            <a:off x="4069080" y="1783080"/>
-            <a:ext cx="7802575" cy="4663440"/>
+            <a:off x="2697480" y="1783080"/>
+            <a:ext cx="9174175" cy="4663440"/>
           </a:xfrm>
           <a:prstGeom prst="rect">
             <a:avLst/>
@@ -12557,7 +13178,7 @@
                 <a:ea typeface="Times New Roman" pitchFamily="34" charset="-122"/>
                 <a:cs typeface="Times New Roman" pitchFamily="34" charset="-120"/>
               </a:rPr>
-              <a:t>Earthquakes have the following causes:</a:t>
+              <a:t>The key terms of this lesson are defined as follows:</a:t>
             </a:r>
             <a:endParaRPr lang="en-US" sz="4000" dirty="0"/>
           </a:p>
@@ -12577,7 +13198,7 @@
                 <a:ea typeface="Times New Roman" pitchFamily="34" charset="-122"/>
                 <a:cs typeface="Times New Roman" pitchFamily="34" charset="-120"/>
               </a:rPr>
-              <a:t>Plate movements: </a:t>
+              <a:t>Earthquake: </a:t>
             </a:r>
             <a:pPr algn="l" indent="0" marL="0">
               <a:spcAft>
@@ -12594,7 +13215,7 @@
                 <a:ea typeface="Times New Roman" pitchFamily="34" charset="-122"/>
                 <a:cs typeface="Times New Roman" pitchFamily="34" charset="-120"/>
               </a:rPr>
-              <a:t>The sudden movement of plates along faults is the main cause of earthquakes.</a:t>
+              <a:t>It is a sudden shaking or vibration of the crust of the Earth.</a:t>
             </a:r>
             <a:endParaRPr lang="en-US" sz="4000" dirty="0"/>
           </a:p>
@@ -12614,7 +13235,7 @@
                 <a:ea typeface="Times New Roman" pitchFamily="34" charset="-122"/>
                 <a:cs typeface="Times New Roman" pitchFamily="34" charset="-120"/>
               </a:rPr>
-              <a:t>Volcanic eruptions: </a:t>
+              <a:t>Focus: </a:t>
             </a:r>
             <a:pPr algn="l" indent="0" marL="0">
               <a:spcAft>
@@ -12631,7 +13252,7 @@
                 <a:ea typeface="Times New Roman" pitchFamily="34" charset="-122"/>
                 <a:cs typeface="Times New Roman" pitchFamily="34" charset="-120"/>
               </a:rPr>
-              <a:t>Eruptions shake the ground around volcanoes.</a:t>
+              <a:t>It is the point under the ground where the earthquake starts.</a:t>
             </a:r>
             <a:endParaRPr lang="en-US" sz="4000" dirty="0"/>
           </a:p>
@@ -12808,7 +13429,7 @@
                 <a:ea typeface="Times New Roman" pitchFamily="34" charset="-122"/>
                 <a:cs typeface="Times New Roman" pitchFamily="34" charset="-120"/>
               </a:rPr>
-              <a:t>1. Causes of Earthquakes (continued)</a:t>
+              <a:t>DEFINITIONS (continued)</a:t>
             </a:r>
             <a:endParaRPr lang="en-US" sz="3600" dirty="0"/>
           </a:p>
@@ -12850,7 +13471,7 @@
                 <a:ea typeface="Times New Roman" pitchFamily="34" charset="-122"/>
                 <a:cs typeface="Times New Roman" pitchFamily="34" charset="-120"/>
               </a:rPr>
-              <a:t>Human activities: </a:t>
+              <a:t>Epicentre: </a:t>
             </a:r>
             <a:pPr algn="l" indent="0" marL="0">
               <a:spcAft>
@@ -12867,7 +13488,44 @@
                 <a:ea typeface="Times New Roman" pitchFamily="34" charset="-122"/>
                 <a:cs typeface="Times New Roman" pitchFamily="34" charset="-120"/>
               </a:rPr>
-              <a:t>Mining, explosions and big dams can cause small earthquakes.</a:t>
+              <a:t>It is the point on the surface directly above the focus, where the shaking is strongest.</a:t>
+            </a:r>
+            <a:endParaRPr lang="en-US" sz="4000" dirty="0"/>
+          </a:p>
+          <a:p>
+            <a:pPr algn="l" indent="0" marL="0">
+              <a:spcAft>
+                <a:spcPts val="800"/>
+              </a:spcAft>
+              <a:buNone/>
+            </a:pPr>
+            <a:r>
+              <a:rPr lang="en-US" sz="4000" b="1" dirty="0">
+                <a:solidFill>
+                  <a:srgbClr val="111111"/>
+                </a:solidFill>
+                <a:latin typeface="Times New Roman" pitchFamily="34" charset="0"/>
+                <a:ea typeface="Times New Roman" pitchFamily="34" charset="-122"/>
+                <a:cs typeface="Times New Roman" pitchFamily="34" charset="-120"/>
+              </a:rPr>
+              <a:t>Seismic waves: </a:t>
+            </a:r>
+            <a:pPr algn="l" indent="0" marL="0">
+              <a:spcAft>
+                <a:spcPts val="800"/>
+              </a:spcAft>
+              <a:buNone/>
+            </a:pPr>
+            <a:r>
+              <a:rPr lang="en-US" sz="4000" dirty="0">
+                <a:solidFill>
+                  <a:srgbClr val="111111"/>
+                </a:solidFill>
+                <a:latin typeface="Times New Roman" pitchFamily="34" charset="0"/>
+                <a:ea typeface="Times New Roman" pitchFamily="34" charset="-122"/>
+                <a:cs typeface="Times New Roman" pitchFamily="34" charset="-120"/>
+              </a:rPr>
+              <a:t>They are the shock waves that spread out from the focus.</a:t>
             </a:r>
             <a:endParaRPr lang="en-US" sz="4000" dirty="0"/>
           </a:p>
@@ -12993,8 +13651,8 @@
         </p:nvSpPr>
         <p:spPr>
           <a:xfrm>
-            <a:off x="457200" y="1005840"/>
-            <a:ext cx="11277295" cy="731520"/>
+            <a:off x="365760" y="1005840"/>
+            <a:ext cx="11460175" cy="731520"/>
           </a:xfrm>
           <a:prstGeom prst="rect">
             <a:avLst/>
@@ -13003,7 +13661,9 @@
           <a:ln/>
         </p:spPr>
         <p:txBody>
-          <a:bodyPr wrap="square" lIns="0" tIns="0" rIns="0" bIns="0" rtlCol="0" anchor="ctr"/>
+          <a:bodyPr wrap="square" lIns="0" tIns="0" rIns="0" bIns="0" rtlCol="0" anchor="ctr">
+            <a:normAutofit/>
+          </a:bodyPr>
           <a:lstStyle/>
           <a:p>
             <a:pPr algn="ctr" indent="0" marL="0">
@@ -13024,9 +13684,88 @@
           </a:p>
         </p:txBody>
       </p:sp>
+      <p:sp>
+        <p:nvSpPr>
+          <p:cNvPr id="4" name="Text 2"/>
+          <p:cNvSpPr/>
+          <p:nvPr/>
+        </p:nvSpPr>
+        <p:spPr>
+          <a:xfrm>
+            <a:off x="365760" y="1783080"/>
+            <a:ext cx="4846320" cy="4617720"/>
+          </a:xfrm>
+          <a:prstGeom prst="rect">
+            <a:avLst/>
+          </a:prstGeom>
+          <a:noFill/>
+          <a:ln/>
+        </p:spPr>
+        <p:txBody>
+          <a:bodyPr wrap="square" lIns="0" tIns="0" rIns="0" bIns="0" rtlCol="0" anchor="t"/>
+          <a:lstStyle/>
+          <a:p>
+            <a:pPr algn="l" indent="0" marL="0">
+              <a:spcAft>
+                <a:spcPts val="800"/>
+              </a:spcAft>
+              <a:buNone/>
+            </a:pPr>
+            <a:r>
+              <a:rPr lang="en-US" sz="3600" i="1" dirty="0">
+                <a:solidFill>
+                  <a:srgbClr val="111111"/>
+                </a:solidFill>
+                <a:latin typeface="Times New Roman" pitchFamily="34" charset="0"/>
+                <a:ea typeface="Times New Roman" pitchFamily="34" charset="-122"/>
+                <a:cs typeface="Times New Roman" pitchFamily="34" charset="-120"/>
+              </a:rPr>
+              <a:t>Earthquakes have the following causes:</a:t>
+            </a:r>
+            <a:endParaRPr lang="en-US" sz="3600" dirty="0"/>
+          </a:p>
+          <a:p>
+            <a:pPr algn="l" indent="0" marL="0">
+              <a:spcAft>
+                <a:spcPts val="800"/>
+              </a:spcAft>
+              <a:buNone/>
+            </a:pPr>
+            <a:r>
+              <a:rPr lang="en-US" sz="3600" b="1" dirty="0">
+                <a:solidFill>
+                  <a:srgbClr val="111111"/>
+                </a:solidFill>
+                <a:latin typeface="Times New Roman" pitchFamily="34" charset="0"/>
+                <a:ea typeface="Times New Roman" pitchFamily="34" charset="-122"/>
+                <a:cs typeface="Times New Roman" pitchFamily="34" charset="-120"/>
+              </a:rPr>
+              <a:t>Plate movements: </a:t>
+            </a:r>
+            <a:pPr algn="l" indent="0" marL="0">
+              <a:spcAft>
+                <a:spcPts val="800"/>
+              </a:spcAft>
+              <a:buNone/>
+            </a:pPr>
+            <a:r>
+              <a:rPr lang="en-US" sz="3600" dirty="0">
+                <a:solidFill>
+                  <a:srgbClr val="111111"/>
+                </a:solidFill>
+                <a:latin typeface="Times New Roman" pitchFamily="34" charset="0"/>
+                <a:ea typeface="Times New Roman" pitchFamily="34" charset="-122"/>
+                <a:cs typeface="Times New Roman" pitchFamily="34" charset="-120"/>
+              </a:rPr>
+              <a:t>The sudden movement of plates along faults is the main cause of earthquakes.</a:t>
+            </a:r>
+            <a:endParaRPr lang="en-US" sz="3600" dirty="0"/>
+          </a:p>
+        </p:txBody>
+      </p:sp>
       <p:pic>
         <p:nvPicPr>
-          <p:cNvPr id="4" name="Image 0" descr="/home/claude/f4/img/v2/quake_mid.png">    </p:cNvPr>
+          <p:cNvPr id="5" name="Image 0" descr="/home/claude/f4/img/v2/quake_mid.png">    </p:cNvPr>
           <p:cNvPicPr>
             <a:picLocks noChangeAspect="1"/>
           </p:cNvPicPr>
@@ -13040,8 +13779,8 @@
         </p:blipFill>
         <p:spPr>
           <a:xfrm>
-            <a:off x="629930" y="1783080"/>
-            <a:ext cx="10931835" cy="4270248"/>
+            <a:off x="5349240" y="2617506"/>
+            <a:ext cx="6659575" cy="2601397"/>
           </a:xfrm>
           <a:prstGeom prst="rect">
             <a:avLst/>
@@ -13050,14 +13789,14 @@
       </p:pic>
       <p:sp>
         <p:nvSpPr>
-          <p:cNvPr id="5" name="Text 2"/>
+          <p:cNvPr id="6" name="Text 3"/>
           <p:cNvSpPr/>
           <p:nvPr/>
         </p:nvSpPr>
         <p:spPr>
           <a:xfrm>
-            <a:off x="457200" y="6089904"/>
-            <a:ext cx="11277295" cy="347472"/>
+            <a:off x="5349240" y="6089904"/>
+            <a:ext cx="6659575" cy="347472"/>
           </a:xfrm>
           <a:prstGeom prst="rect">
             <a:avLst/>
@@ -13073,7 +13812,7 @@
               <a:buNone/>
             </a:pPr>
             <a:r>
-              <a:rPr lang="en-US" sz="1800" i="1" dirty="0">
+              <a:rPr lang="en-US" sz="1600" i="1" dirty="0">
                 <a:solidFill>
                   <a:srgbClr val="555555"/>
                 </a:solidFill>
@@ -13083,7 +13822,7 @@
               </a:rPr>
               <a:t>Illustration: focus and epicentre</a:t>
             </a:r>
-            <a:endParaRPr lang="en-US" sz="1800" dirty="0"/>
+            <a:endParaRPr lang="en-US" sz="1600" dirty="0"/>
           </a:p>
         </p:txBody>
       </p:sp>
@@ -13258,7 +13997,7 @@
                 <a:ea typeface="Times New Roman" pitchFamily="34" charset="-122"/>
                 <a:cs typeface="Times New Roman" pitchFamily="34" charset="-120"/>
               </a:rPr>
-              <a:t>2. Manifestation and Measurement</a:t>
+              <a:t>1. Causes of Earthquakes</a:t>
             </a:r>
             <a:endParaRPr lang="en-US" sz="3600" dirty="0"/>
           </a:p>
@@ -13292,7 +14031,7 @@
               <a:buNone/>
             </a:pPr>
             <a:r>
-              <a:rPr lang="en-US" sz="4000" i="1" dirty="0">
+              <a:rPr lang="en-US" sz="4000" b="1" dirty="0">
                 <a:solidFill>
                   <a:srgbClr val="111111"/>
                 </a:solidFill>
@@ -13300,11 +14039,8 @@
                 <a:ea typeface="Times New Roman" pitchFamily="34" charset="-122"/>
                 <a:cs typeface="Times New Roman" pitchFamily="34" charset="-120"/>
               </a:rPr>
-              <a:t>Earthquakes are recorded and measured as follows:</a:t>
-            </a:r>
-            <a:endParaRPr lang="en-US" sz="4000" dirty="0"/>
-          </a:p>
-          <a:p>
+              <a:t>Volcanic eruptions: </a:t>
+            </a:r>
             <a:pPr algn="l" indent="0" marL="0">
               <a:spcAft>
                 <a:spcPts val="800"/>
@@ -13312,7 +14048,7 @@
               <a:buNone/>
             </a:pPr>
             <a:r>
-              <a:rPr lang="en-US" sz="4000" b="1" dirty="0">
+              <a:rPr lang="en-US" sz="4000" dirty="0">
                 <a:solidFill>
                   <a:srgbClr val="111111"/>
                 </a:solidFill>
@@ -13320,8 +14056,11 @@
                 <a:ea typeface="Times New Roman" pitchFamily="34" charset="-122"/>
                 <a:cs typeface="Times New Roman" pitchFamily="34" charset="-120"/>
               </a:rPr>
-              <a:t>Seismograph: </a:t>
-            </a:r>
+              <a:t>Rising magma and eruptions shake the ground around volcanoes.</a:t>
+            </a:r>
+            <a:endParaRPr lang="en-US" sz="4000" dirty="0"/>
+          </a:p>
+          <a:p>
             <a:pPr algn="l" indent="0" marL="0">
               <a:spcAft>
                 <a:spcPts val="800"/>
@@ -13329,7 +14068,7 @@
               <a:buNone/>
             </a:pPr>
             <a:r>
-              <a:rPr lang="en-US" sz="4000" dirty="0">
+              <a:rPr lang="en-US" sz="4000" b="1" dirty="0">
                 <a:solidFill>
                   <a:srgbClr val="111111"/>
                 </a:solidFill>
@@ -13337,11 +14076,8 @@
                 <a:ea typeface="Times New Roman" pitchFamily="34" charset="-122"/>
                 <a:cs typeface="Times New Roman" pitchFamily="34" charset="-120"/>
               </a:rPr>
-              <a:t>It is an instrument that records the shock waves of an earthquake.</a:t>
-            </a:r>
-            <a:endParaRPr lang="en-US" sz="4000" dirty="0"/>
-          </a:p>
-          <a:p>
+              <a:t>Collapse: </a:t>
+            </a:r>
             <a:pPr algn="l" indent="0" marL="0">
               <a:spcAft>
                 <a:spcPts val="800"/>
@@ -13349,7 +14085,7 @@
               <a:buNone/>
             </a:pPr>
             <a:r>
-              <a:rPr lang="en-US" sz="4000" b="1" dirty="0">
+              <a:rPr lang="en-US" sz="4000" dirty="0">
                 <a:solidFill>
                   <a:srgbClr val="111111"/>
                 </a:solidFill>
@@ -13357,8 +14093,11 @@
                 <a:ea typeface="Times New Roman" pitchFamily="34" charset="-122"/>
                 <a:cs typeface="Times New Roman" pitchFamily="34" charset="-120"/>
               </a:rPr>
-              <a:t>Richter scale: </a:t>
-            </a:r>
+              <a:t>The collapse of caves or old mines shakes the ground.</a:t>
+            </a:r>
+            <a:endParaRPr lang="en-US" sz="4000" dirty="0"/>
+          </a:p>
+          <a:p>
             <a:pPr algn="l" indent="0" marL="0">
               <a:spcAft>
                 <a:spcPts val="800"/>
@@ -13366,7 +14105,7 @@
               <a:buNone/>
             </a:pPr>
             <a:r>
-              <a:rPr lang="en-US" sz="4000" dirty="0">
+              <a:rPr lang="en-US" sz="4000" b="1" dirty="0">
                 <a:solidFill>
                   <a:srgbClr val="111111"/>
                 </a:solidFill>
@@ -13374,7 +14113,24 @@
                 <a:ea typeface="Times New Roman" pitchFamily="34" charset="-122"/>
                 <a:cs typeface="Times New Roman" pitchFamily="34" charset="-120"/>
               </a:rPr>
-              <a:t>It is the scale that measures the strength (magnitude) of an earthquake.</a:t>
+              <a:t>Human activities: </a:t>
+            </a:r>
+            <a:pPr algn="l" indent="0" marL="0">
+              <a:spcAft>
+                <a:spcPts val="800"/>
+              </a:spcAft>
+              <a:buNone/>
+            </a:pPr>
+            <a:r>
+              <a:rPr lang="en-US" sz="4000" dirty="0">
+                <a:solidFill>
+                  <a:srgbClr val="111111"/>
+                </a:solidFill>
+                <a:latin typeface="Times New Roman" pitchFamily="34" charset="0"/>
+                <a:ea typeface="Times New Roman" pitchFamily="34" charset="-122"/>
+                <a:cs typeface="Times New Roman" pitchFamily="34" charset="-120"/>
+              </a:rPr>
+              <a:t>Mining, nuclear tests, explosions and the weight of big dams can cause small earthquakes.</a:t>
             </a:r>
             <a:endParaRPr lang="en-US" sz="4000" dirty="0"/>
           </a:p>
@@ -13509,7 +14265,7 @@
         <p:spPr>
           <a:xfrm>
             <a:off x="0" y="658368"/>
-            <a:ext cx="2468880" cy="5833872"/>
+            <a:ext cx="5120640" cy="5833872"/>
           </a:xfrm>
           <a:prstGeom prst="rect">
             <a:avLst/>
@@ -13524,8 +14280,8 @@
         </p:nvSpPr>
         <p:spPr>
           <a:xfrm>
-            <a:off x="2697480" y="1005840"/>
-            <a:ext cx="9174175" cy="731520"/>
+            <a:off x="5349240" y="1005840"/>
+            <a:ext cx="6522415" cy="731520"/>
           </a:xfrm>
           <a:prstGeom prst="rect">
             <a:avLst/>
@@ -13551,7 +14307,7 @@
                 <a:ea typeface="Times New Roman" pitchFamily="34" charset="-122"/>
                 <a:cs typeface="Times New Roman" pitchFamily="34" charset="-120"/>
               </a:rPr>
-              <a:t>3. Impact and Protection</a:t>
+              <a:t>2. Manifestation of Earthquakes</a:t>
             </a:r>
             <a:endParaRPr lang="en-US" sz="3600" dirty="0"/>
           </a:p>
@@ -13565,8 +14321,8 @@
         </p:nvSpPr>
         <p:spPr>
           <a:xfrm>
-            <a:off x="2697480" y="1783080"/>
-            <a:ext cx="9174175" cy="4663440"/>
+            <a:off x="5349240" y="1783080"/>
+            <a:ext cx="6522415" cy="4663440"/>
           </a:xfrm>
           <a:prstGeom prst="rect">
             <a:avLst/>
@@ -13593,7 +14349,7 @@
                 <a:ea typeface="Times New Roman" pitchFamily="34" charset="-122"/>
                 <a:cs typeface="Times New Roman" pitchFamily="34" charset="-120"/>
               </a:rPr>
-              <a:t>Earthquakes affect people and are managed as follows:</a:t>
+              <a:t>Earthquakes show themselves and are measured as follows:</a:t>
             </a:r>
             <a:endParaRPr lang="en-US" sz="4000" dirty="0"/>
           </a:p>
@@ -13613,7 +14369,7 @@
                 <a:ea typeface="Times New Roman" pitchFamily="34" charset="-122"/>
                 <a:cs typeface="Times New Roman" pitchFamily="34" charset="-120"/>
               </a:rPr>
-              <a:t>Impact on man: </a:t>
+              <a:t>Shaking and cracks: </a:t>
             </a:r>
             <a:pPr algn="l" indent="0" marL="0">
               <a:spcAft>
@@ -13630,44 +14386,7 @@
                 <a:ea typeface="Times New Roman" pitchFamily="34" charset="-122"/>
                 <a:cs typeface="Times New Roman" pitchFamily="34" charset="-120"/>
               </a:rPr>
-              <a:t>Earthquakes kill people and destroy houses, roads and bridges.</a:t>
-            </a:r>
-            <a:endParaRPr lang="en-US" sz="4000" dirty="0"/>
-          </a:p>
-          <a:p>
-            <a:pPr algn="l" indent="0" marL="0">
-              <a:spcAft>
-                <a:spcPts val="800"/>
-              </a:spcAft>
-              <a:buNone/>
-            </a:pPr>
-            <a:r>
-              <a:rPr lang="en-US" sz="4000" b="1" dirty="0">
-                <a:solidFill>
-                  <a:srgbClr val="111111"/>
-                </a:solidFill>
-                <a:latin typeface="Times New Roman" pitchFamily="34" charset="0"/>
-                <a:ea typeface="Times New Roman" pitchFamily="34" charset="-122"/>
-                <a:cs typeface="Times New Roman" pitchFamily="34" charset="-120"/>
-              </a:rPr>
-              <a:t>Strong buildings: </a:t>
-            </a:r>
-            <a:pPr algn="l" indent="0" marL="0">
-              <a:spcAft>
-                <a:spcPts val="800"/>
-              </a:spcAft>
-              <a:buNone/>
-            </a:pPr>
-            <a:r>
-              <a:rPr lang="en-US" sz="4000" dirty="0">
-                <a:solidFill>
-                  <a:srgbClr val="111111"/>
-                </a:solidFill>
-                <a:latin typeface="Times New Roman" pitchFamily="34" charset="0"/>
-                <a:ea typeface="Times New Roman" pitchFamily="34" charset="-122"/>
-                <a:cs typeface="Times New Roman" pitchFamily="34" charset="-120"/>
-              </a:rPr>
-              <a:t>Buildings designed to resist shaking reduce deaths.</a:t>
+              <a:t>The ground shakes, cracks open and buildings sway or fall.</a:t>
             </a:r>
             <a:endParaRPr lang="en-US" sz="4000" dirty="0"/>
           </a:p>
@@ -13785,9 +14504,109 @@
           </a:p>
         </p:txBody>
       </p:sp>
+      <p:sp>
+        <p:nvSpPr>
+          <p:cNvPr id="3" name="Text 1"/>
+          <p:cNvSpPr/>
+          <p:nvPr/>
+        </p:nvSpPr>
+        <p:spPr>
+          <a:xfrm>
+            <a:off x="365760" y="1005840"/>
+            <a:ext cx="11460175" cy="731520"/>
+          </a:xfrm>
+          <a:prstGeom prst="rect">
+            <a:avLst/>
+          </a:prstGeom>
+          <a:noFill/>
+          <a:ln/>
+        </p:spPr>
+        <p:txBody>
+          <a:bodyPr wrap="square" lIns="0" tIns="0" rIns="0" bIns="0" rtlCol="0" anchor="ctr">
+            <a:normAutofit/>
+          </a:bodyPr>
+          <a:lstStyle/>
+          <a:p>
+            <a:pPr algn="ctr" indent="0" marL="0">
+              <a:buNone/>
+            </a:pPr>
+            <a:r>
+              <a:rPr lang="en-US" sz="3600" b="1" dirty="0">
+                <a:solidFill>
+                  <a:srgbClr val="990011"/>
+                </a:solidFill>
+                <a:latin typeface="Times New Roman" pitchFamily="34" charset="0"/>
+                <a:ea typeface="Times New Roman" pitchFamily="34" charset="-122"/>
+                <a:cs typeface="Times New Roman" pitchFamily="34" charset="-120"/>
+              </a:rPr>
+              <a:t>2. Manifestation of Earthquakes</a:t>
+            </a:r>
+            <a:endParaRPr lang="en-US" sz="3600" dirty="0"/>
+          </a:p>
+        </p:txBody>
+      </p:sp>
+      <p:sp>
+        <p:nvSpPr>
+          <p:cNvPr id="4" name="Text 2"/>
+          <p:cNvSpPr/>
+          <p:nvPr/>
+        </p:nvSpPr>
+        <p:spPr>
+          <a:xfrm>
+            <a:off x="365760" y="1783080"/>
+            <a:ext cx="4846320" cy="4617720"/>
+          </a:xfrm>
+          <a:prstGeom prst="rect">
+            <a:avLst/>
+          </a:prstGeom>
+          <a:noFill/>
+          <a:ln/>
+        </p:spPr>
+        <p:txBody>
+          <a:bodyPr wrap="square" lIns="0" tIns="0" rIns="0" bIns="0" rtlCol="0" anchor="t"/>
+          <a:lstStyle/>
+          <a:p>
+            <a:pPr algn="l" indent="0" marL="0">
+              <a:spcAft>
+                <a:spcPts val="800"/>
+              </a:spcAft>
+              <a:buNone/>
+            </a:pPr>
+            <a:r>
+              <a:rPr lang="en-US" sz="3600" b="1" dirty="0">
+                <a:solidFill>
+                  <a:srgbClr val="111111"/>
+                </a:solidFill>
+                <a:latin typeface="Times New Roman" pitchFamily="34" charset="0"/>
+                <a:ea typeface="Times New Roman" pitchFamily="34" charset="-122"/>
+                <a:cs typeface="Times New Roman" pitchFamily="34" charset="-120"/>
+              </a:rPr>
+              <a:t>Seismograph: </a:t>
+            </a:r>
+            <a:pPr algn="l" indent="0" marL="0">
+              <a:spcAft>
+                <a:spcPts val="800"/>
+              </a:spcAft>
+              <a:buNone/>
+            </a:pPr>
+            <a:r>
+              <a:rPr lang="en-US" sz="3600" dirty="0">
+                <a:solidFill>
+                  <a:srgbClr val="111111"/>
+                </a:solidFill>
+                <a:latin typeface="Times New Roman" pitchFamily="34" charset="0"/>
+                <a:ea typeface="Times New Roman" pitchFamily="34" charset="-122"/>
+                <a:cs typeface="Times New Roman" pitchFamily="34" charset="-120"/>
+              </a:rPr>
+              <a:t>It is an instrument that records the seismic waves.</a:t>
+            </a:r>
+            <a:endParaRPr lang="en-US" sz="3600" dirty="0"/>
+          </a:p>
+        </p:txBody>
+      </p:sp>
       <p:pic>
         <p:nvPicPr>
-          <p:cNvPr id="3" name="Image 0" descr="/home/claude/f4/img/minesec_sheet.png">    </p:cNvPr>
+          <p:cNvPr id="5" name="Image 0" descr="/home/claude/f4/img/v2/f4_seismograph.jpg">    </p:cNvPr>
           <p:cNvPicPr>
             <a:picLocks noChangeAspect="1"/>
           </p:cNvPicPr>
@@ -13801,8 +14620,8 @@
         </p:blipFill>
         <p:spPr>
           <a:xfrm>
-            <a:off x="0" y="658368"/>
-            <a:ext cx="5120640" cy="5833872"/>
+            <a:off x="5349240" y="2069045"/>
+            <a:ext cx="6659575" cy="3698319"/>
           </a:xfrm>
           <a:prstGeom prst="rect">
             <a:avLst/>
@@ -13811,14 +14630,14 @@
       </p:pic>
       <p:sp>
         <p:nvSpPr>
-          <p:cNvPr id="4" name="Text 1"/>
+          <p:cNvPr id="6" name="Text 3"/>
           <p:cNvSpPr/>
           <p:nvPr/>
         </p:nvSpPr>
         <p:spPr>
           <a:xfrm>
-            <a:off x="5349240" y="1005840"/>
-            <a:ext cx="6522415" cy="731520"/>
+            <a:off x="5349240" y="6089904"/>
+            <a:ext cx="6659575" cy="347472"/>
           </a:xfrm>
           <a:prstGeom prst="rect">
             <a:avLst/>
@@ -13827,85 +14646,24 @@
           <a:ln/>
         </p:spPr>
         <p:txBody>
-          <a:bodyPr wrap="square" lIns="0" tIns="0" rIns="0" bIns="0" rtlCol="0" anchor="ctr">
-            <a:normAutofit/>
-          </a:bodyPr>
+          <a:bodyPr wrap="square" lIns="0" tIns="0" rIns="0" bIns="0" rtlCol="0" anchor="ctr"/>
           <a:lstStyle/>
           <a:p>
             <a:pPr algn="ctr" indent="0" marL="0">
               <a:buNone/>
             </a:pPr>
             <a:r>
-              <a:rPr lang="en-US" sz="3600" b="1" dirty="0">
-                <a:solidFill>
-                  <a:srgbClr val="990011"/>
+              <a:rPr lang="en-US" sz="1600" i="1" dirty="0">
+                <a:solidFill>
+                  <a:srgbClr val="555555"/>
                 </a:solidFill>
                 <a:latin typeface="Times New Roman" pitchFamily="34" charset="0"/>
                 <a:ea typeface="Times New Roman" pitchFamily="34" charset="-122"/>
                 <a:cs typeface="Times New Roman" pitchFamily="34" charset="-120"/>
               </a:rPr>
-              <a:t>3. Impact and Protection (continued)</a:t>
-            </a:r>
-            <a:endParaRPr lang="en-US" sz="3600" dirty="0"/>
-          </a:p>
-        </p:txBody>
-      </p:sp>
-      <p:sp>
-        <p:nvSpPr>
-          <p:cNvPr id="5" name="Text 2"/>
-          <p:cNvSpPr/>
-          <p:nvPr/>
-        </p:nvSpPr>
-        <p:spPr>
-          <a:xfrm>
-            <a:off x="5349240" y="1783080"/>
-            <a:ext cx="6522415" cy="4663440"/>
-          </a:xfrm>
-          <a:prstGeom prst="rect">
-            <a:avLst/>
-          </a:prstGeom>
-          <a:noFill/>
-          <a:ln/>
-        </p:spPr>
-        <p:txBody>
-          <a:bodyPr wrap="square" lIns="0" tIns="0" rIns="0" bIns="0" rtlCol="0" anchor="t"/>
-          <a:lstStyle/>
-          <a:p>
-            <a:pPr algn="l" indent="0" marL="0">
-              <a:spcAft>
-                <a:spcPts val="800"/>
-              </a:spcAft>
-              <a:buNone/>
-            </a:pPr>
-            <a:r>
-              <a:rPr lang="en-US" sz="4000" b="1" dirty="0">
-                <a:solidFill>
-                  <a:srgbClr val="111111"/>
-                </a:solidFill>
-                <a:latin typeface="Times New Roman" pitchFamily="34" charset="0"/>
-                <a:ea typeface="Times New Roman" pitchFamily="34" charset="-122"/>
-                <a:cs typeface="Times New Roman" pitchFamily="34" charset="-120"/>
-              </a:rPr>
-              <a:t>Education: </a:t>
-            </a:r>
-            <a:pPr algn="l" indent="0" marL="0">
-              <a:spcAft>
-                <a:spcPts val="800"/>
-              </a:spcAft>
-              <a:buNone/>
-            </a:pPr>
-            <a:r>
-              <a:rPr lang="en-US" sz="4000" dirty="0">
-                <a:solidFill>
-                  <a:srgbClr val="111111"/>
-                </a:solidFill>
-                <a:latin typeface="Times New Roman" pitchFamily="34" charset="0"/>
-                <a:ea typeface="Times New Roman" pitchFamily="34" charset="-122"/>
-                <a:cs typeface="Times New Roman" pitchFamily="34" charset="-120"/>
-              </a:rPr>
-              <a:t>People who learn safety drills know what to do during an earthquake.</a:t>
-            </a:r>
-            <a:endParaRPr lang="en-US" sz="4000" dirty="0"/>
+              <a:t>Illustration: a seismograph</a:t>
+            </a:r>
+            <a:endParaRPr lang="en-US" sz="1600" dirty="0"/>
           </a:p>
         </p:txBody>
       </p:sp>
@@ -14015,7 +14773,7 @@
                 <a:ea typeface="Calibri" pitchFamily="34" charset="-122"/>
                 <a:cs typeface="Calibri" pitchFamily="34" charset="-120"/>
               </a:rPr>
-              <a:t>FORMATIVE EVALUATION</a:t>
+              <a:t>BOARD SUMMARY</a:t>
             </a:r>
             <a:endParaRPr lang="en-US" sz="1400" dirty="0"/>
           </a:p>
@@ -14080,7 +14838,7 @@
                 <a:ea typeface="Times New Roman" pitchFamily="34" charset="-122"/>
                 <a:cs typeface="Times New Roman" pitchFamily="34" charset="-120"/>
               </a:rPr>
-              <a:t>Evaluation 1</a:t>
+              <a:t>2. Manifestation of Earthquakes</a:t>
             </a:r>
             <a:endParaRPr lang="en-US" sz="3600" dirty="0"/>
           </a:p>
@@ -14114,7 +14872,7 @@
               <a:buNone/>
             </a:pPr>
             <a:r>
-              <a:rPr lang="en-US" sz="4000" dirty="0">
+              <a:rPr lang="en-US" sz="4000" b="1" dirty="0">
                 <a:solidFill>
                   <a:srgbClr val="111111"/>
                 </a:solidFill>
@@ -14122,7 +14880,61 @@
                 <a:ea typeface="Times New Roman" pitchFamily="34" charset="-122"/>
                 <a:cs typeface="Times New Roman" pitchFamily="34" charset="-120"/>
               </a:rPr>
-              <a:t>What is the epicentre?</a:t>
+              <a:t>Richter scale: </a:t>
+            </a:r>
+            <a:pPr algn="l" indent="0" marL="0">
+              <a:spcAft>
+                <a:spcPts val="800"/>
+              </a:spcAft>
+              <a:buNone/>
+            </a:pPr>
+            <a:r>
+              <a:rPr lang="en-US" sz="4000" dirty="0">
+                <a:solidFill>
+                  <a:srgbClr val="111111"/>
+                </a:solidFill>
+                <a:latin typeface="Times New Roman" pitchFamily="34" charset="0"/>
+                <a:ea typeface="Times New Roman" pitchFamily="34" charset="-122"/>
+                <a:cs typeface="Times New Roman" pitchFamily="34" charset="-120"/>
+              </a:rPr>
+              <a:t>It measures the strength (magnitude) of an earthquake, usually from 1 to 9.</a:t>
+            </a:r>
+            <a:endParaRPr lang="en-US" sz="4000" dirty="0"/>
+          </a:p>
+          <a:p>
+            <a:pPr algn="l" indent="0" marL="0">
+              <a:spcAft>
+                <a:spcPts val="800"/>
+              </a:spcAft>
+              <a:buNone/>
+            </a:pPr>
+            <a:r>
+              <a:rPr lang="en-US" sz="4000" b="1" dirty="0">
+                <a:solidFill>
+                  <a:srgbClr val="111111"/>
+                </a:solidFill>
+                <a:latin typeface="Times New Roman" pitchFamily="34" charset="0"/>
+                <a:ea typeface="Times New Roman" pitchFamily="34" charset="-122"/>
+                <a:cs typeface="Times New Roman" pitchFamily="34" charset="-120"/>
+              </a:rPr>
+              <a:t>Aftershocks: </a:t>
+            </a:r>
+            <a:pPr algn="l" indent="0" marL="0">
+              <a:spcAft>
+                <a:spcPts val="800"/>
+              </a:spcAft>
+              <a:buNone/>
+            </a:pPr>
+            <a:r>
+              <a:rPr lang="en-US" sz="4000" dirty="0">
+                <a:solidFill>
+                  <a:srgbClr val="111111"/>
+                </a:solidFill>
+                <a:latin typeface="Times New Roman" pitchFamily="34" charset="0"/>
+                <a:ea typeface="Times New Roman" pitchFamily="34" charset="-122"/>
+                <a:cs typeface="Times New Roman" pitchFamily="34" charset="-120"/>
+              </a:rPr>
+              <a:t>Smaller earthquakes often follow the main shock.</a:t>
             </a:r>
             <a:endParaRPr lang="en-US" sz="4000" dirty="0"/>
           </a:p>
@@ -14234,15 +15046,135 @@
                 <a:ea typeface="Calibri" pitchFamily="34" charset="-122"/>
                 <a:cs typeface="Calibri" pitchFamily="34" charset="-120"/>
               </a:rPr>
-              <a:t>FORMATIVE EVALUATION</a:t>
+              <a:t>BOARD SUMMARY</a:t>
             </a:r>
             <a:endParaRPr lang="en-US" sz="1400" dirty="0"/>
+          </a:p>
+        </p:txBody>
+      </p:sp>
+      <p:sp>
+        <p:nvSpPr>
+          <p:cNvPr id="3" name="Text 1"/>
+          <p:cNvSpPr/>
+          <p:nvPr/>
+        </p:nvSpPr>
+        <p:spPr>
+          <a:xfrm>
+            <a:off x="365760" y="1005840"/>
+            <a:ext cx="11460175" cy="731520"/>
+          </a:xfrm>
+          <a:prstGeom prst="rect">
+            <a:avLst/>
+          </a:prstGeom>
+          <a:noFill/>
+          <a:ln/>
+        </p:spPr>
+        <p:txBody>
+          <a:bodyPr wrap="square" lIns="0" tIns="0" rIns="0" bIns="0" rtlCol="0" anchor="ctr">
+            <a:normAutofit/>
+          </a:bodyPr>
+          <a:lstStyle/>
+          <a:p>
+            <a:pPr algn="ctr" indent="0" marL="0">
+              <a:buNone/>
+            </a:pPr>
+            <a:r>
+              <a:rPr lang="en-US" sz="3600" b="1" dirty="0">
+                <a:solidFill>
+                  <a:srgbClr val="990011"/>
+                </a:solidFill>
+                <a:latin typeface="Times New Roman" pitchFamily="34" charset="0"/>
+                <a:ea typeface="Times New Roman" pitchFamily="34" charset="-122"/>
+                <a:cs typeface="Times New Roman" pitchFamily="34" charset="-120"/>
+              </a:rPr>
+              <a:t>3. Impact on Man</a:t>
+            </a:r>
+            <a:endParaRPr lang="en-US" sz="3600" dirty="0"/>
+          </a:p>
+        </p:txBody>
+      </p:sp>
+      <p:sp>
+        <p:nvSpPr>
+          <p:cNvPr id="4" name="Text 2"/>
+          <p:cNvSpPr/>
+          <p:nvPr/>
+        </p:nvSpPr>
+        <p:spPr>
+          <a:xfrm>
+            <a:off x="365760" y="1783080"/>
+            <a:ext cx="4846320" cy="4617720"/>
+          </a:xfrm>
+          <a:prstGeom prst="rect">
+            <a:avLst/>
+          </a:prstGeom>
+          <a:noFill/>
+          <a:ln/>
+        </p:spPr>
+        <p:txBody>
+          <a:bodyPr wrap="square" lIns="0" tIns="0" rIns="0" bIns="0" rtlCol="0" anchor="t"/>
+          <a:lstStyle/>
+          <a:p>
+            <a:pPr algn="l" indent="0" marL="0">
+              <a:spcAft>
+                <a:spcPts val="800"/>
+              </a:spcAft>
+              <a:buNone/>
+            </a:pPr>
+            <a:r>
+              <a:rPr lang="en-US" sz="3600" i="1" dirty="0">
+                <a:solidFill>
+                  <a:srgbClr val="111111"/>
+                </a:solidFill>
+                <a:latin typeface="Times New Roman" pitchFamily="34" charset="0"/>
+                <a:ea typeface="Times New Roman" pitchFamily="34" charset="-122"/>
+                <a:cs typeface="Times New Roman" pitchFamily="34" charset="-120"/>
+              </a:rPr>
+              <a:t>Earthquakes affect people in the following ways:</a:t>
+            </a:r>
+            <a:endParaRPr lang="en-US" sz="3600" dirty="0"/>
+          </a:p>
+          <a:p>
+            <a:pPr algn="l" indent="0" marL="0">
+              <a:spcAft>
+                <a:spcPts val="800"/>
+              </a:spcAft>
+              <a:buNone/>
+            </a:pPr>
+            <a:r>
+              <a:rPr lang="en-US" sz="3600" b="1" dirty="0">
+                <a:solidFill>
+                  <a:srgbClr val="111111"/>
+                </a:solidFill>
+                <a:latin typeface="Times New Roman" pitchFamily="34" charset="0"/>
+                <a:ea typeface="Times New Roman" pitchFamily="34" charset="-122"/>
+                <a:cs typeface="Times New Roman" pitchFamily="34" charset="-120"/>
+              </a:rPr>
+              <a:t>Loss of life: </a:t>
+            </a:r>
+            <a:pPr algn="l" indent="0" marL="0">
+              <a:spcAft>
+                <a:spcPts val="800"/>
+              </a:spcAft>
+              <a:buNone/>
+            </a:pPr>
+            <a:r>
+              <a:rPr lang="en-US" sz="3600" dirty="0">
+                <a:solidFill>
+                  <a:srgbClr val="111111"/>
+                </a:solidFill>
+                <a:latin typeface="Times New Roman" pitchFamily="34" charset="0"/>
+                <a:ea typeface="Times New Roman" pitchFamily="34" charset="-122"/>
+                <a:cs typeface="Times New Roman" pitchFamily="34" charset="-120"/>
+              </a:rPr>
+              <a:t>Falling buildings kill and injure many people.</a:t>
+            </a:r>
+            <a:endParaRPr lang="en-US" sz="3600" dirty="0"/>
           </a:p>
         </p:txBody>
       </p:sp>
       <p:pic>
         <p:nvPicPr>
-          <p:cNvPr id="3" name="Image 0" descr="/home/claude/f4/img/minesec_sheet.png">    </p:cNvPr>
+          <p:cNvPr id="5" name="Image 0" descr="/home/claude/f4/img/v2/f4_quakedamage.jpg">    </p:cNvPr>
           <p:cNvPicPr>
             <a:picLocks noChangeAspect="1"/>
           </p:cNvPicPr>
@@ -14256,8 +15188,8 @@
         </p:blipFill>
         <p:spPr>
           <a:xfrm>
-            <a:off x="0" y="658368"/>
-            <a:ext cx="5120640" cy="5833872"/>
+            <a:off x="5349240" y="2069407"/>
+            <a:ext cx="6659575" cy="3697594"/>
           </a:xfrm>
           <a:prstGeom prst="rect">
             <a:avLst/>
@@ -14266,14 +15198,14 @@
       </p:pic>
       <p:sp>
         <p:nvSpPr>
-          <p:cNvPr id="4" name="Text 1"/>
+          <p:cNvPr id="6" name="Text 3"/>
           <p:cNvSpPr/>
           <p:nvPr/>
         </p:nvSpPr>
         <p:spPr>
           <a:xfrm>
-            <a:off x="5349240" y="1005840"/>
-            <a:ext cx="6522415" cy="731520"/>
+            <a:off x="5349240" y="6089904"/>
+            <a:ext cx="6659575" cy="347472"/>
           </a:xfrm>
           <a:prstGeom prst="rect">
             <a:avLst/>
@@ -14282,68 +15214,24 @@
           <a:ln/>
         </p:spPr>
         <p:txBody>
-          <a:bodyPr wrap="square" lIns="0" tIns="0" rIns="0" bIns="0" rtlCol="0" anchor="ctr">
-            <a:normAutofit/>
-          </a:bodyPr>
+          <a:bodyPr wrap="square" lIns="0" tIns="0" rIns="0" bIns="0" rtlCol="0" anchor="ctr"/>
           <a:lstStyle/>
           <a:p>
             <a:pPr algn="ctr" indent="0" marL="0">
               <a:buNone/>
             </a:pPr>
             <a:r>
-              <a:rPr lang="en-US" sz="3600" b="1" dirty="0">
-                <a:solidFill>
-                  <a:srgbClr val="990011"/>
+              <a:rPr lang="en-US" sz="1600" i="1" dirty="0">
+                <a:solidFill>
+                  <a:srgbClr val="555555"/>
                 </a:solidFill>
                 <a:latin typeface="Times New Roman" pitchFamily="34" charset="0"/>
                 <a:ea typeface="Times New Roman" pitchFamily="34" charset="-122"/>
                 <a:cs typeface="Times New Roman" pitchFamily="34" charset="-120"/>
               </a:rPr>
-              <a:t>Expected Answer</a:t>
-            </a:r>
-            <a:endParaRPr lang="en-US" sz="3600" dirty="0"/>
-          </a:p>
-        </p:txBody>
-      </p:sp>
-      <p:sp>
-        <p:nvSpPr>
-          <p:cNvPr id="5" name="Text 2"/>
-          <p:cNvSpPr/>
-          <p:nvPr/>
-        </p:nvSpPr>
-        <p:spPr>
-          <a:xfrm>
-            <a:off x="5349240" y="1783080"/>
-            <a:ext cx="6522415" cy="4663440"/>
-          </a:xfrm>
-          <a:prstGeom prst="rect">
-            <a:avLst/>
-          </a:prstGeom>
-          <a:noFill/>
-          <a:ln/>
-        </p:spPr>
-        <p:txBody>
-          <a:bodyPr wrap="square" lIns="0" tIns="0" rIns="0" bIns="0" rtlCol="0" anchor="t"/>
-          <a:lstStyle/>
-          <a:p>
-            <a:pPr algn="l" indent="0" marL="0">
-              <a:spcAft>
-                <a:spcPts val="800"/>
-              </a:spcAft>
-              <a:buNone/>
-            </a:pPr>
-            <a:r>
-              <a:rPr lang="en-US" sz="4000" dirty="0">
-                <a:solidFill>
-                  <a:srgbClr val="111111"/>
-                </a:solidFill>
-                <a:latin typeface="Times New Roman" pitchFamily="34" charset="0"/>
-                <a:ea typeface="Times New Roman" pitchFamily="34" charset="-122"/>
-                <a:cs typeface="Times New Roman" pitchFamily="34" charset="-120"/>
-              </a:rPr>
-              <a:t>The point on the surface above the focus.</a:t>
-            </a:r>
-            <a:endParaRPr lang="en-US" sz="4000" dirty="0"/>
+              <a:t>Illustration: houses destroyed by an earthquake</a:t>
+            </a:r>
+            <a:endParaRPr lang="en-US" sz="1600" dirty="0"/>
           </a:p>
         </p:txBody>
       </p:sp>
@@ -14453,7 +15341,7 @@
                 <a:ea typeface="Calibri" pitchFamily="34" charset="-122"/>
                 <a:cs typeface="Calibri" pitchFamily="34" charset="-120"/>
               </a:rPr>
-              <a:t>FORMATIVE EVALUATION</a:t>
+              <a:t>BOARD SUMMARY</a:t>
             </a:r>
             <a:endParaRPr lang="en-US" sz="1400" dirty="0"/>
           </a:p>
@@ -14476,7 +15364,7 @@
         <p:spPr>
           <a:xfrm>
             <a:off x="0" y="658368"/>
-            <a:ext cx="5120640" cy="5833872"/>
+            <a:ext cx="3840480" cy="5833872"/>
           </a:xfrm>
           <a:prstGeom prst="rect">
             <a:avLst/>
@@ -14491,8 +15379,8 @@
         </p:nvSpPr>
         <p:spPr>
           <a:xfrm>
-            <a:off x="5349240" y="1005840"/>
-            <a:ext cx="6522415" cy="731520"/>
+            <a:off x="4069080" y="1005840"/>
+            <a:ext cx="7802575" cy="731520"/>
           </a:xfrm>
           <a:prstGeom prst="rect">
             <a:avLst/>
@@ -14518,7 +15406,7 @@
                 <a:ea typeface="Times New Roman" pitchFamily="34" charset="-122"/>
                 <a:cs typeface="Times New Roman" pitchFamily="34" charset="-120"/>
               </a:rPr>
-              <a:t>Evaluation 2</a:t>
+              <a:t>3. Impact on Man</a:t>
             </a:r>
             <a:endParaRPr lang="en-US" sz="3600" dirty="0"/>
           </a:p>
@@ -14532,8 +15420,8 @@
         </p:nvSpPr>
         <p:spPr>
           <a:xfrm>
-            <a:off x="5349240" y="1783080"/>
-            <a:ext cx="6522415" cy="4663440"/>
+            <a:off x="4069080" y="1783080"/>
+            <a:ext cx="7802575" cy="4663440"/>
           </a:xfrm>
           <a:prstGeom prst="rect">
             <a:avLst/>
@@ -14552,7 +15440,7 @@
               <a:buNone/>
             </a:pPr>
             <a:r>
-              <a:rPr lang="en-US" sz="4000" dirty="0">
+              <a:rPr lang="en-US" sz="4000" b="1" dirty="0">
                 <a:solidFill>
                   <a:srgbClr val="111111"/>
                 </a:solidFill>
@@ -14560,7 +15448,61 @@
                 <a:ea typeface="Times New Roman" pitchFamily="34" charset="-122"/>
                 <a:cs typeface="Times New Roman" pitchFamily="34" charset="-120"/>
               </a:rPr>
-              <a:t>How do countries like Japan reduce the damage?</a:t>
+              <a:t>Destruction of property: </a:t>
+            </a:r>
+            <a:pPr algn="l" indent="0" marL="0">
+              <a:spcAft>
+                <a:spcPts val="800"/>
+              </a:spcAft>
+              <a:buNone/>
+            </a:pPr>
+            <a:r>
+              <a:rPr lang="en-US" sz="4000" dirty="0">
+                <a:solidFill>
+                  <a:srgbClr val="111111"/>
+                </a:solidFill>
+                <a:latin typeface="Times New Roman" pitchFamily="34" charset="0"/>
+                <a:ea typeface="Times New Roman" pitchFamily="34" charset="-122"/>
+                <a:cs typeface="Times New Roman" pitchFamily="34" charset="-120"/>
+              </a:rPr>
+              <a:t>Houses, roads, bridges, pipes and power lines are destroyed.</a:t>
+            </a:r>
+            <a:endParaRPr lang="en-US" sz="4000" dirty="0"/>
+          </a:p>
+          <a:p>
+            <a:pPr algn="l" indent="0" marL="0">
+              <a:spcAft>
+                <a:spcPts val="800"/>
+              </a:spcAft>
+              <a:buNone/>
+            </a:pPr>
+            <a:r>
+              <a:rPr lang="en-US" sz="4000" b="1" dirty="0">
+                <a:solidFill>
+                  <a:srgbClr val="111111"/>
+                </a:solidFill>
+                <a:latin typeface="Times New Roman" pitchFamily="34" charset="0"/>
+                <a:ea typeface="Times New Roman" pitchFamily="34" charset="-122"/>
+                <a:cs typeface="Times New Roman" pitchFamily="34" charset="-120"/>
+              </a:rPr>
+              <a:t>Fires and diseases: </a:t>
+            </a:r>
+            <a:pPr algn="l" indent="0" marL="0">
+              <a:spcAft>
+                <a:spcPts val="800"/>
+              </a:spcAft>
+              <a:buNone/>
+            </a:pPr>
+            <a:r>
+              <a:rPr lang="en-US" sz="4000" dirty="0">
+                <a:solidFill>
+                  <a:srgbClr val="111111"/>
+                </a:solidFill>
+                <a:latin typeface="Times New Roman" pitchFamily="34" charset="0"/>
+                <a:ea typeface="Times New Roman" pitchFamily="34" charset="-122"/>
+                <a:cs typeface="Times New Roman" pitchFamily="34" charset="-120"/>
+              </a:rPr>
+              <a:t>Broken gas pipes cause fires, and dirty water spreads diseases.</a:t>
             </a:r>
             <a:endParaRPr lang="en-US" sz="4000" dirty="0"/>
           </a:p>
@@ -14911,15 +15853,115 @@
                 <a:ea typeface="Calibri" pitchFamily="34" charset="-122"/>
                 <a:cs typeface="Calibri" pitchFamily="34" charset="-120"/>
               </a:rPr>
-              <a:t>FORMATIVE EVALUATION</a:t>
+              <a:t>BOARD SUMMARY</a:t>
             </a:r>
             <a:endParaRPr lang="en-US" sz="1400" dirty="0"/>
+          </a:p>
+        </p:txBody>
+      </p:sp>
+      <p:sp>
+        <p:nvSpPr>
+          <p:cNvPr id="3" name="Text 1"/>
+          <p:cNvSpPr/>
+          <p:nvPr/>
+        </p:nvSpPr>
+        <p:spPr>
+          <a:xfrm>
+            <a:off x="365760" y="1005840"/>
+            <a:ext cx="11460175" cy="731520"/>
+          </a:xfrm>
+          <a:prstGeom prst="rect">
+            <a:avLst/>
+          </a:prstGeom>
+          <a:noFill/>
+          <a:ln/>
+        </p:spPr>
+        <p:txBody>
+          <a:bodyPr wrap="square" lIns="0" tIns="0" rIns="0" bIns="0" rtlCol="0" anchor="ctr">
+            <a:normAutofit/>
+          </a:bodyPr>
+          <a:lstStyle/>
+          <a:p>
+            <a:pPr algn="ctr" indent="0" marL="0">
+              <a:buNone/>
+            </a:pPr>
+            <a:r>
+              <a:rPr lang="en-US" sz="3600" b="1" dirty="0">
+                <a:solidFill>
+                  <a:srgbClr val="990011"/>
+                </a:solidFill>
+                <a:latin typeface="Times New Roman" pitchFamily="34" charset="0"/>
+                <a:ea typeface="Times New Roman" pitchFamily="34" charset="-122"/>
+                <a:cs typeface="Times New Roman" pitchFamily="34" charset="-120"/>
+              </a:rPr>
+              <a:t>3. Impact on Man</a:t>
+            </a:r>
+            <a:endParaRPr lang="en-US" sz="3600" dirty="0"/>
+          </a:p>
+        </p:txBody>
+      </p:sp>
+      <p:sp>
+        <p:nvSpPr>
+          <p:cNvPr id="4" name="Text 2"/>
+          <p:cNvSpPr/>
+          <p:nvPr/>
+        </p:nvSpPr>
+        <p:spPr>
+          <a:xfrm>
+            <a:off x="365760" y="1783080"/>
+            <a:ext cx="4846320" cy="4617720"/>
+          </a:xfrm>
+          <a:prstGeom prst="rect">
+            <a:avLst/>
+          </a:prstGeom>
+          <a:noFill/>
+          <a:ln/>
+        </p:spPr>
+        <p:txBody>
+          <a:bodyPr wrap="square" lIns="0" tIns="0" rIns="0" bIns="0" rtlCol="0" anchor="t"/>
+          <a:lstStyle/>
+          <a:p>
+            <a:pPr algn="l" indent="0" marL="0">
+              <a:spcAft>
+                <a:spcPts val="800"/>
+              </a:spcAft>
+              <a:buNone/>
+            </a:pPr>
+            <a:r>
+              <a:rPr lang="en-US" sz="3600" b="1" dirty="0">
+                <a:solidFill>
+                  <a:srgbClr val="111111"/>
+                </a:solidFill>
+                <a:latin typeface="Times New Roman" pitchFamily="34" charset="0"/>
+                <a:ea typeface="Times New Roman" pitchFamily="34" charset="-122"/>
+                <a:cs typeface="Times New Roman" pitchFamily="34" charset="-120"/>
+              </a:rPr>
+              <a:t>Tsunamis and landslides: </a:t>
+            </a:r>
+            <a:pPr algn="l" indent="0" marL="0">
+              <a:spcAft>
+                <a:spcPts val="800"/>
+              </a:spcAft>
+              <a:buNone/>
+            </a:pPr>
+            <a:r>
+              <a:rPr lang="en-US" sz="3600" dirty="0">
+                <a:solidFill>
+                  <a:srgbClr val="111111"/>
+                </a:solidFill>
+                <a:latin typeface="Times New Roman" pitchFamily="34" charset="0"/>
+                <a:ea typeface="Times New Roman" pitchFamily="34" charset="-122"/>
+                <a:cs typeface="Times New Roman" pitchFamily="34" charset="-120"/>
+              </a:rPr>
+              <a:t>Earthquakes under the sea cause tsunamis, and on slopes they cause landslides.</a:t>
+            </a:r>
+            <a:endParaRPr lang="en-US" sz="3600" dirty="0"/>
           </a:p>
         </p:txBody>
       </p:sp>
       <p:pic>
         <p:nvPicPr>
-          <p:cNvPr id="3" name="Image 0" descr="/home/claude/f4/img/minesec_sheet.png">    </p:cNvPr>
+          <p:cNvPr id="5" name="Image 0" descr="/home/claude/f4/img/v2/lsa_tsunami.jpg">    </p:cNvPr>
           <p:cNvPicPr>
             <a:picLocks noChangeAspect="1"/>
           </p:cNvPicPr>
@@ -14933,8 +15975,8 @@
         </p:blipFill>
         <p:spPr>
           <a:xfrm>
-            <a:off x="0" y="658368"/>
-            <a:ext cx="5120640" cy="5833872"/>
+            <a:off x="5349240" y="2071212"/>
+            <a:ext cx="6659575" cy="3693983"/>
           </a:xfrm>
           <a:prstGeom prst="rect">
             <a:avLst/>
@@ -14943,14 +15985,14 @@
       </p:pic>
       <p:sp>
         <p:nvSpPr>
-          <p:cNvPr id="4" name="Text 1"/>
+          <p:cNvPr id="6" name="Text 3"/>
           <p:cNvSpPr/>
           <p:nvPr/>
         </p:nvSpPr>
         <p:spPr>
           <a:xfrm>
-            <a:off x="5349240" y="1005840"/>
-            <a:ext cx="6522415" cy="731520"/>
+            <a:off x="5349240" y="6089904"/>
+            <a:ext cx="6659575" cy="347472"/>
           </a:xfrm>
           <a:prstGeom prst="rect">
             <a:avLst/>
@@ -14959,68 +16001,24 @@
           <a:ln/>
         </p:spPr>
         <p:txBody>
-          <a:bodyPr wrap="square" lIns="0" tIns="0" rIns="0" bIns="0" rtlCol="0" anchor="ctr">
-            <a:normAutofit/>
-          </a:bodyPr>
+          <a:bodyPr wrap="square" lIns="0" tIns="0" rIns="0" bIns="0" rtlCol="0" anchor="ctr"/>
           <a:lstStyle/>
           <a:p>
             <a:pPr algn="ctr" indent="0" marL="0">
               <a:buNone/>
             </a:pPr>
             <a:r>
-              <a:rPr lang="en-US" sz="3600" b="1" dirty="0">
-                <a:solidFill>
-                  <a:srgbClr val="990011"/>
+              <a:rPr lang="en-US" sz="1600" i="1" dirty="0">
+                <a:solidFill>
+                  <a:srgbClr val="555555"/>
                 </a:solidFill>
                 <a:latin typeface="Times New Roman" pitchFamily="34" charset="0"/>
                 <a:ea typeface="Times New Roman" pitchFamily="34" charset="-122"/>
                 <a:cs typeface="Times New Roman" pitchFamily="34" charset="-120"/>
               </a:rPr>
-              <a:t>Expected Answer</a:t>
-            </a:r>
-            <a:endParaRPr lang="en-US" sz="3600" dirty="0"/>
-          </a:p>
-        </p:txBody>
-      </p:sp>
-      <p:sp>
-        <p:nvSpPr>
-          <p:cNvPr id="5" name="Text 2"/>
-          <p:cNvSpPr/>
-          <p:nvPr/>
-        </p:nvSpPr>
-        <p:spPr>
-          <a:xfrm>
-            <a:off x="5349240" y="1783080"/>
-            <a:ext cx="6522415" cy="4663440"/>
-          </a:xfrm>
-          <a:prstGeom prst="rect">
-            <a:avLst/>
-          </a:prstGeom>
-          <a:noFill/>
-          <a:ln/>
-        </p:spPr>
-        <p:txBody>
-          <a:bodyPr wrap="square" lIns="0" tIns="0" rIns="0" bIns="0" rtlCol="0" anchor="t"/>
-          <a:lstStyle/>
-          <a:p>
-            <a:pPr algn="l" indent="0" marL="0">
-              <a:spcAft>
-                <a:spcPts val="800"/>
-              </a:spcAft>
-              <a:buNone/>
-            </a:pPr>
-            <a:r>
-              <a:rPr lang="en-US" sz="4000" dirty="0">
-                <a:solidFill>
-                  <a:srgbClr val="111111"/>
-                </a:solidFill>
-                <a:latin typeface="Times New Roman" pitchFamily="34" charset="0"/>
-                <a:ea typeface="Times New Roman" pitchFamily="34" charset="-122"/>
-                <a:cs typeface="Times New Roman" pitchFamily="34" charset="-120"/>
-              </a:rPr>
-              <a:t>They build houses that resist earthquakes.</a:t>
-            </a:r>
-            <a:endParaRPr lang="en-US" sz="4000" dirty="0"/>
+              <a:t>Illustration: a tsunami</a:t>
+            </a:r>
+            <a:endParaRPr lang="en-US" sz="1600" dirty="0"/>
           </a:p>
         </p:txBody>
       </p:sp>
@@ -15130,7 +16128,7 @@
                 <a:ea typeface="Calibri" pitchFamily="34" charset="-122"/>
                 <a:cs typeface="Calibri" pitchFamily="34" charset="-120"/>
               </a:rPr>
-              <a:t>REMEDIATION</a:t>
+              <a:t>BOARD SUMMARY</a:t>
             </a:r>
             <a:endParaRPr lang="en-US" sz="1400" dirty="0"/>
           </a:p>
@@ -15195,7 +16193,7 @@
                 <a:ea typeface="Times New Roman" pitchFamily="34" charset="-122"/>
                 <a:cs typeface="Times New Roman" pitchFamily="34" charset="-120"/>
               </a:rPr>
-              <a:t>Remediation</a:t>
+              <a:t>3. Impact on Man</a:t>
             </a:r>
             <a:endParaRPr lang="en-US" sz="3600" dirty="0"/>
           </a:p>
@@ -15237,18 +16235,13 @@
                 <a:ea typeface="Times New Roman" pitchFamily="34" charset="-122"/>
                 <a:cs typeface="Times New Roman" pitchFamily="34" charset="-120"/>
               </a:rPr>
-              <a:t>Fill in the blanks:</a:t>
-            </a:r>
-            <a:endParaRPr lang="en-US" sz="4000" dirty="0"/>
-          </a:p>
-          <a:p>
-            <a:pPr algn="l" marL="342900" indent="-342900">
+              <a:t>Economic losses: </a:t>
+            </a:r>
+            <a:pPr algn="l" indent="0" marL="0">
               <a:spcAft>
                 <a:spcPts val="800"/>
               </a:spcAft>
-              <a:buSzPct val="100000"/>
-              <a:buFont typeface="+mj-lt"/>
-              <a:buAutoNum type="arabicPeriod" startAt="1"/>
+              <a:buNone/>
             </a:pPr>
             <a:r>
               <a:rPr lang="en-US" sz="4000" dirty="0">
@@ -15259,29 +16252,7 @@
                 <a:ea typeface="Times New Roman" pitchFamily="34" charset="-122"/>
                 <a:cs typeface="Times New Roman" pitchFamily="34" charset="-120"/>
               </a:rPr>
-              <a:t>A sudden shaking of the ground is an ______.</a:t>
-            </a:r>
-            <a:endParaRPr lang="en-US" sz="4000" dirty="0"/>
-          </a:p>
-          <a:p>
-            <a:pPr algn="l" marL="342900" indent="-342900">
-              <a:spcAft>
-                <a:spcPts val="800"/>
-              </a:spcAft>
-              <a:buSzPct val="100000"/>
-              <a:buFont typeface="+mj-lt"/>
-              <a:buAutoNum type="arabicPeriod" startAt="1"/>
-            </a:pPr>
-            <a:r>
-              <a:rPr lang="en-US" sz="4000" dirty="0">
-                <a:solidFill>
-                  <a:srgbClr val="111111"/>
-                </a:solidFill>
-                <a:latin typeface="Times New Roman" pitchFamily="34" charset="0"/>
-                <a:ea typeface="Times New Roman" pitchFamily="34" charset="-122"/>
-                <a:cs typeface="Times New Roman" pitchFamily="34" charset="-120"/>
-              </a:rPr>
-              <a:t>The instrument that records earthquakes is the ______.</a:t>
+              <a:t>Rebuilding costs a lot of money, and many people lose their jobs and homes.</a:t>
             </a:r>
             <a:endParaRPr lang="en-US" sz="4000" dirty="0"/>
           </a:p>
@@ -15393,7 +16364,7 @@
                 <a:ea typeface="Calibri" pitchFamily="34" charset="-122"/>
                 <a:cs typeface="Calibri" pitchFamily="34" charset="-120"/>
               </a:rPr>
-              <a:t>REMEDIATION</a:t>
+              <a:t>BOARD SUMMARY</a:t>
             </a:r>
             <a:endParaRPr lang="en-US" sz="1400" dirty="0"/>
           </a:p>
@@ -15416,7 +16387,7 @@
         <p:spPr>
           <a:xfrm>
             <a:off x="0" y="658368"/>
-            <a:ext cx="5120640" cy="5833872"/>
+            <a:ext cx="2468880" cy="5833872"/>
           </a:xfrm>
           <a:prstGeom prst="rect">
             <a:avLst/>
@@ -15431,8 +16402,8 @@
         </p:nvSpPr>
         <p:spPr>
           <a:xfrm>
-            <a:off x="5349240" y="1005840"/>
-            <a:ext cx="6522415" cy="731520"/>
+            <a:off x="2697480" y="1005840"/>
+            <a:ext cx="9174175" cy="731520"/>
           </a:xfrm>
           <a:prstGeom prst="rect">
             <a:avLst/>
@@ -15458,7 +16429,7 @@
                 <a:ea typeface="Times New Roman" pitchFamily="34" charset="-122"/>
                 <a:cs typeface="Times New Roman" pitchFamily="34" charset="-120"/>
               </a:rPr>
-              <a:t>Remediation (continued)</a:t>
+              <a:t>4. Adaptation and Mitigation</a:t>
             </a:r>
             <a:endParaRPr lang="en-US" sz="3600" dirty="0"/>
           </a:p>
@@ -15472,8 +16443,8 @@
         </p:nvSpPr>
         <p:spPr>
           <a:xfrm>
-            <a:off x="5349240" y="1783080"/>
-            <a:ext cx="6522415" cy="4663440"/>
+            <a:off x="2697480" y="1783080"/>
+            <a:ext cx="9174175" cy="4663440"/>
           </a:xfrm>
           <a:prstGeom prst="rect">
             <a:avLst/>
@@ -15485,16 +16456,14 @@
           <a:bodyPr wrap="square" lIns="0" tIns="0" rIns="0" bIns="0" rtlCol="0" anchor="t"/>
           <a:lstStyle/>
           <a:p>
-            <a:pPr algn="l" marL="342900" indent="-342900">
+            <a:pPr algn="l" indent="0" marL="0">
               <a:spcAft>
                 <a:spcPts val="800"/>
               </a:spcAft>
-              <a:buSzPct val="100000"/>
-              <a:buFont typeface="+mj-lt"/>
-              <a:buAutoNum type="arabicPeriod" startAt="1"/>
-            </a:pPr>
-            <a:r>
-              <a:rPr lang="en-US" sz="4000" dirty="0">
+              <a:buNone/>
+            </a:pPr>
+            <a:r>
+              <a:rPr lang="en-US" sz="4000" i="1" dirty="0">
                 <a:solidFill>
                   <a:srgbClr val="111111"/>
                 </a:solidFill>
@@ -15502,7 +16471,81 @@
                 <a:ea typeface="Times New Roman" pitchFamily="34" charset="-122"/>
                 <a:cs typeface="Times New Roman" pitchFamily="34" charset="-120"/>
               </a:rPr>
-              <a:t>The point under the ground where it starts is the ______.</a:t>
+              <a:t>People reduce the damage of earthquakes with the following measures:</a:t>
+            </a:r>
+            <a:endParaRPr lang="en-US" sz="4000" dirty="0"/>
+          </a:p>
+          <a:p>
+            <a:pPr algn="l" indent="0" marL="0">
+              <a:spcAft>
+                <a:spcPts val="800"/>
+              </a:spcAft>
+              <a:buNone/>
+            </a:pPr>
+            <a:r>
+              <a:rPr lang="en-US" sz="4000" b="1" dirty="0">
+                <a:solidFill>
+                  <a:srgbClr val="111111"/>
+                </a:solidFill>
+                <a:latin typeface="Times New Roman" pitchFamily="34" charset="0"/>
+                <a:ea typeface="Times New Roman" pitchFamily="34" charset="-122"/>
+                <a:cs typeface="Times New Roman" pitchFamily="34" charset="-120"/>
+              </a:rPr>
+              <a:t>Strong buildings: </a:t>
+            </a:r>
+            <a:pPr algn="l" indent="0" marL="0">
+              <a:spcAft>
+                <a:spcPts val="800"/>
+              </a:spcAft>
+              <a:buNone/>
+            </a:pPr>
+            <a:r>
+              <a:rPr lang="en-US" sz="4000" dirty="0">
+                <a:solidFill>
+                  <a:srgbClr val="111111"/>
+                </a:solidFill>
+                <a:latin typeface="Times New Roman" pitchFamily="34" charset="0"/>
+                <a:ea typeface="Times New Roman" pitchFamily="34" charset="-122"/>
+                <a:cs typeface="Times New Roman" pitchFamily="34" charset="-120"/>
+              </a:rPr>
+              <a:t>Buildings designed to resist shaking reduce deaths, as in Japan.</a:t>
+            </a:r>
+            <a:endParaRPr lang="en-US" sz="4000" dirty="0"/>
+          </a:p>
+          <a:p>
+            <a:pPr algn="l" indent="0" marL="0">
+              <a:spcAft>
+                <a:spcPts val="800"/>
+              </a:spcAft>
+              <a:buNone/>
+            </a:pPr>
+            <a:r>
+              <a:rPr lang="en-US" sz="4000" b="1" dirty="0">
+                <a:solidFill>
+                  <a:srgbClr val="111111"/>
+                </a:solidFill>
+                <a:latin typeface="Times New Roman" pitchFamily="34" charset="0"/>
+                <a:ea typeface="Times New Roman" pitchFamily="34" charset="-122"/>
+                <a:cs typeface="Times New Roman" pitchFamily="34" charset="-120"/>
+              </a:rPr>
+              <a:t>Land-use planning: </a:t>
+            </a:r>
+            <a:pPr algn="l" indent="0" marL="0">
+              <a:spcAft>
+                <a:spcPts val="800"/>
+              </a:spcAft>
+              <a:buNone/>
+            </a:pPr>
+            <a:r>
+              <a:rPr lang="en-US" sz="4000" dirty="0">
+                <a:solidFill>
+                  <a:srgbClr val="111111"/>
+                </a:solidFill>
+                <a:latin typeface="Times New Roman" pitchFamily="34" charset="0"/>
+                <a:ea typeface="Times New Roman" pitchFamily="34" charset="-122"/>
+                <a:cs typeface="Times New Roman" pitchFamily="34" charset="-120"/>
+              </a:rPr>
+              <a:t>People avoid building on faults and on loose, unstable ground.</a:t>
             </a:r>
             <a:endParaRPr lang="en-US" sz="4000" dirty="0"/>
           </a:p>
@@ -15614,7 +16657,7 @@
                 <a:ea typeface="Calibri" pitchFamily="34" charset="-122"/>
                 <a:cs typeface="Calibri" pitchFamily="34" charset="-120"/>
               </a:rPr>
-              <a:t>HOMEWORK</a:t>
+              <a:t>BOARD SUMMARY</a:t>
             </a:r>
             <a:endParaRPr lang="en-US" sz="1400" dirty="0"/>
           </a:p>
@@ -15637,7 +16680,7 @@
         <p:spPr>
           <a:xfrm>
             <a:off x="0" y="658368"/>
-            <a:ext cx="5120640" cy="5833872"/>
+            <a:ext cx="3840480" cy="5833872"/>
           </a:xfrm>
           <a:prstGeom prst="rect">
             <a:avLst/>
@@ -15652,8 +16695,8 @@
         </p:nvSpPr>
         <p:spPr>
           <a:xfrm>
-            <a:off x="5349240" y="1005840"/>
-            <a:ext cx="6522415" cy="731520"/>
+            <a:off x="4069080" y="1005840"/>
+            <a:ext cx="7802575" cy="731520"/>
           </a:xfrm>
           <a:prstGeom prst="rect">
             <a:avLst/>
@@ -15679,7 +16722,7 @@
                 <a:ea typeface="Times New Roman" pitchFamily="34" charset="-122"/>
                 <a:cs typeface="Times New Roman" pitchFamily="34" charset="-120"/>
               </a:rPr>
-              <a:t>Homework</a:t>
+              <a:t>4. Adaptation and Mitigation (continued)</a:t>
             </a:r>
             <a:endParaRPr lang="en-US" sz="3600" dirty="0"/>
           </a:p>
@@ -15693,8 +16736,8 @@
         </p:nvSpPr>
         <p:spPr>
           <a:xfrm>
-            <a:off x="5349240" y="1783080"/>
-            <a:ext cx="6522415" cy="4663440"/>
+            <a:off x="4069080" y="1783080"/>
+            <a:ext cx="7802575" cy="4663440"/>
           </a:xfrm>
           <a:prstGeom prst="rect">
             <a:avLst/>
@@ -15713,7 +16756,7 @@
               <a:buNone/>
             </a:pPr>
             <a:r>
-              <a:rPr lang="en-US" sz="4000" dirty="0">
+              <a:rPr lang="en-US" sz="4000" b="1" dirty="0">
                 <a:solidFill>
                   <a:srgbClr val="111111"/>
                 </a:solidFill>
@@ -15721,7 +16764,61 @@
                 <a:ea typeface="Times New Roman" pitchFamily="34" charset="-122"/>
                 <a:cs typeface="Times New Roman" pitchFamily="34" charset="-120"/>
               </a:rPr>
-              <a:t>After the next rain, look at the side of a road or a slope. Write what the running water did to the soil, and where the soil went.</a:t>
+              <a:t>Monitoring and warning: </a:t>
+            </a:r>
+            <a:pPr algn="l" indent="0" marL="0">
+              <a:spcAft>
+                <a:spcPts val="800"/>
+              </a:spcAft>
+              <a:buNone/>
+            </a:pPr>
+            <a:r>
+              <a:rPr lang="en-US" sz="4000" dirty="0">
+                <a:solidFill>
+                  <a:srgbClr val="111111"/>
+                </a:solidFill>
+                <a:latin typeface="Times New Roman" pitchFamily="34" charset="0"/>
+                <a:ea typeface="Times New Roman" pitchFamily="34" charset="-122"/>
+                <a:cs typeface="Times New Roman" pitchFamily="34" charset="-120"/>
+              </a:rPr>
+              <a:t>Seismographs watch active zones, and warning systems alert people.</a:t>
+            </a:r>
+            <a:endParaRPr lang="en-US" sz="4000" dirty="0"/>
+          </a:p>
+          <a:p>
+            <a:pPr algn="l" indent="0" marL="0">
+              <a:spcAft>
+                <a:spcPts val="800"/>
+              </a:spcAft>
+              <a:buNone/>
+            </a:pPr>
+            <a:r>
+              <a:rPr lang="en-US" sz="4000" b="1" dirty="0">
+                <a:solidFill>
+                  <a:srgbClr val="111111"/>
+                </a:solidFill>
+                <a:latin typeface="Times New Roman" pitchFamily="34" charset="0"/>
+                <a:ea typeface="Times New Roman" pitchFamily="34" charset="-122"/>
+                <a:cs typeface="Times New Roman" pitchFamily="34" charset="-120"/>
+              </a:rPr>
+              <a:t>Education and drills: </a:t>
+            </a:r>
+            <a:pPr algn="l" indent="0" marL="0">
+              <a:spcAft>
+                <a:spcPts val="800"/>
+              </a:spcAft>
+              <a:buNone/>
+            </a:pPr>
+            <a:r>
+              <a:rPr lang="en-US" sz="4000" dirty="0">
+                <a:solidFill>
+                  <a:srgbClr val="111111"/>
+                </a:solidFill>
+                <a:latin typeface="Times New Roman" pitchFamily="34" charset="0"/>
+                <a:ea typeface="Times New Roman" pitchFamily="34" charset="-122"/>
+                <a:cs typeface="Times New Roman" pitchFamily="34" charset="-120"/>
+              </a:rPr>
+              <a:t>People learn to take cover under a table and protect their heads.</a:t>
             </a:r>
             <a:endParaRPr lang="en-US" sz="4000" dirty="0"/>
           </a:p>
@@ -15833,7 +16930,7 @@
                 <a:ea typeface="Calibri" pitchFamily="34" charset="-122"/>
                 <a:cs typeface="Calibri" pitchFamily="34" charset="-120"/>
               </a:rPr>
-              <a:t>NEXT LESSON</a:t>
+              <a:t>BOARD SUMMARY</a:t>
             </a:r>
             <a:endParaRPr lang="en-US" sz="1400" dirty="0"/>
           </a:p>
@@ -15898,7 +16995,7 @@
                 <a:ea typeface="Times New Roman" pitchFamily="34" charset="-122"/>
                 <a:cs typeface="Times New Roman" pitchFamily="34" charset="-120"/>
               </a:rPr>
-              <a:t>Next Lesson</a:t>
+              <a:t>4. Adaptation and Mitigation (continued)</a:t>
             </a:r>
             <a:endParaRPr lang="en-US" sz="3600" dirty="0"/>
           </a:p>
@@ -15922,10 +17019,10 @@
           <a:ln/>
         </p:spPr>
         <p:txBody>
-          <a:bodyPr wrap="square" lIns="0" tIns="0" rIns="0" bIns="0" rtlCol="0" anchor="ctr"/>
-          <a:lstStyle/>
-          <a:p>
-            <a:pPr algn="ctr" indent="0" marL="0">
+          <a:bodyPr wrap="square" lIns="0" tIns="0" rIns="0" bIns="0" rtlCol="0" anchor="t"/>
+          <a:lstStyle/>
+          <a:p>
+            <a:pPr algn="l" indent="0" marL="0">
               <a:spcAft>
                 <a:spcPts val="800"/>
               </a:spcAft>
@@ -15940,27 +17037,24 @@
                 <a:ea typeface="Times New Roman" pitchFamily="34" charset="-122"/>
                 <a:cs typeface="Times New Roman" pitchFamily="34" charset="-120"/>
               </a:rPr>
-              <a:t>Our next lesson will be on:</a:t>
-            </a:r>
-            <a:endParaRPr lang="en-US" sz="4000" dirty="0"/>
-          </a:p>
-          <a:p>
-            <a:pPr algn="ctr" indent="0" marL="0">
+              <a:t>Emergency services: </a:t>
+            </a:r>
+            <a:pPr algn="l" indent="0" marL="0">
               <a:spcAft>
                 <a:spcPts val="800"/>
               </a:spcAft>
               <a:buNone/>
             </a:pPr>
             <a:r>
-              <a:rPr lang="en-US" sz="4000" b="1" dirty="0">
-                <a:solidFill>
-                  <a:srgbClr val="990011"/>
+              <a:rPr lang="en-US" sz="4000" dirty="0">
+                <a:solidFill>
+                  <a:srgbClr val="111111"/>
                 </a:solidFill>
                 <a:latin typeface="Times New Roman" pitchFamily="34" charset="0"/>
                 <a:ea typeface="Times New Roman" pitchFamily="34" charset="-122"/>
                 <a:cs typeface="Times New Roman" pitchFamily="34" charset="-120"/>
               </a:rPr>
-              <a:t>Lesson 14: Denudation</a:t>
+              <a:t>Rescue teams, hospitals and emergency supplies are prepared in advance.</a:t>
             </a:r>
             <a:endParaRPr lang="en-US" sz="4000" dirty="0"/>
           </a:p>
@@ -16072,6 +17166,2043 @@
                 <a:ea typeface="Calibri" pitchFamily="34" charset="-122"/>
                 <a:cs typeface="Calibri" pitchFamily="34" charset="-120"/>
               </a:rPr>
+              <a:t>FORMATIVE EVALUATION</a:t>
+            </a:r>
+            <a:endParaRPr lang="en-US" sz="1400" dirty="0"/>
+          </a:p>
+        </p:txBody>
+      </p:sp>
+      <p:pic>
+        <p:nvPicPr>
+          <p:cNvPr id="3" name="Image 0" descr="/home/claude/f4/img/minesec_sheet.png">    </p:cNvPr>
+          <p:cNvPicPr>
+            <a:picLocks noChangeAspect="1"/>
+          </p:cNvPicPr>
+          <p:nvPr/>
+        </p:nvPicPr>
+        <p:blipFill>
+          <a:blip r:embed="rId1"/>
+          <a:stretch>
+            <a:fillRect/>
+          </a:stretch>
+        </p:blipFill>
+        <p:spPr>
+          <a:xfrm>
+            <a:off x="0" y="658368"/>
+            <a:ext cx="5120640" cy="5833872"/>
+          </a:xfrm>
+          <a:prstGeom prst="rect">
+            <a:avLst/>
+          </a:prstGeom>
+        </p:spPr>
+      </p:pic>
+      <p:sp>
+        <p:nvSpPr>
+          <p:cNvPr id="4" name="Text 1"/>
+          <p:cNvSpPr/>
+          <p:nvPr/>
+        </p:nvSpPr>
+        <p:spPr>
+          <a:xfrm>
+            <a:off x="5349240" y="1005840"/>
+            <a:ext cx="6522415" cy="731520"/>
+          </a:xfrm>
+          <a:prstGeom prst="rect">
+            <a:avLst/>
+          </a:prstGeom>
+          <a:noFill/>
+          <a:ln/>
+        </p:spPr>
+        <p:txBody>
+          <a:bodyPr wrap="square" lIns="0" tIns="0" rIns="0" bIns="0" rtlCol="0" anchor="ctr">
+            <a:normAutofit/>
+          </a:bodyPr>
+          <a:lstStyle/>
+          <a:p>
+            <a:pPr algn="ctr" indent="0" marL="0">
+              <a:buNone/>
+            </a:pPr>
+            <a:r>
+              <a:rPr lang="en-US" sz="3600" b="1" dirty="0">
+                <a:solidFill>
+                  <a:srgbClr val="990011"/>
+                </a:solidFill>
+                <a:latin typeface="Times New Roman" pitchFamily="34" charset="0"/>
+                <a:ea typeface="Times New Roman" pitchFamily="34" charset="-122"/>
+                <a:cs typeface="Times New Roman" pitchFamily="34" charset="-120"/>
+              </a:rPr>
+              <a:t>Evaluation 1</a:t>
+            </a:r>
+            <a:endParaRPr lang="en-US" sz="3600" dirty="0"/>
+          </a:p>
+        </p:txBody>
+      </p:sp>
+      <p:sp>
+        <p:nvSpPr>
+          <p:cNvPr id="5" name="Text 2"/>
+          <p:cNvSpPr/>
+          <p:nvPr/>
+        </p:nvSpPr>
+        <p:spPr>
+          <a:xfrm>
+            <a:off x="5349240" y="1783080"/>
+            <a:ext cx="6522415" cy="4663440"/>
+          </a:xfrm>
+          <a:prstGeom prst="rect">
+            <a:avLst/>
+          </a:prstGeom>
+          <a:noFill/>
+          <a:ln/>
+        </p:spPr>
+        <p:txBody>
+          <a:bodyPr wrap="square" lIns="0" tIns="0" rIns="0" bIns="0" rtlCol="0" anchor="t"/>
+          <a:lstStyle/>
+          <a:p>
+            <a:pPr algn="l" indent="0" marL="0">
+              <a:spcAft>
+                <a:spcPts val="800"/>
+              </a:spcAft>
+              <a:buNone/>
+            </a:pPr>
+            <a:r>
+              <a:rPr lang="en-US" sz="4000" dirty="0">
+                <a:solidFill>
+                  <a:srgbClr val="111111"/>
+                </a:solidFill>
+                <a:latin typeface="Times New Roman" pitchFamily="34" charset="0"/>
+                <a:ea typeface="Times New Roman" pitchFamily="34" charset="-122"/>
+                <a:cs typeface="Times New Roman" pitchFamily="34" charset="-120"/>
+              </a:rPr>
+              <a:t>What is the epicentre?</a:t>
+            </a:r>
+            <a:endParaRPr lang="en-US" sz="4000" dirty="0"/>
+          </a:p>
+        </p:txBody>
+      </p:sp>
+      <p:sp>
+        <p:nvSpPr>
+          <p:cNvPr id="25" name="Slide Number Placeholder 0"/>
+          <p:cNvSpPr>
+            <a:spLocks noGrp="1"/>
+          </p:cNvSpPr>
+          <p:nvPr>
+            <p:ph type="sldNum" sz="quarter" idx="4294967295"/>
+          </p:nvPr>
+        </p:nvSpPr>
+        <p:spPr>
+          <a:xfrm>
+            <a:off x="27432" y="91440"/>
+            <a:ext cx="585216" cy="475488"/>
+          </a:xfrm>
+          <a:prstGeom prst="rect">
+            <a:avLst/>
+          </a:prstGeom>
+          <a:extLst>
+            <a:ext uri="{C572A759-6A51-4108-AA02-DFA0A04FC94B}">
+              <ma14:wrappingTextBoxFlag xmlns:ma14="http://schemas.microsoft.com/office/mac/drawingml/2011/main" val="0"/>
+            </a:ext>
+          </a:extLst>
+        </p:spPr>
+        <p:txBody>
+          <a:bodyPr/>
+          <a:lstStyle>
+            <a:lvl1pPr>
+              <a:defRPr sz="2000">
+                <a:solidFill>
+                  <a:srgbClr val="FFFFFF"/>
+                </a:solidFill>
+                <a:latin typeface="Calibri"/>
+                <a:ea typeface="Calibri"/>
+                <a:cs typeface="Calibri"/>
+              </a:defRPr>
+            </a:lvl1pPr>
+          </a:lstStyle>
+          <a:p>
+            <a:pPr algn="ctr"/>
+            <a:fld id="{F7021451-1387-4CA6-816F-3879F97B5CBC}" type="slidenum">
+              <a:rPr b="1" lang="en-US"/>
+              <a:t>45</a:t>
+            </a:fld>
+            <a:endParaRPr lang="en-US"/>
+          </a:p>
+        </p:txBody>
+      </p:sp>
+    </p:spTree>
+  </p:cSld>
+  <p:clrMapOvr>
+    <a:masterClrMapping/>
+  </p:clrMapOvr>
+</p:sld>
+</file>
+
+<file path=ppt/slides/slide46.xml><?xml version="1.0" encoding="utf-8"?>
+<p:sld xmlns:a="http://schemas.openxmlformats.org/drawingml/2006/main" xmlns:r="http://schemas.openxmlformats.org/officeDocument/2006/relationships" xmlns:p="http://schemas.openxmlformats.org/presentationml/2006/main">
+  <p:cSld name="Slide 46">
+    <p:spTree>
+      <p:nvGrpSpPr>
+        <p:cNvPr id="1" name=""/>
+        <p:cNvGrpSpPr/>
+        <p:nvPr/>
+      </p:nvGrpSpPr>
+      <p:grpSpPr>
+        <a:xfrm>
+          <a:off x="0" y="0"/>
+          <a:ext cx="0" cy="0"/>
+          <a:chOff x="0" y="0"/>
+          <a:chExt cx="0" cy="0"/>
+        </a:xfrm>
+      </p:grpSpPr>
+      <p:sp>
+        <p:nvSpPr>
+          <p:cNvPr id="2" name="Text 0"/>
+          <p:cNvSpPr/>
+          <p:nvPr/>
+        </p:nvSpPr>
+        <p:spPr>
+          <a:xfrm>
+            <a:off x="457200" y="713232"/>
+            <a:ext cx="11368735" cy="274320"/>
+          </a:xfrm>
+          <a:prstGeom prst="rect">
+            <a:avLst/>
+          </a:prstGeom>
+          <a:noFill/>
+          <a:ln/>
+        </p:spPr>
+        <p:txBody>
+          <a:bodyPr wrap="square" lIns="0" tIns="0" rIns="0" bIns="0" rtlCol="0" anchor="ctr"/>
+          <a:lstStyle/>
+          <a:p>
+            <a:pPr algn="r" indent="0" marL="0">
+              <a:buNone/>
+            </a:pPr>
+            <a:r>
+              <a:rPr lang="en-US" sz="1400" b="1" dirty="0">
+                <a:solidFill>
+                  <a:srgbClr val="1C3F6E"/>
+                </a:solidFill>
+                <a:latin typeface="Calibri" pitchFamily="34" charset="0"/>
+                <a:ea typeface="Calibri" pitchFamily="34" charset="-122"/>
+                <a:cs typeface="Calibri" pitchFamily="34" charset="-120"/>
+              </a:rPr>
+              <a:t>FORMATIVE EVALUATION</a:t>
+            </a:r>
+            <a:endParaRPr lang="en-US" sz="1400" dirty="0"/>
+          </a:p>
+        </p:txBody>
+      </p:sp>
+      <p:pic>
+        <p:nvPicPr>
+          <p:cNvPr id="3" name="Image 0" descr="/home/claude/f4/img/minesec_sheet.png">    </p:cNvPr>
+          <p:cNvPicPr>
+            <a:picLocks noChangeAspect="1"/>
+          </p:cNvPicPr>
+          <p:nvPr/>
+        </p:nvPicPr>
+        <p:blipFill>
+          <a:blip r:embed="rId1"/>
+          <a:stretch>
+            <a:fillRect/>
+          </a:stretch>
+        </p:blipFill>
+        <p:spPr>
+          <a:xfrm>
+            <a:off x="0" y="658368"/>
+            <a:ext cx="5120640" cy="5833872"/>
+          </a:xfrm>
+          <a:prstGeom prst="rect">
+            <a:avLst/>
+          </a:prstGeom>
+        </p:spPr>
+      </p:pic>
+      <p:sp>
+        <p:nvSpPr>
+          <p:cNvPr id="4" name="Text 1"/>
+          <p:cNvSpPr/>
+          <p:nvPr/>
+        </p:nvSpPr>
+        <p:spPr>
+          <a:xfrm>
+            <a:off x="5349240" y="1005840"/>
+            <a:ext cx="6522415" cy="731520"/>
+          </a:xfrm>
+          <a:prstGeom prst="rect">
+            <a:avLst/>
+          </a:prstGeom>
+          <a:noFill/>
+          <a:ln/>
+        </p:spPr>
+        <p:txBody>
+          <a:bodyPr wrap="square" lIns="0" tIns="0" rIns="0" bIns="0" rtlCol="0" anchor="ctr">
+            <a:normAutofit/>
+          </a:bodyPr>
+          <a:lstStyle/>
+          <a:p>
+            <a:pPr algn="ctr" indent="0" marL="0">
+              <a:buNone/>
+            </a:pPr>
+            <a:r>
+              <a:rPr lang="en-US" sz="3600" b="1" dirty="0">
+                <a:solidFill>
+                  <a:srgbClr val="990011"/>
+                </a:solidFill>
+                <a:latin typeface="Times New Roman" pitchFamily="34" charset="0"/>
+                <a:ea typeface="Times New Roman" pitchFamily="34" charset="-122"/>
+                <a:cs typeface="Times New Roman" pitchFamily="34" charset="-120"/>
+              </a:rPr>
+              <a:t>Expected Answer</a:t>
+            </a:r>
+            <a:endParaRPr lang="en-US" sz="3600" dirty="0"/>
+          </a:p>
+        </p:txBody>
+      </p:sp>
+      <p:sp>
+        <p:nvSpPr>
+          <p:cNvPr id="5" name="Text 2"/>
+          <p:cNvSpPr/>
+          <p:nvPr/>
+        </p:nvSpPr>
+        <p:spPr>
+          <a:xfrm>
+            <a:off x="5349240" y="1783080"/>
+            <a:ext cx="6522415" cy="4663440"/>
+          </a:xfrm>
+          <a:prstGeom prst="rect">
+            <a:avLst/>
+          </a:prstGeom>
+          <a:noFill/>
+          <a:ln/>
+        </p:spPr>
+        <p:txBody>
+          <a:bodyPr wrap="square" lIns="0" tIns="0" rIns="0" bIns="0" rtlCol="0" anchor="t"/>
+          <a:lstStyle/>
+          <a:p>
+            <a:pPr algn="l" indent="0" marL="0">
+              <a:spcAft>
+                <a:spcPts val="800"/>
+              </a:spcAft>
+              <a:buNone/>
+            </a:pPr>
+            <a:r>
+              <a:rPr lang="en-US" sz="4000" dirty="0">
+                <a:solidFill>
+                  <a:srgbClr val="111111"/>
+                </a:solidFill>
+                <a:latin typeface="Times New Roman" pitchFamily="34" charset="0"/>
+                <a:ea typeface="Times New Roman" pitchFamily="34" charset="-122"/>
+                <a:cs typeface="Times New Roman" pitchFamily="34" charset="-120"/>
+              </a:rPr>
+              <a:t>The point on the surface above the focus.</a:t>
+            </a:r>
+            <a:endParaRPr lang="en-US" sz="4000" dirty="0"/>
+          </a:p>
+        </p:txBody>
+      </p:sp>
+      <p:sp>
+        <p:nvSpPr>
+          <p:cNvPr id="25" name="Slide Number Placeholder 0"/>
+          <p:cNvSpPr>
+            <a:spLocks noGrp="1"/>
+          </p:cNvSpPr>
+          <p:nvPr>
+            <p:ph type="sldNum" sz="quarter" idx="4294967295"/>
+          </p:nvPr>
+        </p:nvSpPr>
+        <p:spPr>
+          <a:xfrm>
+            <a:off x="27432" y="91440"/>
+            <a:ext cx="585216" cy="475488"/>
+          </a:xfrm>
+          <a:prstGeom prst="rect">
+            <a:avLst/>
+          </a:prstGeom>
+          <a:extLst>
+            <a:ext uri="{C572A759-6A51-4108-AA02-DFA0A04FC94B}">
+              <ma14:wrappingTextBoxFlag xmlns:ma14="http://schemas.microsoft.com/office/mac/drawingml/2011/main" val="0"/>
+            </a:ext>
+          </a:extLst>
+        </p:spPr>
+        <p:txBody>
+          <a:bodyPr/>
+          <a:lstStyle>
+            <a:lvl1pPr>
+              <a:defRPr sz="2000">
+                <a:solidFill>
+                  <a:srgbClr val="FFFFFF"/>
+                </a:solidFill>
+                <a:latin typeface="Calibri"/>
+                <a:ea typeface="Calibri"/>
+                <a:cs typeface="Calibri"/>
+              </a:defRPr>
+            </a:lvl1pPr>
+          </a:lstStyle>
+          <a:p>
+            <a:pPr algn="ctr"/>
+            <a:fld id="{F7021451-1387-4CA6-816F-3879F97B5CBC}" type="slidenum">
+              <a:rPr b="1" lang="en-US"/>
+              <a:t>46</a:t>
+            </a:fld>
+            <a:endParaRPr lang="en-US"/>
+          </a:p>
+        </p:txBody>
+      </p:sp>
+    </p:spTree>
+  </p:cSld>
+  <p:clrMapOvr>
+    <a:masterClrMapping/>
+  </p:clrMapOvr>
+</p:sld>
+</file>
+
+<file path=ppt/slides/slide47.xml><?xml version="1.0" encoding="utf-8"?>
+<p:sld xmlns:a="http://schemas.openxmlformats.org/drawingml/2006/main" xmlns:r="http://schemas.openxmlformats.org/officeDocument/2006/relationships" xmlns:p="http://schemas.openxmlformats.org/presentationml/2006/main">
+  <p:cSld name="Slide 47">
+    <p:spTree>
+      <p:nvGrpSpPr>
+        <p:cNvPr id="1" name=""/>
+        <p:cNvGrpSpPr/>
+        <p:nvPr/>
+      </p:nvGrpSpPr>
+      <p:grpSpPr>
+        <a:xfrm>
+          <a:off x="0" y="0"/>
+          <a:ext cx="0" cy="0"/>
+          <a:chOff x="0" y="0"/>
+          <a:chExt cx="0" cy="0"/>
+        </a:xfrm>
+      </p:grpSpPr>
+      <p:sp>
+        <p:nvSpPr>
+          <p:cNvPr id="2" name="Text 0"/>
+          <p:cNvSpPr/>
+          <p:nvPr/>
+        </p:nvSpPr>
+        <p:spPr>
+          <a:xfrm>
+            <a:off x="457200" y="713232"/>
+            <a:ext cx="11368735" cy="274320"/>
+          </a:xfrm>
+          <a:prstGeom prst="rect">
+            <a:avLst/>
+          </a:prstGeom>
+          <a:noFill/>
+          <a:ln/>
+        </p:spPr>
+        <p:txBody>
+          <a:bodyPr wrap="square" lIns="0" tIns="0" rIns="0" bIns="0" rtlCol="0" anchor="ctr"/>
+          <a:lstStyle/>
+          <a:p>
+            <a:pPr algn="r" indent="0" marL="0">
+              <a:buNone/>
+            </a:pPr>
+            <a:r>
+              <a:rPr lang="en-US" sz="1400" b="1" dirty="0">
+                <a:solidFill>
+                  <a:srgbClr val="1C3F6E"/>
+                </a:solidFill>
+                <a:latin typeface="Calibri" pitchFamily="34" charset="0"/>
+                <a:ea typeface="Calibri" pitchFamily="34" charset="-122"/>
+                <a:cs typeface="Calibri" pitchFamily="34" charset="-120"/>
+              </a:rPr>
+              <a:t>FORMATIVE EVALUATION</a:t>
+            </a:r>
+            <a:endParaRPr lang="en-US" sz="1400" dirty="0"/>
+          </a:p>
+        </p:txBody>
+      </p:sp>
+      <p:pic>
+        <p:nvPicPr>
+          <p:cNvPr id="3" name="Image 0" descr="/home/claude/f4/img/minesec_sheet.png">    </p:cNvPr>
+          <p:cNvPicPr>
+            <a:picLocks noChangeAspect="1"/>
+          </p:cNvPicPr>
+          <p:nvPr/>
+        </p:nvPicPr>
+        <p:blipFill>
+          <a:blip r:embed="rId1"/>
+          <a:stretch>
+            <a:fillRect/>
+          </a:stretch>
+        </p:blipFill>
+        <p:spPr>
+          <a:xfrm>
+            <a:off x="0" y="658368"/>
+            <a:ext cx="5120640" cy="5833872"/>
+          </a:xfrm>
+          <a:prstGeom prst="rect">
+            <a:avLst/>
+          </a:prstGeom>
+        </p:spPr>
+      </p:pic>
+      <p:sp>
+        <p:nvSpPr>
+          <p:cNvPr id="4" name="Text 1"/>
+          <p:cNvSpPr/>
+          <p:nvPr/>
+        </p:nvSpPr>
+        <p:spPr>
+          <a:xfrm>
+            <a:off x="5349240" y="1005840"/>
+            <a:ext cx="6522415" cy="731520"/>
+          </a:xfrm>
+          <a:prstGeom prst="rect">
+            <a:avLst/>
+          </a:prstGeom>
+          <a:noFill/>
+          <a:ln/>
+        </p:spPr>
+        <p:txBody>
+          <a:bodyPr wrap="square" lIns="0" tIns="0" rIns="0" bIns="0" rtlCol="0" anchor="ctr">
+            <a:normAutofit/>
+          </a:bodyPr>
+          <a:lstStyle/>
+          <a:p>
+            <a:pPr algn="ctr" indent="0" marL="0">
+              <a:buNone/>
+            </a:pPr>
+            <a:r>
+              <a:rPr lang="en-US" sz="3600" b="1" dirty="0">
+                <a:solidFill>
+                  <a:srgbClr val="990011"/>
+                </a:solidFill>
+                <a:latin typeface="Times New Roman" pitchFamily="34" charset="0"/>
+                <a:ea typeface="Times New Roman" pitchFamily="34" charset="-122"/>
+                <a:cs typeface="Times New Roman" pitchFamily="34" charset="-120"/>
+              </a:rPr>
+              <a:t>Evaluation 2</a:t>
+            </a:r>
+            <a:endParaRPr lang="en-US" sz="3600" dirty="0"/>
+          </a:p>
+        </p:txBody>
+      </p:sp>
+      <p:sp>
+        <p:nvSpPr>
+          <p:cNvPr id="5" name="Text 2"/>
+          <p:cNvSpPr/>
+          <p:nvPr/>
+        </p:nvSpPr>
+        <p:spPr>
+          <a:xfrm>
+            <a:off x="5349240" y="1783080"/>
+            <a:ext cx="6522415" cy="4663440"/>
+          </a:xfrm>
+          <a:prstGeom prst="rect">
+            <a:avLst/>
+          </a:prstGeom>
+          <a:noFill/>
+          <a:ln/>
+        </p:spPr>
+        <p:txBody>
+          <a:bodyPr wrap="square" lIns="0" tIns="0" rIns="0" bIns="0" rtlCol="0" anchor="t"/>
+          <a:lstStyle/>
+          <a:p>
+            <a:pPr algn="l" indent="0" marL="0">
+              <a:spcAft>
+                <a:spcPts val="800"/>
+              </a:spcAft>
+              <a:buNone/>
+            </a:pPr>
+            <a:r>
+              <a:rPr lang="en-US" sz="4000" dirty="0">
+                <a:solidFill>
+                  <a:srgbClr val="111111"/>
+                </a:solidFill>
+                <a:latin typeface="Times New Roman" pitchFamily="34" charset="0"/>
+                <a:ea typeface="Times New Roman" pitchFamily="34" charset="-122"/>
+                <a:cs typeface="Times New Roman" pitchFamily="34" charset="-120"/>
+              </a:rPr>
+              <a:t>How do countries like Japan reduce the damage?</a:t>
+            </a:r>
+            <a:endParaRPr lang="en-US" sz="4000" dirty="0"/>
+          </a:p>
+        </p:txBody>
+      </p:sp>
+      <p:sp>
+        <p:nvSpPr>
+          <p:cNvPr id="25" name="Slide Number Placeholder 0"/>
+          <p:cNvSpPr>
+            <a:spLocks noGrp="1"/>
+          </p:cNvSpPr>
+          <p:nvPr>
+            <p:ph type="sldNum" sz="quarter" idx="4294967295"/>
+          </p:nvPr>
+        </p:nvSpPr>
+        <p:spPr>
+          <a:xfrm>
+            <a:off x="27432" y="91440"/>
+            <a:ext cx="585216" cy="475488"/>
+          </a:xfrm>
+          <a:prstGeom prst="rect">
+            <a:avLst/>
+          </a:prstGeom>
+          <a:extLst>
+            <a:ext uri="{C572A759-6A51-4108-AA02-DFA0A04FC94B}">
+              <ma14:wrappingTextBoxFlag xmlns:ma14="http://schemas.microsoft.com/office/mac/drawingml/2011/main" val="0"/>
+            </a:ext>
+          </a:extLst>
+        </p:spPr>
+        <p:txBody>
+          <a:bodyPr/>
+          <a:lstStyle>
+            <a:lvl1pPr>
+              <a:defRPr sz="2000">
+                <a:solidFill>
+                  <a:srgbClr val="FFFFFF"/>
+                </a:solidFill>
+                <a:latin typeface="Calibri"/>
+                <a:ea typeface="Calibri"/>
+                <a:cs typeface="Calibri"/>
+              </a:defRPr>
+            </a:lvl1pPr>
+          </a:lstStyle>
+          <a:p>
+            <a:pPr algn="ctr"/>
+            <a:fld id="{F7021451-1387-4CA6-816F-3879F97B5CBC}" type="slidenum">
+              <a:rPr b="1" lang="en-US"/>
+              <a:t>47</a:t>
+            </a:fld>
+            <a:endParaRPr lang="en-US"/>
+          </a:p>
+        </p:txBody>
+      </p:sp>
+    </p:spTree>
+  </p:cSld>
+  <p:clrMapOvr>
+    <a:masterClrMapping/>
+  </p:clrMapOvr>
+</p:sld>
+</file>
+
+<file path=ppt/slides/slide48.xml><?xml version="1.0" encoding="utf-8"?>
+<p:sld xmlns:a="http://schemas.openxmlformats.org/drawingml/2006/main" xmlns:r="http://schemas.openxmlformats.org/officeDocument/2006/relationships" xmlns:p="http://schemas.openxmlformats.org/presentationml/2006/main">
+  <p:cSld name="Slide 48">
+    <p:spTree>
+      <p:nvGrpSpPr>
+        <p:cNvPr id="1" name=""/>
+        <p:cNvGrpSpPr/>
+        <p:nvPr/>
+      </p:nvGrpSpPr>
+      <p:grpSpPr>
+        <a:xfrm>
+          <a:off x="0" y="0"/>
+          <a:ext cx="0" cy="0"/>
+          <a:chOff x="0" y="0"/>
+          <a:chExt cx="0" cy="0"/>
+        </a:xfrm>
+      </p:grpSpPr>
+      <p:sp>
+        <p:nvSpPr>
+          <p:cNvPr id="2" name="Text 0"/>
+          <p:cNvSpPr/>
+          <p:nvPr/>
+        </p:nvSpPr>
+        <p:spPr>
+          <a:xfrm>
+            <a:off x="457200" y="713232"/>
+            <a:ext cx="11368735" cy="274320"/>
+          </a:xfrm>
+          <a:prstGeom prst="rect">
+            <a:avLst/>
+          </a:prstGeom>
+          <a:noFill/>
+          <a:ln/>
+        </p:spPr>
+        <p:txBody>
+          <a:bodyPr wrap="square" lIns="0" tIns="0" rIns="0" bIns="0" rtlCol="0" anchor="ctr"/>
+          <a:lstStyle/>
+          <a:p>
+            <a:pPr algn="r" indent="0" marL="0">
+              <a:buNone/>
+            </a:pPr>
+            <a:r>
+              <a:rPr lang="en-US" sz="1400" b="1" dirty="0">
+                <a:solidFill>
+                  <a:srgbClr val="1C3F6E"/>
+                </a:solidFill>
+                <a:latin typeface="Calibri" pitchFamily="34" charset="0"/>
+                <a:ea typeface="Calibri" pitchFamily="34" charset="-122"/>
+                <a:cs typeface="Calibri" pitchFamily="34" charset="-120"/>
+              </a:rPr>
+              <a:t>FORMATIVE EVALUATION</a:t>
+            </a:r>
+            <a:endParaRPr lang="en-US" sz="1400" dirty="0"/>
+          </a:p>
+        </p:txBody>
+      </p:sp>
+      <p:pic>
+        <p:nvPicPr>
+          <p:cNvPr id="3" name="Image 0" descr="/home/claude/f4/img/minesec_sheet.png">    </p:cNvPr>
+          <p:cNvPicPr>
+            <a:picLocks noChangeAspect="1"/>
+          </p:cNvPicPr>
+          <p:nvPr/>
+        </p:nvPicPr>
+        <p:blipFill>
+          <a:blip r:embed="rId1"/>
+          <a:stretch>
+            <a:fillRect/>
+          </a:stretch>
+        </p:blipFill>
+        <p:spPr>
+          <a:xfrm>
+            <a:off x="0" y="658368"/>
+            <a:ext cx="5120640" cy="5833872"/>
+          </a:xfrm>
+          <a:prstGeom prst="rect">
+            <a:avLst/>
+          </a:prstGeom>
+        </p:spPr>
+      </p:pic>
+      <p:sp>
+        <p:nvSpPr>
+          <p:cNvPr id="4" name="Text 1"/>
+          <p:cNvSpPr/>
+          <p:nvPr/>
+        </p:nvSpPr>
+        <p:spPr>
+          <a:xfrm>
+            <a:off x="5349240" y="1005840"/>
+            <a:ext cx="6522415" cy="731520"/>
+          </a:xfrm>
+          <a:prstGeom prst="rect">
+            <a:avLst/>
+          </a:prstGeom>
+          <a:noFill/>
+          <a:ln/>
+        </p:spPr>
+        <p:txBody>
+          <a:bodyPr wrap="square" lIns="0" tIns="0" rIns="0" bIns="0" rtlCol="0" anchor="ctr">
+            <a:normAutofit/>
+          </a:bodyPr>
+          <a:lstStyle/>
+          <a:p>
+            <a:pPr algn="ctr" indent="0" marL="0">
+              <a:buNone/>
+            </a:pPr>
+            <a:r>
+              <a:rPr lang="en-US" sz="3600" b="1" dirty="0">
+                <a:solidFill>
+                  <a:srgbClr val="990011"/>
+                </a:solidFill>
+                <a:latin typeface="Times New Roman" pitchFamily="34" charset="0"/>
+                <a:ea typeface="Times New Roman" pitchFamily="34" charset="-122"/>
+                <a:cs typeface="Times New Roman" pitchFamily="34" charset="-120"/>
+              </a:rPr>
+              <a:t>Expected Answer</a:t>
+            </a:r>
+            <a:endParaRPr lang="en-US" sz="3600" dirty="0"/>
+          </a:p>
+        </p:txBody>
+      </p:sp>
+      <p:sp>
+        <p:nvSpPr>
+          <p:cNvPr id="5" name="Text 2"/>
+          <p:cNvSpPr/>
+          <p:nvPr/>
+        </p:nvSpPr>
+        <p:spPr>
+          <a:xfrm>
+            <a:off x="5349240" y="1783080"/>
+            <a:ext cx="6522415" cy="4663440"/>
+          </a:xfrm>
+          <a:prstGeom prst="rect">
+            <a:avLst/>
+          </a:prstGeom>
+          <a:noFill/>
+          <a:ln/>
+        </p:spPr>
+        <p:txBody>
+          <a:bodyPr wrap="square" lIns="0" tIns="0" rIns="0" bIns="0" rtlCol="0" anchor="t"/>
+          <a:lstStyle/>
+          <a:p>
+            <a:pPr algn="l" indent="0" marL="0">
+              <a:spcAft>
+                <a:spcPts val="800"/>
+              </a:spcAft>
+              <a:buNone/>
+            </a:pPr>
+            <a:r>
+              <a:rPr lang="en-US" sz="4000" dirty="0">
+                <a:solidFill>
+                  <a:srgbClr val="111111"/>
+                </a:solidFill>
+                <a:latin typeface="Times New Roman" pitchFamily="34" charset="0"/>
+                <a:ea typeface="Times New Roman" pitchFamily="34" charset="-122"/>
+                <a:cs typeface="Times New Roman" pitchFamily="34" charset="-120"/>
+              </a:rPr>
+              <a:t>They build houses that resist earthquakes.</a:t>
+            </a:r>
+            <a:endParaRPr lang="en-US" sz="4000" dirty="0"/>
+          </a:p>
+        </p:txBody>
+      </p:sp>
+      <p:sp>
+        <p:nvSpPr>
+          <p:cNvPr id="25" name="Slide Number Placeholder 0"/>
+          <p:cNvSpPr>
+            <a:spLocks noGrp="1"/>
+          </p:cNvSpPr>
+          <p:nvPr>
+            <p:ph type="sldNum" sz="quarter" idx="4294967295"/>
+          </p:nvPr>
+        </p:nvSpPr>
+        <p:spPr>
+          <a:xfrm>
+            <a:off x="27432" y="91440"/>
+            <a:ext cx="585216" cy="475488"/>
+          </a:xfrm>
+          <a:prstGeom prst="rect">
+            <a:avLst/>
+          </a:prstGeom>
+          <a:extLst>
+            <a:ext uri="{C572A759-6A51-4108-AA02-DFA0A04FC94B}">
+              <ma14:wrappingTextBoxFlag xmlns:ma14="http://schemas.microsoft.com/office/mac/drawingml/2011/main" val="0"/>
+            </a:ext>
+          </a:extLst>
+        </p:spPr>
+        <p:txBody>
+          <a:bodyPr/>
+          <a:lstStyle>
+            <a:lvl1pPr>
+              <a:defRPr sz="2000">
+                <a:solidFill>
+                  <a:srgbClr val="FFFFFF"/>
+                </a:solidFill>
+                <a:latin typeface="Calibri"/>
+                <a:ea typeface="Calibri"/>
+                <a:cs typeface="Calibri"/>
+              </a:defRPr>
+            </a:lvl1pPr>
+          </a:lstStyle>
+          <a:p>
+            <a:pPr algn="ctr"/>
+            <a:fld id="{F7021451-1387-4CA6-816F-3879F97B5CBC}" type="slidenum">
+              <a:rPr b="1" lang="en-US"/>
+              <a:t>48</a:t>
+            </a:fld>
+            <a:endParaRPr lang="en-US"/>
+          </a:p>
+        </p:txBody>
+      </p:sp>
+    </p:spTree>
+  </p:cSld>
+  <p:clrMapOvr>
+    <a:masterClrMapping/>
+  </p:clrMapOvr>
+</p:sld>
+</file>
+
+<file path=ppt/slides/slide49.xml><?xml version="1.0" encoding="utf-8"?>
+<p:sld xmlns:a="http://schemas.openxmlformats.org/drawingml/2006/main" xmlns:r="http://schemas.openxmlformats.org/officeDocument/2006/relationships" xmlns:p="http://schemas.openxmlformats.org/presentationml/2006/main">
+  <p:cSld name="Slide 49">
+    <p:spTree>
+      <p:nvGrpSpPr>
+        <p:cNvPr id="1" name=""/>
+        <p:cNvGrpSpPr/>
+        <p:nvPr/>
+      </p:nvGrpSpPr>
+      <p:grpSpPr>
+        <a:xfrm>
+          <a:off x="0" y="0"/>
+          <a:ext cx="0" cy="0"/>
+          <a:chOff x="0" y="0"/>
+          <a:chExt cx="0" cy="0"/>
+        </a:xfrm>
+      </p:grpSpPr>
+      <p:sp>
+        <p:nvSpPr>
+          <p:cNvPr id="2" name="Text 0"/>
+          <p:cNvSpPr/>
+          <p:nvPr/>
+        </p:nvSpPr>
+        <p:spPr>
+          <a:xfrm>
+            <a:off x="457200" y="713232"/>
+            <a:ext cx="11368735" cy="274320"/>
+          </a:xfrm>
+          <a:prstGeom prst="rect">
+            <a:avLst/>
+          </a:prstGeom>
+          <a:noFill/>
+          <a:ln/>
+        </p:spPr>
+        <p:txBody>
+          <a:bodyPr wrap="square" lIns="0" tIns="0" rIns="0" bIns="0" rtlCol="0" anchor="ctr"/>
+          <a:lstStyle/>
+          <a:p>
+            <a:pPr algn="r" indent="0" marL="0">
+              <a:buNone/>
+            </a:pPr>
+            <a:r>
+              <a:rPr lang="en-US" sz="1400" b="1" dirty="0">
+                <a:solidFill>
+                  <a:srgbClr val="1C3F6E"/>
+                </a:solidFill>
+                <a:latin typeface="Calibri" pitchFamily="34" charset="0"/>
+                <a:ea typeface="Calibri" pitchFamily="34" charset="-122"/>
+                <a:cs typeface="Calibri" pitchFamily="34" charset="-120"/>
+              </a:rPr>
+              <a:t>REMEDIATION</a:t>
+            </a:r>
+            <a:endParaRPr lang="en-US" sz="1400" dirty="0"/>
+          </a:p>
+        </p:txBody>
+      </p:sp>
+      <p:pic>
+        <p:nvPicPr>
+          <p:cNvPr id="3" name="Image 0" descr="/home/claude/f4/img/minesec_sheet.png">    </p:cNvPr>
+          <p:cNvPicPr>
+            <a:picLocks noChangeAspect="1"/>
+          </p:cNvPicPr>
+          <p:nvPr/>
+        </p:nvPicPr>
+        <p:blipFill>
+          <a:blip r:embed="rId1"/>
+          <a:stretch>
+            <a:fillRect/>
+          </a:stretch>
+        </p:blipFill>
+        <p:spPr>
+          <a:xfrm>
+            <a:off x="0" y="658368"/>
+            <a:ext cx="5120640" cy="5833872"/>
+          </a:xfrm>
+          <a:prstGeom prst="rect">
+            <a:avLst/>
+          </a:prstGeom>
+        </p:spPr>
+      </p:pic>
+      <p:sp>
+        <p:nvSpPr>
+          <p:cNvPr id="4" name="Text 1"/>
+          <p:cNvSpPr/>
+          <p:nvPr/>
+        </p:nvSpPr>
+        <p:spPr>
+          <a:xfrm>
+            <a:off x="5349240" y="1005840"/>
+            <a:ext cx="6522415" cy="731520"/>
+          </a:xfrm>
+          <a:prstGeom prst="rect">
+            <a:avLst/>
+          </a:prstGeom>
+          <a:noFill/>
+          <a:ln/>
+        </p:spPr>
+        <p:txBody>
+          <a:bodyPr wrap="square" lIns="0" tIns="0" rIns="0" bIns="0" rtlCol="0" anchor="ctr">
+            <a:normAutofit/>
+          </a:bodyPr>
+          <a:lstStyle/>
+          <a:p>
+            <a:pPr algn="ctr" indent="0" marL="0">
+              <a:buNone/>
+            </a:pPr>
+            <a:r>
+              <a:rPr lang="en-US" sz="3600" b="1" dirty="0">
+                <a:solidFill>
+                  <a:srgbClr val="990011"/>
+                </a:solidFill>
+                <a:latin typeface="Times New Roman" pitchFamily="34" charset="0"/>
+                <a:ea typeface="Times New Roman" pitchFamily="34" charset="-122"/>
+                <a:cs typeface="Times New Roman" pitchFamily="34" charset="-120"/>
+              </a:rPr>
+              <a:t>Remediation</a:t>
+            </a:r>
+            <a:endParaRPr lang="en-US" sz="3600" dirty="0"/>
+          </a:p>
+        </p:txBody>
+      </p:sp>
+      <p:sp>
+        <p:nvSpPr>
+          <p:cNvPr id="5" name="Text 2"/>
+          <p:cNvSpPr/>
+          <p:nvPr/>
+        </p:nvSpPr>
+        <p:spPr>
+          <a:xfrm>
+            <a:off x="5349240" y="1783080"/>
+            <a:ext cx="6522415" cy="4663440"/>
+          </a:xfrm>
+          <a:prstGeom prst="rect">
+            <a:avLst/>
+          </a:prstGeom>
+          <a:noFill/>
+          <a:ln/>
+        </p:spPr>
+        <p:txBody>
+          <a:bodyPr wrap="square" lIns="0" tIns="0" rIns="0" bIns="0" rtlCol="0" anchor="t"/>
+          <a:lstStyle/>
+          <a:p>
+            <a:pPr algn="l" indent="0" marL="0">
+              <a:spcAft>
+                <a:spcPts val="800"/>
+              </a:spcAft>
+              <a:buNone/>
+            </a:pPr>
+            <a:r>
+              <a:rPr lang="en-US" sz="4000" b="1" dirty="0">
+                <a:solidFill>
+                  <a:srgbClr val="111111"/>
+                </a:solidFill>
+                <a:latin typeface="Times New Roman" pitchFamily="34" charset="0"/>
+                <a:ea typeface="Times New Roman" pitchFamily="34" charset="-122"/>
+                <a:cs typeface="Times New Roman" pitchFamily="34" charset="-120"/>
+              </a:rPr>
+              <a:t>Fill in the blanks:</a:t>
+            </a:r>
+            <a:endParaRPr lang="en-US" sz="4000" dirty="0"/>
+          </a:p>
+          <a:p>
+            <a:pPr algn="l" marL="342900" indent="-342900">
+              <a:spcAft>
+                <a:spcPts val="800"/>
+              </a:spcAft>
+              <a:buSzPct val="100000"/>
+              <a:buFont typeface="+mj-lt"/>
+              <a:buAutoNum type="arabicPeriod" startAt="1"/>
+            </a:pPr>
+            <a:r>
+              <a:rPr lang="en-US" sz="4000" dirty="0">
+                <a:solidFill>
+                  <a:srgbClr val="111111"/>
+                </a:solidFill>
+                <a:latin typeface="Times New Roman" pitchFamily="34" charset="0"/>
+                <a:ea typeface="Times New Roman" pitchFamily="34" charset="-122"/>
+                <a:cs typeface="Times New Roman" pitchFamily="34" charset="-120"/>
+              </a:rPr>
+              <a:t>A sudden shaking of the ground is an ______.</a:t>
+            </a:r>
+            <a:endParaRPr lang="en-US" sz="4000" dirty="0"/>
+          </a:p>
+          <a:p>
+            <a:pPr algn="l" marL="342900" indent="-342900">
+              <a:spcAft>
+                <a:spcPts val="800"/>
+              </a:spcAft>
+              <a:buSzPct val="100000"/>
+              <a:buFont typeface="+mj-lt"/>
+              <a:buAutoNum type="arabicPeriod" startAt="1"/>
+            </a:pPr>
+            <a:r>
+              <a:rPr lang="en-US" sz="4000" dirty="0">
+                <a:solidFill>
+                  <a:srgbClr val="111111"/>
+                </a:solidFill>
+                <a:latin typeface="Times New Roman" pitchFamily="34" charset="0"/>
+                <a:ea typeface="Times New Roman" pitchFamily="34" charset="-122"/>
+                <a:cs typeface="Times New Roman" pitchFamily="34" charset="-120"/>
+              </a:rPr>
+              <a:t>The instrument that records earthquakes is the ______.</a:t>
+            </a:r>
+            <a:endParaRPr lang="en-US" sz="4000" dirty="0"/>
+          </a:p>
+        </p:txBody>
+      </p:sp>
+      <p:sp>
+        <p:nvSpPr>
+          <p:cNvPr id="25" name="Slide Number Placeholder 0"/>
+          <p:cNvSpPr>
+            <a:spLocks noGrp="1"/>
+          </p:cNvSpPr>
+          <p:nvPr>
+            <p:ph type="sldNum" sz="quarter" idx="4294967295"/>
+          </p:nvPr>
+        </p:nvSpPr>
+        <p:spPr>
+          <a:xfrm>
+            <a:off x="27432" y="91440"/>
+            <a:ext cx="585216" cy="475488"/>
+          </a:xfrm>
+          <a:prstGeom prst="rect">
+            <a:avLst/>
+          </a:prstGeom>
+          <a:extLst>
+            <a:ext uri="{C572A759-6A51-4108-AA02-DFA0A04FC94B}">
+              <ma14:wrappingTextBoxFlag xmlns:ma14="http://schemas.microsoft.com/office/mac/drawingml/2011/main" val="0"/>
+            </a:ext>
+          </a:extLst>
+        </p:spPr>
+        <p:txBody>
+          <a:bodyPr/>
+          <a:lstStyle>
+            <a:lvl1pPr>
+              <a:defRPr sz="2000">
+                <a:solidFill>
+                  <a:srgbClr val="FFFFFF"/>
+                </a:solidFill>
+                <a:latin typeface="Calibri"/>
+                <a:ea typeface="Calibri"/>
+                <a:cs typeface="Calibri"/>
+              </a:defRPr>
+            </a:lvl1pPr>
+          </a:lstStyle>
+          <a:p>
+            <a:pPr algn="ctr"/>
+            <a:fld id="{F7021451-1387-4CA6-816F-3879F97B5CBC}" type="slidenum">
+              <a:rPr b="1" lang="en-US"/>
+              <a:t>49</a:t>
+            </a:fld>
+            <a:endParaRPr lang="en-US"/>
+          </a:p>
+        </p:txBody>
+      </p:sp>
+    </p:spTree>
+  </p:cSld>
+  <p:clrMapOvr>
+    <a:masterClrMapping/>
+  </p:clrMapOvr>
+</p:sld>
+</file>
+
+<file path=ppt/slides/slide5.xml><?xml version="1.0" encoding="utf-8"?>
+<p:sld xmlns:a="http://schemas.openxmlformats.org/drawingml/2006/main" xmlns:r="http://schemas.openxmlformats.org/officeDocument/2006/relationships" xmlns:p="http://schemas.openxmlformats.org/presentationml/2006/main">
+  <p:cSld name="Slide 5">
+    <p:spTree>
+      <p:nvGrpSpPr>
+        <p:cNvPr id="1" name=""/>
+        <p:cNvGrpSpPr/>
+        <p:nvPr/>
+      </p:nvGrpSpPr>
+      <p:grpSpPr>
+        <a:xfrm>
+          <a:off x="0" y="0"/>
+          <a:ext cx="0" cy="0"/>
+          <a:chOff x="0" y="0"/>
+          <a:chExt cx="0" cy="0"/>
+        </a:xfrm>
+      </p:grpSpPr>
+      <p:sp>
+        <p:nvSpPr>
+          <p:cNvPr id="2" name="Text 0"/>
+          <p:cNvSpPr/>
+          <p:nvPr/>
+        </p:nvSpPr>
+        <p:spPr>
+          <a:xfrm>
+            <a:off x="457200" y="713232"/>
+            <a:ext cx="11368735" cy="274320"/>
+          </a:xfrm>
+          <a:prstGeom prst="rect">
+            <a:avLst/>
+          </a:prstGeom>
+          <a:noFill/>
+          <a:ln/>
+        </p:spPr>
+        <p:txBody>
+          <a:bodyPr wrap="square" lIns="0" tIns="0" rIns="0" bIns="0" rtlCol="0" anchor="ctr"/>
+          <a:lstStyle/>
+          <a:p>
+            <a:pPr algn="r" indent="0" marL="0">
+              <a:buNone/>
+            </a:pPr>
+            <a:r>
+              <a:rPr lang="en-US" sz="1400" b="1" dirty="0">
+                <a:solidFill>
+                  <a:srgbClr val="1C3F6E"/>
+                </a:solidFill>
+                <a:latin typeface="Calibri" pitchFamily="34" charset="0"/>
+                <a:ea typeface="Calibri" pitchFamily="34" charset="-122"/>
+                <a:cs typeface="Calibri" pitchFamily="34" charset="-120"/>
+              </a:rPr>
+              <a:t>HOMEWORK CORRECTION</a:t>
+            </a:r>
+            <a:endParaRPr lang="en-US" sz="1400" dirty="0"/>
+          </a:p>
+        </p:txBody>
+      </p:sp>
+      <p:pic>
+        <p:nvPicPr>
+          <p:cNvPr id="3" name="Image 0" descr="/home/claude/f4/img/minesec_sheet.png">    </p:cNvPr>
+          <p:cNvPicPr>
+            <a:picLocks noChangeAspect="1"/>
+          </p:cNvPicPr>
+          <p:nvPr/>
+        </p:nvPicPr>
+        <p:blipFill>
+          <a:blip r:embed="rId1"/>
+          <a:stretch>
+            <a:fillRect/>
+          </a:stretch>
+        </p:blipFill>
+        <p:spPr>
+          <a:xfrm>
+            <a:off x="0" y="658368"/>
+            <a:ext cx="5120640" cy="5833872"/>
+          </a:xfrm>
+          <a:prstGeom prst="rect">
+            <a:avLst/>
+          </a:prstGeom>
+        </p:spPr>
+      </p:pic>
+      <p:sp>
+        <p:nvSpPr>
+          <p:cNvPr id="4" name="Text 1"/>
+          <p:cNvSpPr/>
+          <p:nvPr/>
+        </p:nvSpPr>
+        <p:spPr>
+          <a:xfrm>
+            <a:off x="5349240" y="1005840"/>
+            <a:ext cx="6522415" cy="731520"/>
+          </a:xfrm>
+          <a:prstGeom prst="rect">
+            <a:avLst/>
+          </a:prstGeom>
+          <a:noFill/>
+          <a:ln/>
+        </p:spPr>
+        <p:txBody>
+          <a:bodyPr wrap="square" lIns="0" tIns="0" rIns="0" bIns="0" rtlCol="0" anchor="ctr">
+            <a:normAutofit/>
+          </a:bodyPr>
+          <a:lstStyle/>
+          <a:p>
+            <a:pPr algn="ctr" indent="0" marL="0">
+              <a:buNone/>
+            </a:pPr>
+            <a:r>
+              <a:rPr lang="en-US" sz="3600" b="1" dirty="0">
+                <a:solidFill>
+                  <a:srgbClr val="990011"/>
+                </a:solidFill>
+                <a:latin typeface="Times New Roman" pitchFamily="34" charset="0"/>
+                <a:ea typeface="Times New Roman" pitchFamily="34" charset="-122"/>
+                <a:cs typeface="Times New Roman" pitchFamily="34" charset="-120"/>
+              </a:rPr>
+              <a:t>Correction: Possible Answer</a:t>
+            </a:r>
+            <a:endParaRPr lang="en-US" sz="3600" dirty="0"/>
+          </a:p>
+        </p:txBody>
+      </p:sp>
+      <p:sp>
+        <p:nvSpPr>
+          <p:cNvPr id="5" name="Text 2"/>
+          <p:cNvSpPr/>
+          <p:nvPr/>
+        </p:nvSpPr>
+        <p:spPr>
+          <a:xfrm>
+            <a:off x="5349240" y="1783080"/>
+            <a:ext cx="6522415" cy="4663440"/>
+          </a:xfrm>
+          <a:prstGeom prst="rect">
+            <a:avLst/>
+          </a:prstGeom>
+          <a:noFill/>
+          <a:ln/>
+        </p:spPr>
+        <p:txBody>
+          <a:bodyPr wrap="square" lIns="0" tIns="0" rIns="0" bIns="0" rtlCol="0" anchor="t"/>
+          <a:lstStyle/>
+          <a:p>
+            <a:pPr algn="l" indent="0" marL="0">
+              <a:spcAft>
+                <a:spcPts val="800"/>
+              </a:spcAft>
+              <a:buNone/>
+            </a:pPr>
+            <a:r>
+              <a:rPr lang="en-US" sz="4000" dirty="0">
+                <a:solidFill>
+                  <a:srgbClr val="111111"/>
+                </a:solidFill>
+                <a:latin typeface="Times New Roman" pitchFamily="34" charset="0"/>
+                <a:ea typeface="Times New Roman" pitchFamily="34" charset="-122"/>
+                <a:cs typeface="Times New Roman" pitchFamily="34" charset="-120"/>
+              </a:rPr>
+              <a:t>Answers vary. Example: in Buea, people felt the ground shake for a few seconds during the eruption of 1999; windows rattled and people ran outside.</a:t>
+            </a:r>
+            <a:endParaRPr lang="en-US" sz="4000" dirty="0"/>
+          </a:p>
+        </p:txBody>
+      </p:sp>
+      <p:sp>
+        <p:nvSpPr>
+          <p:cNvPr id="25" name="Slide Number Placeholder 0"/>
+          <p:cNvSpPr>
+            <a:spLocks noGrp="1"/>
+          </p:cNvSpPr>
+          <p:nvPr>
+            <p:ph type="sldNum" sz="quarter" idx="4294967295"/>
+          </p:nvPr>
+        </p:nvSpPr>
+        <p:spPr>
+          <a:xfrm>
+            <a:off x="27432" y="91440"/>
+            <a:ext cx="585216" cy="475488"/>
+          </a:xfrm>
+          <a:prstGeom prst="rect">
+            <a:avLst/>
+          </a:prstGeom>
+          <a:extLst>
+            <a:ext uri="{C572A759-6A51-4108-AA02-DFA0A04FC94B}">
+              <ma14:wrappingTextBoxFlag xmlns:ma14="http://schemas.microsoft.com/office/mac/drawingml/2011/main" val="0"/>
+            </a:ext>
+          </a:extLst>
+        </p:spPr>
+        <p:txBody>
+          <a:bodyPr/>
+          <a:lstStyle>
+            <a:lvl1pPr>
+              <a:defRPr sz="2000">
+                <a:solidFill>
+                  <a:srgbClr val="FFFFFF"/>
+                </a:solidFill>
+                <a:latin typeface="Calibri"/>
+                <a:ea typeface="Calibri"/>
+                <a:cs typeface="Calibri"/>
+              </a:defRPr>
+            </a:lvl1pPr>
+          </a:lstStyle>
+          <a:p>
+            <a:pPr algn="ctr"/>
+            <a:fld id="{F7021451-1387-4CA6-816F-3879F97B5CBC}" type="slidenum">
+              <a:rPr b="1" lang="en-US"/>
+              <a:t>5</a:t>
+            </a:fld>
+            <a:endParaRPr lang="en-US"/>
+          </a:p>
+        </p:txBody>
+      </p:sp>
+    </p:spTree>
+  </p:cSld>
+  <p:clrMapOvr>
+    <a:masterClrMapping/>
+  </p:clrMapOvr>
+</p:sld>
+</file>
+
+<file path=ppt/slides/slide50.xml><?xml version="1.0" encoding="utf-8"?>
+<p:sld xmlns:a="http://schemas.openxmlformats.org/drawingml/2006/main" xmlns:r="http://schemas.openxmlformats.org/officeDocument/2006/relationships" xmlns:p="http://schemas.openxmlformats.org/presentationml/2006/main">
+  <p:cSld name="Slide 50">
+    <p:spTree>
+      <p:nvGrpSpPr>
+        <p:cNvPr id="1" name=""/>
+        <p:cNvGrpSpPr/>
+        <p:nvPr/>
+      </p:nvGrpSpPr>
+      <p:grpSpPr>
+        <a:xfrm>
+          <a:off x="0" y="0"/>
+          <a:ext cx="0" cy="0"/>
+          <a:chOff x="0" y="0"/>
+          <a:chExt cx="0" cy="0"/>
+        </a:xfrm>
+      </p:grpSpPr>
+      <p:sp>
+        <p:nvSpPr>
+          <p:cNvPr id="2" name="Text 0"/>
+          <p:cNvSpPr/>
+          <p:nvPr/>
+        </p:nvSpPr>
+        <p:spPr>
+          <a:xfrm>
+            <a:off x="457200" y="713232"/>
+            <a:ext cx="11368735" cy="274320"/>
+          </a:xfrm>
+          <a:prstGeom prst="rect">
+            <a:avLst/>
+          </a:prstGeom>
+          <a:noFill/>
+          <a:ln/>
+        </p:spPr>
+        <p:txBody>
+          <a:bodyPr wrap="square" lIns="0" tIns="0" rIns="0" bIns="0" rtlCol="0" anchor="ctr"/>
+          <a:lstStyle/>
+          <a:p>
+            <a:pPr algn="r" indent="0" marL="0">
+              <a:buNone/>
+            </a:pPr>
+            <a:r>
+              <a:rPr lang="en-US" sz="1400" b="1" dirty="0">
+                <a:solidFill>
+                  <a:srgbClr val="1C3F6E"/>
+                </a:solidFill>
+                <a:latin typeface="Calibri" pitchFamily="34" charset="0"/>
+                <a:ea typeface="Calibri" pitchFamily="34" charset="-122"/>
+                <a:cs typeface="Calibri" pitchFamily="34" charset="-120"/>
+              </a:rPr>
+              <a:t>REMEDIATION</a:t>
+            </a:r>
+            <a:endParaRPr lang="en-US" sz="1400" dirty="0"/>
+          </a:p>
+        </p:txBody>
+      </p:sp>
+      <p:pic>
+        <p:nvPicPr>
+          <p:cNvPr id="3" name="Image 0" descr="/home/claude/f4/img/minesec_sheet.png">    </p:cNvPr>
+          <p:cNvPicPr>
+            <a:picLocks noChangeAspect="1"/>
+          </p:cNvPicPr>
+          <p:nvPr/>
+        </p:nvPicPr>
+        <p:blipFill>
+          <a:blip r:embed="rId1"/>
+          <a:stretch>
+            <a:fillRect/>
+          </a:stretch>
+        </p:blipFill>
+        <p:spPr>
+          <a:xfrm>
+            <a:off x="0" y="658368"/>
+            <a:ext cx="5120640" cy="5833872"/>
+          </a:xfrm>
+          <a:prstGeom prst="rect">
+            <a:avLst/>
+          </a:prstGeom>
+        </p:spPr>
+      </p:pic>
+      <p:sp>
+        <p:nvSpPr>
+          <p:cNvPr id="4" name="Text 1"/>
+          <p:cNvSpPr/>
+          <p:nvPr/>
+        </p:nvSpPr>
+        <p:spPr>
+          <a:xfrm>
+            <a:off x="5349240" y="1005840"/>
+            <a:ext cx="6522415" cy="731520"/>
+          </a:xfrm>
+          <a:prstGeom prst="rect">
+            <a:avLst/>
+          </a:prstGeom>
+          <a:noFill/>
+          <a:ln/>
+        </p:spPr>
+        <p:txBody>
+          <a:bodyPr wrap="square" lIns="0" tIns="0" rIns="0" bIns="0" rtlCol="0" anchor="ctr">
+            <a:normAutofit/>
+          </a:bodyPr>
+          <a:lstStyle/>
+          <a:p>
+            <a:pPr algn="ctr" indent="0" marL="0">
+              <a:buNone/>
+            </a:pPr>
+            <a:r>
+              <a:rPr lang="en-US" sz="3600" b="1" dirty="0">
+                <a:solidFill>
+                  <a:srgbClr val="990011"/>
+                </a:solidFill>
+                <a:latin typeface="Times New Roman" pitchFamily="34" charset="0"/>
+                <a:ea typeface="Times New Roman" pitchFamily="34" charset="-122"/>
+                <a:cs typeface="Times New Roman" pitchFamily="34" charset="-120"/>
+              </a:rPr>
+              <a:t>Remediation (continued)</a:t>
+            </a:r>
+            <a:endParaRPr lang="en-US" sz="3600" dirty="0"/>
+          </a:p>
+        </p:txBody>
+      </p:sp>
+      <p:sp>
+        <p:nvSpPr>
+          <p:cNvPr id="5" name="Text 2"/>
+          <p:cNvSpPr/>
+          <p:nvPr/>
+        </p:nvSpPr>
+        <p:spPr>
+          <a:xfrm>
+            <a:off x="5349240" y="1783080"/>
+            <a:ext cx="6522415" cy="4663440"/>
+          </a:xfrm>
+          <a:prstGeom prst="rect">
+            <a:avLst/>
+          </a:prstGeom>
+          <a:noFill/>
+          <a:ln/>
+        </p:spPr>
+        <p:txBody>
+          <a:bodyPr wrap="square" lIns="0" tIns="0" rIns="0" bIns="0" rtlCol="0" anchor="t"/>
+          <a:lstStyle/>
+          <a:p>
+            <a:pPr algn="l" marL="342900" indent="-342900">
+              <a:spcAft>
+                <a:spcPts val="800"/>
+              </a:spcAft>
+              <a:buSzPct val="100000"/>
+              <a:buFont typeface="+mj-lt"/>
+              <a:buAutoNum type="arabicPeriod" startAt="1"/>
+            </a:pPr>
+            <a:r>
+              <a:rPr lang="en-US" sz="4000" dirty="0">
+                <a:solidFill>
+                  <a:srgbClr val="111111"/>
+                </a:solidFill>
+                <a:latin typeface="Times New Roman" pitchFamily="34" charset="0"/>
+                <a:ea typeface="Times New Roman" pitchFamily="34" charset="-122"/>
+                <a:cs typeface="Times New Roman" pitchFamily="34" charset="-120"/>
+              </a:rPr>
+              <a:t>The point under the ground where it starts is the ______.</a:t>
+            </a:r>
+            <a:endParaRPr lang="en-US" sz="4000" dirty="0"/>
+          </a:p>
+        </p:txBody>
+      </p:sp>
+      <p:sp>
+        <p:nvSpPr>
+          <p:cNvPr id="25" name="Slide Number Placeholder 0"/>
+          <p:cNvSpPr>
+            <a:spLocks noGrp="1"/>
+          </p:cNvSpPr>
+          <p:nvPr>
+            <p:ph type="sldNum" sz="quarter" idx="4294967295"/>
+          </p:nvPr>
+        </p:nvSpPr>
+        <p:spPr>
+          <a:xfrm>
+            <a:off x="27432" y="91440"/>
+            <a:ext cx="585216" cy="475488"/>
+          </a:xfrm>
+          <a:prstGeom prst="rect">
+            <a:avLst/>
+          </a:prstGeom>
+          <a:extLst>
+            <a:ext uri="{C572A759-6A51-4108-AA02-DFA0A04FC94B}">
+              <ma14:wrappingTextBoxFlag xmlns:ma14="http://schemas.microsoft.com/office/mac/drawingml/2011/main" val="0"/>
+            </a:ext>
+          </a:extLst>
+        </p:spPr>
+        <p:txBody>
+          <a:bodyPr/>
+          <a:lstStyle>
+            <a:lvl1pPr>
+              <a:defRPr sz="2000">
+                <a:solidFill>
+                  <a:srgbClr val="FFFFFF"/>
+                </a:solidFill>
+                <a:latin typeface="Calibri"/>
+                <a:ea typeface="Calibri"/>
+                <a:cs typeface="Calibri"/>
+              </a:defRPr>
+            </a:lvl1pPr>
+          </a:lstStyle>
+          <a:p>
+            <a:pPr algn="ctr"/>
+            <a:fld id="{F7021451-1387-4CA6-816F-3879F97B5CBC}" type="slidenum">
+              <a:rPr b="1" lang="en-US"/>
+              <a:t>50</a:t>
+            </a:fld>
+            <a:endParaRPr lang="en-US"/>
+          </a:p>
+        </p:txBody>
+      </p:sp>
+    </p:spTree>
+  </p:cSld>
+  <p:clrMapOvr>
+    <a:masterClrMapping/>
+  </p:clrMapOvr>
+</p:sld>
+</file>
+
+<file path=ppt/slides/slide51.xml><?xml version="1.0" encoding="utf-8"?>
+<p:sld xmlns:a="http://schemas.openxmlformats.org/drawingml/2006/main" xmlns:r="http://schemas.openxmlformats.org/officeDocument/2006/relationships" xmlns:p="http://schemas.openxmlformats.org/presentationml/2006/main">
+  <p:cSld name="Slide 51">
+    <p:spTree>
+      <p:nvGrpSpPr>
+        <p:cNvPr id="1" name=""/>
+        <p:cNvGrpSpPr/>
+        <p:nvPr/>
+      </p:nvGrpSpPr>
+      <p:grpSpPr>
+        <a:xfrm>
+          <a:off x="0" y="0"/>
+          <a:ext cx="0" cy="0"/>
+          <a:chOff x="0" y="0"/>
+          <a:chExt cx="0" cy="0"/>
+        </a:xfrm>
+      </p:grpSpPr>
+      <p:sp>
+        <p:nvSpPr>
+          <p:cNvPr id="2" name="Text 0"/>
+          <p:cNvSpPr/>
+          <p:nvPr/>
+        </p:nvSpPr>
+        <p:spPr>
+          <a:xfrm>
+            <a:off x="457200" y="713232"/>
+            <a:ext cx="11368735" cy="274320"/>
+          </a:xfrm>
+          <a:prstGeom prst="rect">
+            <a:avLst/>
+          </a:prstGeom>
+          <a:noFill/>
+          <a:ln/>
+        </p:spPr>
+        <p:txBody>
+          <a:bodyPr wrap="square" lIns="0" tIns="0" rIns="0" bIns="0" rtlCol="0" anchor="ctr"/>
+          <a:lstStyle/>
+          <a:p>
+            <a:pPr algn="r" indent="0" marL="0">
+              <a:buNone/>
+            </a:pPr>
+            <a:r>
+              <a:rPr lang="en-US" sz="1400" b="1" dirty="0">
+                <a:solidFill>
+                  <a:srgbClr val="1C3F6E"/>
+                </a:solidFill>
+                <a:latin typeface="Calibri" pitchFamily="34" charset="0"/>
+                <a:ea typeface="Calibri" pitchFamily="34" charset="-122"/>
+                <a:cs typeface="Calibri" pitchFamily="34" charset="-120"/>
+              </a:rPr>
+              <a:t>HOMEWORK</a:t>
+            </a:r>
+            <a:endParaRPr lang="en-US" sz="1400" dirty="0"/>
+          </a:p>
+        </p:txBody>
+      </p:sp>
+      <p:pic>
+        <p:nvPicPr>
+          <p:cNvPr id="3" name="Image 0" descr="/home/claude/f4/img/minesec_sheet.png">    </p:cNvPr>
+          <p:cNvPicPr>
+            <a:picLocks noChangeAspect="1"/>
+          </p:cNvPicPr>
+          <p:nvPr/>
+        </p:nvPicPr>
+        <p:blipFill>
+          <a:blip r:embed="rId1"/>
+          <a:stretch>
+            <a:fillRect/>
+          </a:stretch>
+        </p:blipFill>
+        <p:spPr>
+          <a:xfrm>
+            <a:off x="0" y="658368"/>
+            <a:ext cx="5120640" cy="5833872"/>
+          </a:xfrm>
+          <a:prstGeom prst="rect">
+            <a:avLst/>
+          </a:prstGeom>
+        </p:spPr>
+      </p:pic>
+      <p:sp>
+        <p:nvSpPr>
+          <p:cNvPr id="4" name="Text 1"/>
+          <p:cNvSpPr/>
+          <p:nvPr/>
+        </p:nvSpPr>
+        <p:spPr>
+          <a:xfrm>
+            <a:off x="5349240" y="1005840"/>
+            <a:ext cx="6522415" cy="731520"/>
+          </a:xfrm>
+          <a:prstGeom prst="rect">
+            <a:avLst/>
+          </a:prstGeom>
+          <a:noFill/>
+          <a:ln/>
+        </p:spPr>
+        <p:txBody>
+          <a:bodyPr wrap="square" lIns="0" tIns="0" rIns="0" bIns="0" rtlCol="0" anchor="ctr">
+            <a:normAutofit/>
+          </a:bodyPr>
+          <a:lstStyle/>
+          <a:p>
+            <a:pPr algn="ctr" indent="0" marL="0">
+              <a:buNone/>
+            </a:pPr>
+            <a:r>
+              <a:rPr lang="en-US" sz="3600" b="1" dirty="0">
+                <a:solidFill>
+                  <a:srgbClr val="990011"/>
+                </a:solidFill>
+                <a:latin typeface="Times New Roman" pitchFamily="34" charset="0"/>
+                <a:ea typeface="Times New Roman" pitchFamily="34" charset="-122"/>
+                <a:cs typeface="Times New Roman" pitchFamily="34" charset="-120"/>
+              </a:rPr>
+              <a:t>Homework</a:t>
+            </a:r>
+            <a:endParaRPr lang="en-US" sz="3600" dirty="0"/>
+          </a:p>
+        </p:txBody>
+      </p:sp>
+      <p:sp>
+        <p:nvSpPr>
+          <p:cNvPr id="5" name="Text 2"/>
+          <p:cNvSpPr/>
+          <p:nvPr/>
+        </p:nvSpPr>
+        <p:spPr>
+          <a:xfrm>
+            <a:off x="5349240" y="1783080"/>
+            <a:ext cx="6522415" cy="4663440"/>
+          </a:xfrm>
+          <a:prstGeom prst="rect">
+            <a:avLst/>
+          </a:prstGeom>
+          <a:noFill/>
+          <a:ln/>
+        </p:spPr>
+        <p:txBody>
+          <a:bodyPr wrap="square" lIns="0" tIns="0" rIns="0" bIns="0" rtlCol="0" anchor="t"/>
+          <a:lstStyle/>
+          <a:p>
+            <a:pPr algn="l" indent="0" marL="0">
+              <a:spcAft>
+                <a:spcPts val="800"/>
+              </a:spcAft>
+              <a:buNone/>
+            </a:pPr>
+            <a:r>
+              <a:rPr lang="en-US" sz="4000" dirty="0">
+                <a:solidFill>
+                  <a:srgbClr val="111111"/>
+                </a:solidFill>
+                <a:latin typeface="Times New Roman" pitchFamily="34" charset="0"/>
+                <a:ea typeface="Times New Roman" pitchFamily="34" charset="-122"/>
+                <a:cs typeface="Times New Roman" pitchFamily="34" charset="-120"/>
+              </a:rPr>
+              <a:t>After the next rain, look at the side of a road or a slope. Write what the running water did to the soil, and where the soil went.</a:t>
+            </a:r>
+            <a:endParaRPr lang="en-US" sz="4000" dirty="0"/>
+          </a:p>
+        </p:txBody>
+      </p:sp>
+      <p:sp>
+        <p:nvSpPr>
+          <p:cNvPr id="25" name="Slide Number Placeholder 0"/>
+          <p:cNvSpPr>
+            <a:spLocks noGrp="1"/>
+          </p:cNvSpPr>
+          <p:nvPr>
+            <p:ph type="sldNum" sz="quarter" idx="4294967295"/>
+          </p:nvPr>
+        </p:nvSpPr>
+        <p:spPr>
+          <a:xfrm>
+            <a:off x="27432" y="91440"/>
+            <a:ext cx="585216" cy="475488"/>
+          </a:xfrm>
+          <a:prstGeom prst="rect">
+            <a:avLst/>
+          </a:prstGeom>
+          <a:extLst>
+            <a:ext uri="{C572A759-6A51-4108-AA02-DFA0A04FC94B}">
+              <ma14:wrappingTextBoxFlag xmlns:ma14="http://schemas.microsoft.com/office/mac/drawingml/2011/main" val="0"/>
+            </a:ext>
+          </a:extLst>
+        </p:spPr>
+        <p:txBody>
+          <a:bodyPr/>
+          <a:lstStyle>
+            <a:lvl1pPr>
+              <a:defRPr sz="2000">
+                <a:solidFill>
+                  <a:srgbClr val="FFFFFF"/>
+                </a:solidFill>
+                <a:latin typeface="Calibri"/>
+                <a:ea typeface="Calibri"/>
+                <a:cs typeface="Calibri"/>
+              </a:defRPr>
+            </a:lvl1pPr>
+          </a:lstStyle>
+          <a:p>
+            <a:pPr algn="ctr"/>
+            <a:fld id="{F7021451-1387-4CA6-816F-3879F97B5CBC}" type="slidenum">
+              <a:rPr b="1" lang="en-US"/>
+              <a:t>51</a:t>
+            </a:fld>
+            <a:endParaRPr lang="en-US"/>
+          </a:p>
+        </p:txBody>
+      </p:sp>
+    </p:spTree>
+  </p:cSld>
+  <p:clrMapOvr>
+    <a:masterClrMapping/>
+  </p:clrMapOvr>
+</p:sld>
+</file>
+
+<file path=ppt/slides/slide52.xml><?xml version="1.0" encoding="utf-8"?>
+<p:sld xmlns:a="http://schemas.openxmlformats.org/drawingml/2006/main" xmlns:r="http://schemas.openxmlformats.org/officeDocument/2006/relationships" xmlns:p="http://schemas.openxmlformats.org/presentationml/2006/main">
+  <p:cSld name="Slide 52">
+    <p:spTree>
+      <p:nvGrpSpPr>
+        <p:cNvPr id="1" name=""/>
+        <p:cNvGrpSpPr/>
+        <p:nvPr/>
+      </p:nvGrpSpPr>
+      <p:grpSpPr>
+        <a:xfrm>
+          <a:off x="0" y="0"/>
+          <a:ext cx="0" cy="0"/>
+          <a:chOff x="0" y="0"/>
+          <a:chExt cx="0" cy="0"/>
+        </a:xfrm>
+      </p:grpSpPr>
+      <p:sp>
+        <p:nvSpPr>
+          <p:cNvPr id="2" name="Text 0"/>
+          <p:cNvSpPr/>
+          <p:nvPr/>
+        </p:nvSpPr>
+        <p:spPr>
+          <a:xfrm>
+            <a:off x="457200" y="713232"/>
+            <a:ext cx="11368735" cy="274320"/>
+          </a:xfrm>
+          <a:prstGeom prst="rect">
+            <a:avLst/>
+          </a:prstGeom>
+          <a:noFill/>
+          <a:ln/>
+        </p:spPr>
+        <p:txBody>
+          <a:bodyPr wrap="square" lIns="0" tIns="0" rIns="0" bIns="0" rtlCol="0" anchor="ctr"/>
+          <a:lstStyle/>
+          <a:p>
+            <a:pPr algn="r" indent="0" marL="0">
+              <a:buNone/>
+            </a:pPr>
+            <a:r>
+              <a:rPr lang="en-US" sz="1400" b="1" dirty="0">
+                <a:solidFill>
+                  <a:srgbClr val="1C3F6E"/>
+                </a:solidFill>
+                <a:latin typeface="Calibri" pitchFamily="34" charset="0"/>
+                <a:ea typeface="Calibri" pitchFamily="34" charset="-122"/>
+                <a:cs typeface="Calibri" pitchFamily="34" charset="-120"/>
+              </a:rPr>
+              <a:t>NEXT LESSON</a:t>
+            </a:r>
+            <a:endParaRPr lang="en-US" sz="1400" dirty="0"/>
+          </a:p>
+        </p:txBody>
+      </p:sp>
+      <p:pic>
+        <p:nvPicPr>
+          <p:cNvPr id="3" name="Image 0" descr="/home/claude/f4/img/minesec_sheet.png">    </p:cNvPr>
+          <p:cNvPicPr>
+            <a:picLocks noChangeAspect="1"/>
+          </p:cNvPicPr>
+          <p:nvPr/>
+        </p:nvPicPr>
+        <p:blipFill>
+          <a:blip r:embed="rId1"/>
+          <a:stretch>
+            <a:fillRect/>
+          </a:stretch>
+        </p:blipFill>
+        <p:spPr>
+          <a:xfrm>
+            <a:off x="0" y="658368"/>
+            <a:ext cx="5120640" cy="5833872"/>
+          </a:xfrm>
+          <a:prstGeom prst="rect">
+            <a:avLst/>
+          </a:prstGeom>
+        </p:spPr>
+      </p:pic>
+      <p:sp>
+        <p:nvSpPr>
+          <p:cNvPr id="4" name="Text 1"/>
+          <p:cNvSpPr/>
+          <p:nvPr/>
+        </p:nvSpPr>
+        <p:spPr>
+          <a:xfrm>
+            <a:off x="5349240" y="1005840"/>
+            <a:ext cx="6522415" cy="731520"/>
+          </a:xfrm>
+          <a:prstGeom prst="rect">
+            <a:avLst/>
+          </a:prstGeom>
+          <a:noFill/>
+          <a:ln/>
+        </p:spPr>
+        <p:txBody>
+          <a:bodyPr wrap="square" lIns="0" tIns="0" rIns="0" bIns="0" rtlCol="0" anchor="ctr">
+            <a:normAutofit/>
+          </a:bodyPr>
+          <a:lstStyle/>
+          <a:p>
+            <a:pPr algn="ctr" indent="0" marL="0">
+              <a:buNone/>
+            </a:pPr>
+            <a:r>
+              <a:rPr lang="en-US" sz="3600" b="1" dirty="0">
+                <a:solidFill>
+                  <a:srgbClr val="990011"/>
+                </a:solidFill>
+                <a:latin typeface="Times New Roman" pitchFamily="34" charset="0"/>
+                <a:ea typeface="Times New Roman" pitchFamily="34" charset="-122"/>
+                <a:cs typeface="Times New Roman" pitchFamily="34" charset="-120"/>
+              </a:rPr>
+              <a:t>Next Lesson</a:t>
+            </a:r>
+            <a:endParaRPr lang="en-US" sz="3600" dirty="0"/>
+          </a:p>
+        </p:txBody>
+      </p:sp>
+      <p:sp>
+        <p:nvSpPr>
+          <p:cNvPr id="5" name="Text 2"/>
+          <p:cNvSpPr/>
+          <p:nvPr/>
+        </p:nvSpPr>
+        <p:spPr>
+          <a:xfrm>
+            <a:off x="5349240" y="1783080"/>
+            <a:ext cx="6522415" cy="4663440"/>
+          </a:xfrm>
+          <a:prstGeom prst="rect">
+            <a:avLst/>
+          </a:prstGeom>
+          <a:noFill/>
+          <a:ln/>
+        </p:spPr>
+        <p:txBody>
+          <a:bodyPr wrap="square" lIns="0" tIns="0" rIns="0" bIns="0" rtlCol="0" anchor="ctr"/>
+          <a:lstStyle/>
+          <a:p>
+            <a:pPr algn="ctr" indent="0" marL="0">
+              <a:spcAft>
+                <a:spcPts val="800"/>
+              </a:spcAft>
+              <a:buNone/>
+            </a:pPr>
+            <a:r>
+              <a:rPr lang="en-US" sz="4000" b="1" dirty="0">
+                <a:solidFill>
+                  <a:srgbClr val="111111"/>
+                </a:solidFill>
+                <a:latin typeface="Times New Roman" pitchFamily="34" charset="0"/>
+                <a:ea typeface="Times New Roman" pitchFamily="34" charset="-122"/>
+                <a:cs typeface="Times New Roman" pitchFamily="34" charset="-120"/>
+              </a:rPr>
+              <a:t>Our next lesson will be on:</a:t>
+            </a:r>
+            <a:endParaRPr lang="en-US" sz="4000" dirty="0"/>
+          </a:p>
+          <a:p>
+            <a:pPr algn="ctr" indent="0" marL="0">
+              <a:spcAft>
+                <a:spcPts val="800"/>
+              </a:spcAft>
+              <a:buNone/>
+            </a:pPr>
+            <a:r>
+              <a:rPr lang="en-US" sz="4000" b="1" dirty="0">
+                <a:solidFill>
+                  <a:srgbClr val="990011"/>
+                </a:solidFill>
+                <a:latin typeface="Times New Roman" pitchFamily="34" charset="0"/>
+                <a:ea typeface="Times New Roman" pitchFamily="34" charset="-122"/>
+                <a:cs typeface="Times New Roman" pitchFamily="34" charset="-120"/>
+              </a:rPr>
+              <a:t>Lesson 14: Denudation</a:t>
+            </a:r>
+            <a:endParaRPr lang="en-US" sz="4000" dirty="0"/>
+          </a:p>
+        </p:txBody>
+      </p:sp>
+      <p:sp>
+        <p:nvSpPr>
+          <p:cNvPr id="25" name="Slide Number Placeholder 0"/>
+          <p:cNvSpPr>
+            <a:spLocks noGrp="1"/>
+          </p:cNvSpPr>
+          <p:nvPr>
+            <p:ph type="sldNum" sz="quarter" idx="4294967295"/>
+          </p:nvPr>
+        </p:nvSpPr>
+        <p:spPr>
+          <a:xfrm>
+            <a:off x="27432" y="91440"/>
+            <a:ext cx="585216" cy="475488"/>
+          </a:xfrm>
+          <a:prstGeom prst="rect">
+            <a:avLst/>
+          </a:prstGeom>
+          <a:extLst>
+            <a:ext uri="{C572A759-6A51-4108-AA02-DFA0A04FC94B}">
+              <ma14:wrappingTextBoxFlag xmlns:ma14="http://schemas.microsoft.com/office/mac/drawingml/2011/main" val="0"/>
+            </a:ext>
+          </a:extLst>
+        </p:spPr>
+        <p:txBody>
+          <a:bodyPr/>
+          <a:lstStyle>
+            <a:lvl1pPr>
+              <a:defRPr sz="2000">
+                <a:solidFill>
+                  <a:srgbClr val="FFFFFF"/>
+                </a:solidFill>
+                <a:latin typeface="Calibri"/>
+                <a:ea typeface="Calibri"/>
+                <a:cs typeface="Calibri"/>
+              </a:defRPr>
+            </a:lvl1pPr>
+          </a:lstStyle>
+          <a:p>
+            <a:pPr algn="ctr"/>
+            <a:fld id="{F7021451-1387-4CA6-816F-3879F97B5CBC}" type="slidenum">
+              <a:rPr b="1" lang="en-US"/>
+              <a:t>52</a:t>
+            </a:fld>
+            <a:endParaRPr lang="en-US"/>
+          </a:p>
+        </p:txBody>
+      </p:sp>
+    </p:spTree>
+  </p:cSld>
+  <p:clrMapOvr>
+    <a:masterClrMapping/>
+  </p:clrMapOvr>
+</p:sld>
+</file>
+
+<file path=ppt/slides/slide53.xml><?xml version="1.0" encoding="utf-8"?>
+<p:sld xmlns:a="http://schemas.openxmlformats.org/drawingml/2006/main" xmlns:r="http://schemas.openxmlformats.org/officeDocument/2006/relationships" xmlns:p="http://schemas.openxmlformats.org/presentationml/2006/main">
+  <p:cSld name="Slide 53">
+    <p:spTree>
+      <p:nvGrpSpPr>
+        <p:cNvPr id="1" name=""/>
+        <p:cNvGrpSpPr/>
+        <p:nvPr/>
+      </p:nvGrpSpPr>
+      <p:grpSpPr>
+        <a:xfrm>
+          <a:off x="0" y="0"/>
+          <a:ext cx="0" cy="0"/>
+          <a:chOff x="0" y="0"/>
+          <a:chExt cx="0" cy="0"/>
+        </a:xfrm>
+      </p:grpSpPr>
+      <p:sp>
+        <p:nvSpPr>
+          <p:cNvPr id="2" name="Text 0"/>
+          <p:cNvSpPr/>
+          <p:nvPr/>
+        </p:nvSpPr>
+        <p:spPr>
+          <a:xfrm>
+            <a:off x="457200" y="713232"/>
+            <a:ext cx="11368735" cy="274320"/>
+          </a:xfrm>
+          <a:prstGeom prst="rect">
+            <a:avLst/>
+          </a:prstGeom>
+          <a:noFill/>
+          <a:ln/>
+        </p:spPr>
+        <p:txBody>
+          <a:bodyPr wrap="square" lIns="0" tIns="0" rIns="0" bIns="0" rtlCol="0" anchor="ctr"/>
+          <a:lstStyle/>
+          <a:p>
+            <a:pPr algn="r" indent="0" marL="0">
+              <a:buNone/>
+            </a:pPr>
+            <a:r>
+              <a:rPr lang="en-US" sz="1400" b="1" dirty="0">
+                <a:solidFill>
+                  <a:srgbClr val="1C3F6E"/>
+                </a:solidFill>
+                <a:latin typeface="Calibri" pitchFamily="34" charset="0"/>
+                <a:ea typeface="Calibri" pitchFamily="34" charset="-122"/>
+                <a:cs typeface="Calibri" pitchFamily="34" charset="-120"/>
+              </a:rPr>
               <a:t>BILINGUAL GAME</a:t>
             </a:r>
             <a:endParaRPr lang="en-US" sz="1400" dirty="0"/>
@@ -16119,7 +19250,7 @@
       </p:sp>
       <p:graphicFrame>
         <p:nvGraphicFramePr>
-          <p:cNvPr id="46" name="Table 0"/>
+          <p:cNvPr id="54" name="Table 0"/>
           <p:cNvGraphicFramePr>
             <a:graphicFrameLocks noGrp="1"/>
           </p:cNvGraphicFramePr>
@@ -17431,7 +20562,7 @@
             <a:pPr algn="ctr"/>
             <a:fld id="{F7021451-1387-4CA6-816F-3879F97B5CBC}" type="slidenum">
               <a:rPr b="1" lang="en-US"/>
-              <a:t>45</a:t>
+              <a:t>53</a:t>
             </a:fld>
             <a:endParaRPr lang="en-US"/>
           </a:p>
@@ -17445,9 +20576,9 @@
 </p:sld>
 </file>
 
-<file path=ppt/slides/slide46.xml><?xml version="1.0" encoding="utf-8"?>
+<file path=ppt/slides/slide54.xml><?xml version="1.0" encoding="utf-8"?>
 <p:sld xmlns:a="http://schemas.openxmlformats.org/drawingml/2006/main" xmlns:r="http://schemas.openxmlformats.org/officeDocument/2006/relationships" xmlns:p="http://schemas.openxmlformats.org/presentationml/2006/main">
-  <p:cSld name="Slide 46">
+  <p:cSld name="Slide 54">
     <p:spTree>
       <p:nvGrpSpPr>
         <p:cNvPr id="1" name=""/>
@@ -17542,7 +20673,7 @@
       </p:sp>
       <p:graphicFrame>
         <p:nvGraphicFramePr>
-          <p:cNvPr id="47" name="Table 0"/>
+          <p:cNvPr id="55" name="Table 0"/>
           <p:cNvGraphicFramePr>
             <a:graphicFrameLocks noGrp="1"/>
           </p:cNvGraphicFramePr>
@@ -18164,7 +21295,7 @@
             <a:pPr algn="ctr"/>
             <a:fld id="{F7021451-1387-4CA6-816F-3879F97B5CBC}" type="slidenum">
               <a:rPr b="1" lang="en-US"/>
-              <a:t>46</a:t>
+              <a:t>54</a:t>
             </a:fld>
             <a:endParaRPr lang="en-US"/>
           </a:p>
@@ -18178,9 +21309,9 @@
 </p:sld>
 </file>
 
-<file path=ppt/slides/slide47.xml><?xml version="1.0" encoding="utf-8"?>
+<file path=ppt/slides/slide55.xml><?xml version="1.0" encoding="utf-8"?>
 <p:sld xmlns:a="http://schemas.openxmlformats.org/drawingml/2006/main" xmlns:r="http://schemas.openxmlformats.org/officeDocument/2006/relationships" xmlns:p="http://schemas.openxmlformats.org/presentationml/2006/main">
-  <p:cSld name="Slide 47">
+  <p:cSld name="Slide 55">
     <p:spTree>
       <p:nvGrpSpPr>
         <p:cNvPr id="1" name=""/>
@@ -18275,7 +21406,7 @@
       </p:sp>
       <p:graphicFrame>
         <p:nvGraphicFramePr>
-          <p:cNvPr id="48" name="Table 0"/>
+          <p:cNvPr id="56" name="Table 0"/>
           <p:cNvGraphicFramePr>
             <a:graphicFrameLocks noGrp="1"/>
           </p:cNvGraphicFramePr>
@@ -18385,7 +21516,7 @@
                           <a:ea typeface="Calibri" pitchFamily="34" charset="-122"/>
                           <a:cs typeface="Calibri" pitchFamily="34" charset="-120"/>
                         </a:rPr>
-                        <a:t>DEFINITIONS; Causes of Earthquakes; Manifestation and Measurement; Impact and Protection.</a:t>
+                        <a:t>DEFINITIONS; Causes of Earthquakes; Manifestation of Earthquakes; Impact on Man; Adaptation and Mitigation.</a:t>
                       </a:r>
                       <a:endParaRPr lang="en-US" sz="1600" dirty="0">
                         <a:latin typeface="Calibri" charset="0"/>
@@ -19035,7 +22166,7 @@
             <a:pPr algn="ctr"/>
             <a:fld id="{F7021451-1387-4CA6-816F-3879F97B5CBC}" type="slidenum">
               <a:rPr b="1" lang="en-US"/>
-              <a:t>47</a:t>
+              <a:t>55</a:t>
             </a:fld>
             <a:endParaRPr lang="en-US"/>
           </a:p>
@@ -19049,9 +22180,9 @@
 </p:sld>
 </file>
 
-<file path=ppt/slides/slide48.xml><?xml version="1.0" encoding="utf-8"?>
+<file path=ppt/slides/slide56.xml><?xml version="1.0" encoding="utf-8"?>
 <p:sld xmlns:a="http://schemas.openxmlformats.org/drawingml/2006/main" xmlns:r="http://schemas.openxmlformats.org/officeDocument/2006/relationships" xmlns:p="http://schemas.openxmlformats.org/presentationml/2006/main">
-  <p:cSld name="Slide 48">
+  <p:cSld name="Slide 56">
     <p:spTree>
       <p:nvGrpSpPr>
         <p:cNvPr id="1" name=""/>
@@ -19339,7 +22470,7 @@
             <a:pPr algn="ctr"/>
             <a:fld id="{F7021451-1387-4CA6-816F-3879F97B5CBC}" type="slidenum">
               <a:rPr b="1" lang="en-US"/>
-              <a:t>48</a:t>
+              <a:t>56</a:t>
             </a:fld>
             <a:endParaRPr lang="en-US"/>
           </a:p>
@@ -19353,9 +22484,9 @@
 </p:sld>
 </file>
 
-<file path=ppt/slides/slide49.xml><?xml version="1.0" encoding="utf-8"?>
+<file path=ppt/slides/slide57.xml><?xml version="1.0" encoding="utf-8"?>
 <p:sld xmlns:a="http://schemas.openxmlformats.org/drawingml/2006/main" xmlns:r="http://schemas.openxmlformats.org/officeDocument/2006/relationships" xmlns:p="http://schemas.openxmlformats.org/presentationml/2006/main">
-  <p:cSld name="Slide 49">
+  <p:cSld name="Slide 57">
     <p:spTree>
       <p:nvGrpSpPr>
         <p:cNvPr id="1" name=""/>
@@ -19426,7 +22557,7 @@
         <p:spPr>
           <a:xfrm>
             <a:off x="0" y="658368"/>
-            <a:ext cx="3840480" cy="5833872"/>
+            <a:ext cx="2468880" cy="5833872"/>
           </a:xfrm>
           <a:prstGeom prst="rect">
             <a:avLst/>
@@ -19441,8 +22572,8 @@
         </p:nvSpPr>
         <p:spPr>
           <a:xfrm>
-            <a:off x="4069080" y="1005840"/>
-            <a:ext cx="7802575" cy="731520"/>
+            <a:off x="2697480" y="1005840"/>
+            <a:ext cx="9174175" cy="731520"/>
           </a:xfrm>
           <a:prstGeom prst="rect">
             <a:avLst/>
@@ -19482,8 +22613,8 @@
         </p:nvSpPr>
         <p:spPr>
           <a:xfrm>
-            <a:off x="4069080" y="1783080"/>
-            <a:ext cx="7802575" cy="4663440"/>
+            <a:off x="2697480" y="1783080"/>
+            <a:ext cx="9174175" cy="4663440"/>
           </a:xfrm>
           <a:prstGeom prst="rect">
             <a:avLst/>
@@ -19596,6 +22727,27 @@
                 <a:cs typeface="Calibri" pitchFamily="34" charset="-120"/>
               </a:rPr>
               <a:t>Photo, Activity 3: “Collapsed buildings in earthquake-hit Chautara, Nepal” by DFID - UK Department for International Development, CC BY 2.0, via Flickr (https://www.flickr.com/photos/14214150@N02/16693413433)</a:t>
+            </a:r>
+            <a:endParaRPr lang="en-US" sz="1800" dirty="0"/>
+          </a:p>
+          <a:p>
+            <a:pPr algn="l" marL="342900" indent="-342900">
+              <a:spcAft>
+                <a:spcPts val="800"/>
+              </a:spcAft>
+              <a:buSzPct val="100000"/>
+              <a:buChar char="•"/>
+            </a:pPr>
+            <a:r>
+              <a:rPr lang="en-US" sz="1800" dirty="0">
+                <a:solidFill>
+                  <a:srgbClr val="111111"/>
+                </a:solidFill>
+                <a:latin typeface="Calibri" pitchFamily="34" charset="0"/>
+                <a:ea typeface="Calibri" pitchFamily="34" charset="-122"/>
+                <a:cs typeface="Calibri" pitchFamily="34" charset="-120"/>
+              </a:rPr>
+              <a:t>Photo, board summary (Tsunamis and landslides): “Tsunami damage” by robertodevido, CC BY-NC-ND 2.0, via Flickr (https://www.flickr.com/photos/63082042@N00/5531541425)</a:t>
             </a:r>
             <a:endParaRPr lang="en-US" sz="1800" dirty="0"/>
           </a:p>
@@ -19664,226 +22816,7 @@
             <a:pPr algn="ctr"/>
             <a:fld id="{F7021451-1387-4CA6-816F-3879F97B5CBC}" type="slidenum">
               <a:rPr b="1" lang="en-US"/>
-              <a:t>49</a:t>
-            </a:fld>
-            <a:endParaRPr lang="en-US"/>
-          </a:p>
-        </p:txBody>
-      </p:sp>
-    </p:spTree>
-  </p:cSld>
-  <p:clrMapOvr>
-    <a:masterClrMapping/>
-  </p:clrMapOvr>
-</p:sld>
-</file>
-
-<file path=ppt/slides/slide5.xml><?xml version="1.0" encoding="utf-8"?>
-<p:sld xmlns:a="http://schemas.openxmlformats.org/drawingml/2006/main" xmlns:r="http://schemas.openxmlformats.org/officeDocument/2006/relationships" xmlns:p="http://schemas.openxmlformats.org/presentationml/2006/main">
-  <p:cSld name="Slide 5">
-    <p:spTree>
-      <p:nvGrpSpPr>
-        <p:cNvPr id="1" name=""/>
-        <p:cNvGrpSpPr/>
-        <p:nvPr/>
-      </p:nvGrpSpPr>
-      <p:grpSpPr>
-        <a:xfrm>
-          <a:off x="0" y="0"/>
-          <a:ext cx="0" cy="0"/>
-          <a:chOff x="0" y="0"/>
-          <a:chExt cx="0" cy="0"/>
-        </a:xfrm>
-      </p:grpSpPr>
-      <p:sp>
-        <p:nvSpPr>
-          <p:cNvPr id="2" name="Text 0"/>
-          <p:cNvSpPr/>
-          <p:nvPr/>
-        </p:nvSpPr>
-        <p:spPr>
-          <a:xfrm>
-            <a:off x="457200" y="713232"/>
-            <a:ext cx="11368735" cy="274320"/>
-          </a:xfrm>
-          <a:prstGeom prst="rect">
-            <a:avLst/>
-          </a:prstGeom>
-          <a:noFill/>
-          <a:ln/>
-        </p:spPr>
-        <p:txBody>
-          <a:bodyPr wrap="square" lIns="0" tIns="0" rIns="0" bIns="0" rtlCol="0" anchor="ctr"/>
-          <a:lstStyle/>
-          <a:p>
-            <a:pPr algn="r" indent="0" marL="0">
-              <a:buNone/>
-            </a:pPr>
-            <a:r>
-              <a:rPr lang="en-US" sz="1400" b="1" dirty="0">
-                <a:solidFill>
-                  <a:srgbClr val="1C3F6E"/>
-                </a:solidFill>
-                <a:latin typeface="Calibri" pitchFamily="34" charset="0"/>
-                <a:ea typeface="Calibri" pitchFamily="34" charset="-122"/>
-                <a:cs typeface="Calibri" pitchFamily="34" charset="-120"/>
-              </a:rPr>
-              <a:t>HOMEWORK CORRECTION</a:t>
-            </a:r>
-            <a:endParaRPr lang="en-US" sz="1400" dirty="0"/>
-          </a:p>
-        </p:txBody>
-      </p:sp>
-      <p:pic>
-        <p:nvPicPr>
-          <p:cNvPr id="3" name="Image 0" descr="/home/claude/f4/img/minesec_sheet.png">    </p:cNvPr>
-          <p:cNvPicPr>
-            <a:picLocks noChangeAspect="1"/>
-          </p:cNvPicPr>
-          <p:nvPr/>
-        </p:nvPicPr>
-        <p:blipFill>
-          <a:blip r:embed="rId1"/>
-          <a:stretch>
-            <a:fillRect/>
-          </a:stretch>
-        </p:blipFill>
-        <p:spPr>
-          <a:xfrm>
-            <a:off x="0" y="658368"/>
-            <a:ext cx="5120640" cy="5833872"/>
-          </a:xfrm>
-          <a:prstGeom prst="rect">
-            <a:avLst/>
-          </a:prstGeom>
-        </p:spPr>
-      </p:pic>
-      <p:sp>
-        <p:nvSpPr>
-          <p:cNvPr id="4" name="Text 1"/>
-          <p:cNvSpPr/>
-          <p:nvPr/>
-        </p:nvSpPr>
-        <p:spPr>
-          <a:xfrm>
-            <a:off x="5349240" y="1005840"/>
-            <a:ext cx="6522415" cy="731520"/>
-          </a:xfrm>
-          <a:prstGeom prst="rect">
-            <a:avLst/>
-          </a:prstGeom>
-          <a:noFill/>
-          <a:ln/>
-        </p:spPr>
-        <p:txBody>
-          <a:bodyPr wrap="square" lIns="0" tIns="0" rIns="0" bIns="0" rtlCol="0" anchor="ctr">
-            <a:normAutofit/>
-          </a:bodyPr>
-          <a:lstStyle/>
-          <a:p>
-            <a:pPr algn="ctr" indent="0" marL="0">
-              <a:buNone/>
-            </a:pPr>
-            <a:r>
-              <a:rPr lang="en-US" sz="3600" b="1" dirty="0">
-                <a:solidFill>
-                  <a:srgbClr val="990011"/>
-                </a:solidFill>
-                <a:latin typeface="Times New Roman" pitchFamily="34" charset="0"/>
-                <a:ea typeface="Times New Roman" pitchFamily="34" charset="-122"/>
-                <a:cs typeface="Times New Roman" pitchFamily="34" charset="-120"/>
-              </a:rPr>
-              <a:t>Correction: Possible Answer</a:t>
-            </a:r>
-            <a:endParaRPr lang="en-US" sz="3600" dirty="0"/>
-          </a:p>
-        </p:txBody>
-      </p:sp>
-      <p:sp>
-        <p:nvSpPr>
-          <p:cNvPr id="5" name="Text 2"/>
-          <p:cNvSpPr/>
-          <p:nvPr/>
-        </p:nvSpPr>
-        <p:spPr>
-          <a:xfrm>
-            <a:off x="5349240" y="1783080"/>
-            <a:ext cx="6522415" cy="4663440"/>
-          </a:xfrm>
-          <a:prstGeom prst="rect">
-            <a:avLst/>
-          </a:prstGeom>
-          <a:noFill/>
-          <a:ln/>
-        </p:spPr>
-        <p:txBody>
-          <a:bodyPr wrap="square" lIns="0" tIns="0" rIns="0" bIns="0" rtlCol="0" anchor="t"/>
-          <a:lstStyle/>
-          <a:p>
-            <a:pPr algn="l" indent="0" marL="0">
-              <a:spcAft>
-                <a:spcPts val="800"/>
-              </a:spcAft>
-              <a:buNone/>
-            </a:pPr>
-            <a:r>
-              <a:rPr lang="en-US" sz="4000" dirty="0">
-                <a:solidFill>
-                  <a:srgbClr val="111111"/>
-                </a:solidFill>
-                <a:latin typeface="Times New Roman" pitchFamily="34" charset="0"/>
-                <a:ea typeface="Times New Roman" pitchFamily="34" charset="-122"/>
-                <a:cs typeface="Times New Roman" pitchFamily="34" charset="-120"/>
-              </a:rPr>
-              <a:t>Answers vary. Example: in Buea, people felt the ground shake for a few seconds during the eruption of 1999; windows rattled and people ran outside.</a:t>
-            </a:r>
-            <a:endParaRPr lang="en-US" sz="4000" dirty="0"/>
-          </a:p>
-        </p:txBody>
-      </p:sp>
-      <p:sp>
-        <p:nvSpPr>
-          <p:cNvPr id="25" name="Slide Number Placeholder 0"/>
-          <p:cNvSpPr>
-            <a:spLocks noGrp="1"/>
-          </p:cNvSpPr>
-          <p:nvPr>
-            <p:ph type="sldNum" sz="quarter" idx="4294967295"/>
-          </p:nvPr>
-        </p:nvSpPr>
-        <p:spPr>
-          <a:xfrm>
-            <a:off x="27432" y="91440"/>
-            <a:ext cx="585216" cy="475488"/>
-          </a:xfrm>
-          <a:prstGeom prst="rect">
-            <a:avLst/>
-          </a:prstGeom>
-          <a:extLst>
-            <a:ext uri="{C572A759-6A51-4108-AA02-DFA0A04FC94B}">
-              <ma14:wrappingTextBoxFlag xmlns:ma14="http://schemas.microsoft.com/office/mac/drawingml/2011/main" val="0"/>
-            </a:ext>
-          </a:extLst>
-        </p:spPr>
-        <p:txBody>
-          <a:bodyPr/>
-          <a:lstStyle>
-            <a:lvl1pPr>
-              <a:defRPr sz="2000">
-                <a:solidFill>
-                  <a:srgbClr val="FFFFFF"/>
-                </a:solidFill>
-                <a:latin typeface="Calibri"/>
-                <a:ea typeface="Calibri"/>
-                <a:cs typeface="Calibri"/>
-              </a:defRPr>
-            </a:lvl1pPr>
-          </a:lstStyle>
-          <a:p>
-            <a:pPr algn="ctr"/>
-            <a:fld id="{F7021451-1387-4CA6-816F-3879F97B5CBC}" type="slidenum">
-              <a:rPr b="1" lang="en-US"/>
-              <a:t>5</a:t>
+              <a:t>57</a:t>
             </a:fld>
             <a:endParaRPr lang="en-US"/>
           </a:p>

--- a/lecons/F3/16_FORM4_LESSON13_Earthquakes.pptx
+++ b/lecons/F3/16_FORM4_LESSON13_Earthquakes.pptx
@@ -12911,7 +12911,7 @@
               <a:buNone/>
             </a:pPr>
             <a:r>
-              <a:rPr lang="en-US" sz="4000" b="1" dirty="0">
+              <a:rPr lang="en-US" sz="3200" b="1" dirty="0">
                 <a:solidFill>
                   <a:srgbClr val="111111"/>
                 </a:solidFill>
@@ -12921,7 +12921,7 @@
               </a:rPr>
               <a:t>Topic: The Structure of the Earth: Building Processes and Impacts on Man</a:t>
             </a:r>
-            <a:endParaRPr lang="en-US" sz="4000" dirty="0"/>
+            <a:endParaRPr lang="en-US" sz="3200" dirty="0"/>
           </a:p>
           <a:p>
             <a:pPr algn="l" indent="0" marL="0">
@@ -12931,7 +12931,7 @@
               <a:buNone/>
             </a:pPr>
             <a:r>
-              <a:rPr lang="en-US" sz="4000" b="1" dirty="0">
+              <a:rPr lang="en-US" sz="3200" b="1" dirty="0">
                 <a:solidFill>
                   <a:srgbClr val="111111"/>
                 </a:solidFill>
@@ -12941,7 +12941,7 @@
               </a:rPr>
               <a:t>Sub-topic: Seismic Activities and Man</a:t>
             </a:r>
-            <a:endParaRPr lang="en-US" sz="4000" dirty="0"/>
+            <a:endParaRPr lang="en-US" sz="3200" dirty="0"/>
           </a:p>
           <a:p>
             <a:pPr algn="l" indent="0" marL="0">
@@ -12951,7 +12951,7 @@
               <a:buNone/>
             </a:pPr>
             <a:r>
-              <a:rPr lang="en-US" sz="4000" b="1" dirty="0">
+              <a:rPr lang="en-US" sz="3200" b="1" dirty="0">
                 <a:solidFill>
                   <a:srgbClr val="990011"/>
                 </a:solidFill>
@@ -12961,7 +12961,7 @@
               </a:rPr>
               <a:t>Lesson 13: Earthquakes</a:t>
             </a:r>
-            <a:endParaRPr lang="en-US" sz="4000" dirty="0"/>
+            <a:endParaRPr lang="en-US" sz="3200" dirty="0"/>
           </a:p>
         </p:txBody>
       </p:sp>

--- a/lecons/F3/16_FORM4_LESSON13_Earthquakes.pptx
+++ b/lecons/F3/16_FORM4_LESSON13_Earthquakes.pptx
@@ -3462,7 +3462,7 @@
           <a:p>
             <a:r>
               <a:rPr lang="en-US" dirty="0"/>
-              <a:t>Before we start the new lesson, let us correct the homework I gave you at the end of Lesson 12: The Impact of Volcanicity on Man. The question was: Ask your parents if they have ever felt the ground shake. Write where and when it happened, and what they felt. Take out your exercise books.</a:t>
+              <a:t>Before we start the new lesson, let us correct the homework I gave you at the end of Lesson 12: The Impact of Volcanicity on Man. The question was: Define an earthquake. Take out your exercise books.</a:t>
             </a:r>
             <a:endParaRPr lang="en-US" dirty="0"/>
           </a:p>
@@ -4430,7 +4430,7 @@
           <a:p>
             <a:r>
               <a:rPr lang="en-US" dirty="0"/>
-              <a:t>Here is a good answer. Answers vary. Example: in Buea, people felt the ground shake for a few seconds during the eruption of 1999; windows rattled and people ran outside. Compare it with your own answer and correct your work in red.</a:t>
+              <a:t>Here is a good answer. It is a sudden shaking of the ground. Compare it with your own answer and correct your work in red.</a:t>
             </a:r>
             <a:endParaRPr lang="en-US" dirty="0"/>
           </a:p>
@@ -4606,7 +4606,7 @@
           <a:p>
             <a:r>
               <a:rPr lang="en-US" dirty="0"/>
-              <a:t>For your homework: After the next rain, look at the side of a road or a slope. Write what the running water did to the soil, and where the soil went. We shall correct it at the beginning of our next lesson.</a:t>
+              <a:t>For your homework: Name the three processes of denudation. We shall correct it at the beginning of our next lesson.</a:t>
             </a:r>
             <a:endParaRPr lang="en-US" dirty="0"/>
           </a:p>
@@ -15637,7 +15637,7 @@
         <p:spPr>
           <a:xfrm>
             <a:off x="0" y="658368"/>
-            <a:ext cx="3840480" cy="5833872"/>
+            <a:ext cx="5120640" cy="5833872"/>
           </a:xfrm>
           <a:prstGeom prst="rect">
             <a:avLst/>
@@ -15652,8 +15652,8 @@
         </p:nvSpPr>
         <p:spPr>
           <a:xfrm>
-            <a:off x="4069080" y="1005840"/>
-            <a:ext cx="7802575" cy="731520"/>
+            <a:off x="5349240" y="1005840"/>
+            <a:ext cx="6522415" cy="731520"/>
           </a:xfrm>
           <a:prstGeom prst="rect">
             <a:avLst/>
@@ -15693,8 +15693,8 @@
         </p:nvSpPr>
         <p:spPr>
           <a:xfrm>
-            <a:off x="4069080" y="1783080"/>
-            <a:ext cx="7802575" cy="4663440"/>
+            <a:off x="5349240" y="1783080"/>
+            <a:ext cx="6522415" cy="4663440"/>
           </a:xfrm>
           <a:prstGeom prst="rect">
             <a:avLst/>
@@ -15741,7 +15741,7 @@
                 <a:ea typeface="Times New Roman" pitchFamily="34" charset="-122"/>
                 <a:cs typeface="Times New Roman" pitchFamily="34" charset="-120"/>
               </a:rPr>
-              <a:t>Ask your parents if they have ever felt the ground shake. Write where and when it happened, and what they felt.</a:t>
+              <a:t>Define an earthquake.</a:t>
             </a:r>
             <a:endParaRPr lang="en-US" sz="4000" dirty="0"/>
           </a:p>
@@ -18412,7 +18412,7 @@
                 <a:ea typeface="Times New Roman" pitchFamily="34" charset="-122"/>
                 <a:cs typeface="Times New Roman" pitchFamily="34" charset="-120"/>
               </a:rPr>
-              <a:t>Answers vary. Example: in Buea, people felt the ground shake for a few seconds during the eruption of 1999; windows rattled and people ran outside.</a:t>
+              <a:t>It is a sudden shaking of the ground.</a:t>
             </a:r>
             <a:endParaRPr lang="en-US" sz="4000" dirty="0"/>
           </a:p>
@@ -18852,7 +18852,7 @@
                 <a:ea typeface="Times New Roman" pitchFamily="34" charset="-122"/>
                 <a:cs typeface="Times New Roman" pitchFamily="34" charset="-120"/>
               </a:rPr>
-              <a:t>After the next rain, look at the side of a road or a slope. Write what the running water did to the soil, and where the soil went.</a:t>
+              <a:t>Name the three processes of denudation.</a:t>
             </a:r>
             <a:endParaRPr lang="en-US" sz="4000" dirty="0"/>
           </a:p>
@@ -21792,7 +21792,7 @@
                           <a:ea typeface="Calibri" pitchFamily="34" charset="-122"/>
                           <a:cs typeface="Calibri" pitchFamily="34" charset="-120"/>
                         </a:rPr>
-                        <a:t>After the next rain, look at the side of a road or a slope. Write what the running water did to the soil, and where the soil went.</a:t>
+                        <a:t>Name the three processes of denudation.</a:t>
                       </a:r>
                       <a:endParaRPr lang="en-US" sz="1600" dirty="0">
                         <a:latin typeface="Calibri" charset="0"/>
